--- a/projects/bioplast-tech/BioPlast_Tech_taqdimot.pptx
+++ b/projects/bioplast-tech/BioPlast_Tech_taqdimot.pptx
@@ -21,9 +21,10 @@
     <p:sldId id="269" r:id="rId15"/>
     <p:sldId id="270" r:id="rId16"/>
     <p:sldId id="271" r:id="rId17"/>
+    <p:sldId id="272" r:id="rId18"/>
   </p:sldIdLst>
   <p:notesMasterIdLst>
-    <p:notesMasterId r:id="rId18"/>
+    <p:notesMasterId r:id="rId19"/>
   </p:notesMasterIdLst>
   <p:sldSz cx="12192000" cy="6858000"/>
   <p:notesSz cx="6858000" cy="12192000"/>
@@ -122,19 +123,19 @@
   <p:extLst>
     <p:ext uri="{521415D9-36F7-43E2-AB2F-B90AF26B5E84}">
       <p14:sectionLst xmlns:p14="http://schemas.microsoft.com/office/powerpoint/2010/main">
-        <p14:section name="Kirish" id="{3dd55947-ce1c-7dc4-903b-6709d02bcb9b}">
+        <p14:section name="Kirish" id="{4849971a-b1ce-c7c1-fde8-1965422dc8ff}">
           <p14:sldIdLst>
             <p14:sldId id="256"/>
           </p14:sldIdLst>
         </p14:section>
-        <p14:section name="Muammo va yechim" id="{bb901f05-1816-7029-a832-18924215fd24}">
+        <p14:section name="Muammo va yechim" id="{21585dfb-30d6-3a24-235f-39aed06a3edc}">
           <p14:sldIdLst>
             <p14:sldId id="257"/>
             <p14:sldId id="258"/>
             <p14:sldId id="259"/>
           </p14:sldIdLst>
         </p14:section>
-        <p14:section name="Texnologiya" id="{70bbd40a-86ca-6218-3e8d-5eb707035542}">
+        <p14:section name="Texnologiya" id="{54140c54-f3a8-57d7-d61a-9e6be6f5e14a}">
           <p14:sldIdLst>
             <p14:sldId id="260"/>
             <p14:sldId id="261"/>
@@ -142,28 +143,33 @@
             <p14:sldId id="263"/>
           </p14:sldIdLst>
         </p14:section>
-        <p14:section name="Uskunalar" id="{973013f1-64cc-109e-30de-b64c4d6513e1}">
+        <p14:section name="Joylashuv" id="{985d57c0-fda5-5e1e-d2ea-36d65435521e}">
           <p14:sldIdLst>
             <p14:sldId id="264"/>
-            <p14:sldId id="265"/>
           </p14:sldIdLst>
         </p14:section>
-        <p14:section name="Iqtisodiyot" id="{192d72e1-2017-2184-01cd-41e6e75d3e0c}">
+        <p14:section name="Uskunalar" id="{bbcde960-2f4a-dd3b-6d2f-634981d45b0f}">
           <p14:sldIdLst>
+            <p14:sldId id="265"/>
             <p14:sldId id="266"/>
+          </p14:sldIdLst>
+        </p14:section>
+        <p14:section name="Iqtisodiyot" id="{2395fc97-0080-aba8-98c3-3fcd00a00d2d}">
+          <p14:sldIdLst>
             <p14:sldId id="267"/>
             <p14:sldId id="268"/>
             <p14:sldId id="269"/>
-          </p14:sldIdLst>
-        </p14:section>
-        <p14:section name="Reja" id="{0f2e9a28-13ff-c886-018b-ee7ec68e5b9a}">
-          <p14:sldIdLst>
             <p14:sldId id="270"/>
           </p14:sldIdLst>
         </p14:section>
-        <p14:section name="Xulosa" id="{fe7f482e-77cf-9d66-30df-7764893db239}">
+        <p14:section name="Reja" id="{71b94728-478a-0e21-e2f7-8b92d12561be}">
           <p14:sldIdLst>
             <p14:sldId id="271"/>
+          </p14:sldIdLst>
+        </p14:section>
+        <p14:section name="Xulosa" id="{4d8486fc-c4ca-a864-cacf-48bfaa093bcb}">
+          <p14:sldIdLst>
+            <p14:sldId id="272"/>
           </p14:sldIdLst>
         </p14:section>
       </p14:sectionLst>
@@ -1936,6 +1942,94 @@
 </p:notes>
 </file>
 
+<file path=ppt/notesSlides/notesSlide17.xml><?xml version="1.0" encoding="utf-8"?>
+<p:notes xmlns:a="http://schemas.openxmlformats.org/drawingml/2006/main" xmlns:r="http://schemas.openxmlformats.org/officeDocument/2006/relationships" xmlns:p="http://schemas.openxmlformats.org/presentationml/2006/main">
+  <p:cSld>
+    <p:spTree>
+      <p:nvGrpSpPr>
+        <p:cNvPr id="1" name=""/>
+        <p:cNvGrpSpPr/>
+        <p:nvPr/>
+      </p:nvGrpSpPr>
+      <p:grpSpPr>
+        <a:xfrm>
+          <a:off x="0" y="0"/>
+          <a:ext cx="0" cy="0"/>
+          <a:chOff x="0" y="0"/>
+          <a:chExt cx="0" cy="0"/>
+        </a:xfrm>
+      </p:grpSpPr>
+      <p:sp>
+        <p:nvSpPr>
+          <p:cNvPr id="2" name="Slide Image Placeholder 1"/>
+          <p:cNvSpPr>
+            <a:spLocks noGrp="1" noRot="1" noChangeAspect="1"/>
+          </p:cNvSpPr>
+          <p:nvPr>
+            <p:ph type="sldImg"/>
+          </p:nvPr>
+        </p:nvSpPr>
+        <p:spPr/>
+      </p:sp>
+      <p:sp>
+        <p:nvSpPr>
+          <p:cNvPr id="3" name="Notes Placeholder 2"/>
+          <p:cNvSpPr>
+            <a:spLocks noGrp="1"/>
+          </p:cNvSpPr>
+          <p:nvPr>
+            <p:ph type="body" idx="1"/>
+          </p:nvPr>
+        </p:nvSpPr>
+        <p:spPr/>
+        <p:txBody>
+          <a:bodyPr/>
+          <a:lstStyle/>
+          <a:p>
+            <a:r>
+              <a:rPr lang="en-US" dirty="0"/>
+              <a:t/>
+            </a:r>
+            <a:endParaRPr lang="en-US" dirty="0"/>
+          </a:p>
+        </p:txBody>
+      </p:sp>
+      <p:sp>
+        <p:nvSpPr>
+          <p:cNvPr id="4" name="Slide Number Placeholder 3"/>
+          <p:cNvSpPr>
+            <a:spLocks noGrp="1"/>
+          </p:cNvSpPr>
+          <p:nvPr>
+            <p:ph type="sldNum" sz="quarter" idx="10"/>
+          </p:nvPr>
+        </p:nvSpPr>
+        <p:spPr/>
+        <p:txBody>
+          <a:bodyPr/>
+          <a:lstStyle/>
+          <a:p>
+            <a:fld id="{F7021451-1387-4CA6-816F-3879F97B5CBC}" type="slidenum">
+              <a:rPr lang="en-US"/>
+              <a:t>17</a:t>
+            </a:fld>
+            <a:endParaRPr lang="en-US"/>
+          </a:p>
+        </p:txBody>
+      </p:sp>
+    </p:spTree>
+    <p:extLst>
+      <p:ext uri="{BB962C8B-B14F-4D97-AF65-F5344CB8AC3E}">
+        <p14:creationId xmlns:p14="http://schemas.microsoft.com/office/powerpoint/2010/main" val="1024086991"/>
+      </p:ext>
+    </p:extLst>
+  </p:cSld>
+  <p:clrMapOvr>
+    <a:masterClrMapping/>
+  </p:clrMapOvr>
+</p:notes>
+</file>
+
 <file path=ppt/notesSlides/notesSlide2.xml><?xml version="1.0" encoding="utf-8"?>
 <p:notes xmlns:a="http://schemas.openxmlformats.org/drawingml/2006/main" xmlns:r="http://schemas.openxmlformats.org/officeDocument/2006/relationships" xmlns:p="http://schemas.openxmlformats.org/presentationml/2006/main">
   <p:cSld>
@@ -3623,49 +3717,2252 @@
                   <a:schemeClr val="tx2"/>
                 </a:solidFill>
               </a:rPr>
-              <a:t>Uskuna rasmlarini qayerdan olish mumkin</a:t>
+              <a:t>Asosiy uskunalar va yetkazib beruvchilar</a:t>
             </a:r>
             <a:endParaRPr lang="en-US" sz="3400" dirty="0"/>
           </a:p>
         </p:txBody>
       </p:sp>
-      <p:sp>
-        <p:nvSpPr>
-          <p:cNvPr id="3" name="src 0"/>
-          <p:cNvSpPr/>
-          <p:nvPr/>
-        </p:nvSpPr>
-        <p:spPr>
-          <a:xfrm>
-            <a:off x="548640" y="1371600"/>
-            <a:ext cx="5440680" cy="2103120"/>
-          </a:xfrm>
-          <a:prstGeom prst="roundRect">
-            <a:avLst>
-              <a:gd name="adj" fmla="val 5217"/>
-            </a:avLst>
-          </a:prstGeom>
-          <a:solidFill>
-            <a:schemeClr val="bg2"/>
-          </a:solidFill>
-          <a:ln w="12700">
-            <a:solidFill>
-              <a:schemeClr val="bg2"/>
-            </a:solidFill>
-            <a:prstDash val="solid"/>
-          </a:ln>
-        </p:spPr>
-      </p:sp>
-      <p:sp>
-        <p:nvSpPr>
-          <p:cNvPr id="4" name="Text 2"/>
+      <p:graphicFrame>
+        <p:nvGraphicFramePr>
+          <p:cNvPr id="11" name="table"/>
+          <p:cNvGraphicFramePr>
+            <a:graphicFrameLocks noGrp="1"/>
+          </p:cNvGraphicFramePr>
+          <p:nvPr>
+            <p:extLst>
+              <p:ext uri="{D42A27DB-BD31-4B8C-83A1-F6EECF244321}">
+                <p14:modId xmlns:p14="http://schemas.microsoft.com/office/powerpoint/2010/main" val="1579011935"/>
+              </p:ext>
+            </p:extLst>
+          </p:nvPr>
+        </p:nvGraphicFramePr>
+        <p:xfrm>
+          <a:off x="548640" y="1325880"/>
+          <a:ext cx="11064240" cy="914400"/>
+        </p:xfrm>
+        <a:graphic>
+          <a:graphicData uri="http://schemas.openxmlformats.org/drawingml/2006/table">
+            <a:tbl>
+              <a:tblPr/>
+              <a:tblGrid>
+                <a:gridCol w="4572000"/>
+                <a:gridCol w="822960"/>
+                <a:gridCol w="1463040"/>
+                <a:gridCol w="4206240"/>
+              </a:tblGrid>
+              <a:tr h="457200">
+                <a:tc>
+                  <a:txBody>
+                    <a:bodyPr/>
+                    <a:lstStyle/>
+                    <a:p>
+                      <a:pPr indent="0" marL="0">
+                        <a:buNone/>
+                      </a:pPr>
+                      <a:r>
+                        <a:rPr lang="en-US" sz="1300" b="1" dirty="0">
+                          <a:solidFill>
+                            <a:srgbClr val="FFFFFF"/>
+                          </a:solidFill>
+                        </a:rPr>
+                        <a:t>Uskuna guruhi</a:t>
+                      </a:r>
+                      <a:endParaRPr lang="en-US" sz="1300" dirty="0"/>
+                    </a:p>
+                  </a:txBody>
+                  <a:tcPr marL="76200" marR="76200" marT="38100" marB="38100" anchor="ctr">
+                    <a:lnL w="6350" cap="flat" cmpd="sng" algn="ctr">
+                      <a:solidFill>
+                        <a:srgbClr val="C9D6DD"/>
+                      </a:solidFill>
+                      <a:prstDash val="solid"/>
+                      <a:round/>
+                      <a:headEnd type="none" w="med" len="med"/>
+                      <a:tailEnd type="none" w="med" len="med"/>
+                    </a:lnL>
+                    <a:lnR w="6350" cap="flat" cmpd="sng" algn="ctr">
+                      <a:solidFill>
+                        <a:srgbClr val="C9D6DD"/>
+                      </a:solidFill>
+                      <a:prstDash val="solid"/>
+                      <a:round/>
+                      <a:headEnd type="none" w="med" len="med"/>
+                      <a:tailEnd type="none" w="med" len="med"/>
+                    </a:lnR>
+                    <a:lnT w="6350" cap="flat" cmpd="sng" algn="ctr">
+                      <a:solidFill>
+                        <a:srgbClr val="C9D6DD"/>
+                      </a:solidFill>
+                      <a:prstDash val="solid"/>
+                      <a:round/>
+                      <a:headEnd type="none" w="med" len="med"/>
+                      <a:tailEnd type="none" w="med" len="med"/>
+                    </a:lnT>
+                    <a:lnB w="6350" cap="flat" cmpd="sng" algn="ctr">
+                      <a:solidFill>
+                        <a:srgbClr val="C9D6DD"/>
+                      </a:solidFill>
+                      <a:prstDash val="solid"/>
+                      <a:round/>
+                      <a:headEnd type="none" w="med" len="med"/>
+                      <a:tailEnd type="none" w="med" len="med"/>
+                    </a:lnB>
+                    <a:solidFill>
+                      <a:srgbClr val="1F8A70"/>
+                    </a:solidFill>
+                  </a:tcPr>
+                </a:tc>
+                <a:tc>
+                  <a:txBody>
+                    <a:bodyPr/>
+                    <a:lstStyle/>
+                    <a:p>
+                      <a:pPr indent="0" marL="0">
+                        <a:buNone/>
+                      </a:pPr>
+                      <a:r>
+                        <a:rPr lang="en-US" sz="1300" b="1" dirty="0">
+                          <a:solidFill>
+                            <a:srgbClr val="FFFFFF"/>
+                          </a:solidFill>
+                        </a:rPr>
+                        <a:t>Faza</a:t>
+                      </a:r>
+                      <a:endParaRPr lang="en-US" sz="1300" dirty="0"/>
+                    </a:p>
+                  </a:txBody>
+                  <a:tcPr marL="76200" marR="76200" marT="38100" marB="38100" anchor="ctr">
+                    <a:lnL w="6350" cap="flat" cmpd="sng" algn="ctr">
+                      <a:solidFill>
+                        <a:srgbClr val="C9D6DD"/>
+                      </a:solidFill>
+                      <a:prstDash val="solid"/>
+                      <a:round/>
+                      <a:headEnd type="none" w="med" len="med"/>
+                      <a:tailEnd type="none" w="med" len="med"/>
+                    </a:lnL>
+                    <a:lnR w="6350" cap="flat" cmpd="sng" algn="ctr">
+                      <a:solidFill>
+                        <a:srgbClr val="C9D6DD"/>
+                      </a:solidFill>
+                      <a:prstDash val="solid"/>
+                      <a:round/>
+                      <a:headEnd type="none" w="med" len="med"/>
+                      <a:tailEnd type="none" w="med" len="med"/>
+                    </a:lnR>
+                    <a:lnT w="6350" cap="flat" cmpd="sng" algn="ctr">
+                      <a:solidFill>
+                        <a:srgbClr val="C9D6DD"/>
+                      </a:solidFill>
+                      <a:prstDash val="solid"/>
+                      <a:round/>
+                      <a:headEnd type="none" w="med" len="med"/>
+                      <a:tailEnd type="none" w="med" len="med"/>
+                    </a:lnT>
+                    <a:lnB w="6350" cap="flat" cmpd="sng" algn="ctr">
+                      <a:solidFill>
+                        <a:srgbClr val="C9D6DD"/>
+                      </a:solidFill>
+                      <a:prstDash val="solid"/>
+                      <a:round/>
+                      <a:headEnd type="none" w="med" len="med"/>
+                      <a:tailEnd type="none" w="med" len="med"/>
+                    </a:lnB>
+                    <a:solidFill>
+                      <a:srgbClr val="1F8A70"/>
+                    </a:solidFill>
+                  </a:tcPr>
+                </a:tc>
+                <a:tc>
+                  <a:txBody>
+                    <a:bodyPr/>
+                    <a:lstStyle/>
+                    <a:p>
+                      <a:pPr indent="0" marL="0">
+                        <a:buNone/>
+                      </a:pPr>
+                      <a:r>
+                        <a:rPr lang="en-US" sz="1300" b="1" dirty="0">
+                          <a:solidFill>
+                            <a:srgbClr val="FFFFFF"/>
+                          </a:solidFill>
+                        </a:rPr>
+                        <a:t>Narx</a:t>
+                      </a:r>
+                      <a:endParaRPr lang="en-US" sz="1300" dirty="0"/>
+                    </a:p>
+                  </a:txBody>
+                  <a:tcPr marL="76200" marR="76200" marT="38100" marB="38100" anchor="ctr">
+                    <a:lnL w="6350" cap="flat" cmpd="sng" algn="ctr">
+                      <a:solidFill>
+                        <a:srgbClr val="C9D6DD"/>
+                      </a:solidFill>
+                      <a:prstDash val="solid"/>
+                      <a:round/>
+                      <a:headEnd type="none" w="med" len="med"/>
+                      <a:tailEnd type="none" w="med" len="med"/>
+                    </a:lnL>
+                    <a:lnR w="6350" cap="flat" cmpd="sng" algn="ctr">
+                      <a:solidFill>
+                        <a:srgbClr val="C9D6DD"/>
+                      </a:solidFill>
+                      <a:prstDash val="solid"/>
+                      <a:round/>
+                      <a:headEnd type="none" w="med" len="med"/>
+                      <a:tailEnd type="none" w="med" len="med"/>
+                    </a:lnR>
+                    <a:lnT w="6350" cap="flat" cmpd="sng" algn="ctr">
+                      <a:solidFill>
+                        <a:srgbClr val="C9D6DD"/>
+                      </a:solidFill>
+                      <a:prstDash val="solid"/>
+                      <a:round/>
+                      <a:headEnd type="none" w="med" len="med"/>
+                      <a:tailEnd type="none" w="med" len="med"/>
+                    </a:lnT>
+                    <a:lnB w="6350" cap="flat" cmpd="sng" algn="ctr">
+                      <a:solidFill>
+                        <a:srgbClr val="C9D6DD"/>
+                      </a:solidFill>
+                      <a:prstDash val="solid"/>
+                      <a:round/>
+                      <a:headEnd type="none" w="med" len="med"/>
+                      <a:tailEnd type="none" w="med" len="med"/>
+                    </a:lnB>
+                    <a:solidFill>
+                      <a:srgbClr val="1F8A70"/>
+                    </a:solidFill>
+                  </a:tcPr>
+                </a:tc>
+                <a:tc>
+                  <a:txBody>
+                    <a:bodyPr/>
+                    <a:lstStyle/>
+                    <a:p>
+                      <a:pPr indent="0" marL="0">
+                        <a:buNone/>
+                      </a:pPr>
+                      <a:r>
+                        <a:rPr lang="en-US" sz="1300" b="1" dirty="0">
+                          <a:solidFill>
+                            <a:srgbClr val="FFFFFF"/>
+                          </a:solidFill>
+                        </a:rPr>
+                        <a:t>Yetkazib beruvchilar (misol)</a:t>
+                      </a:r>
+                      <a:endParaRPr lang="en-US" sz="1300" dirty="0"/>
+                    </a:p>
+                  </a:txBody>
+                  <a:tcPr marL="76200" marR="76200" marT="38100" marB="38100" anchor="ctr">
+                    <a:lnL w="6350" cap="flat" cmpd="sng" algn="ctr">
+                      <a:solidFill>
+                        <a:srgbClr val="C9D6DD"/>
+                      </a:solidFill>
+                      <a:prstDash val="solid"/>
+                      <a:round/>
+                      <a:headEnd type="none" w="med" len="med"/>
+                      <a:tailEnd type="none" w="med" len="med"/>
+                    </a:lnL>
+                    <a:lnR w="6350" cap="flat" cmpd="sng" algn="ctr">
+                      <a:solidFill>
+                        <a:srgbClr val="C9D6DD"/>
+                      </a:solidFill>
+                      <a:prstDash val="solid"/>
+                      <a:round/>
+                      <a:headEnd type="none" w="med" len="med"/>
+                      <a:tailEnd type="none" w="med" len="med"/>
+                    </a:lnR>
+                    <a:lnT w="6350" cap="flat" cmpd="sng" algn="ctr">
+                      <a:solidFill>
+                        <a:srgbClr val="C9D6DD"/>
+                      </a:solidFill>
+                      <a:prstDash val="solid"/>
+                      <a:round/>
+                      <a:headEnd type="none" w="med" len="med"/>
+                      <a:tailEnd type="none" w="med" len="med"/>
+                    </a:lnT>
+                    <a:lnB w="6350" cap="flat" cmpd="sng" algn="ctr">
+                      <a:solidFill>
+                        <a:srgbClr val="C9D6DD"/>
+                      </a:solidFill>
+                      <a:prstDash val="solid"/>
+                      <a:round/>
+                      <a:headEnd type="none" w="med" len="med"/>
+                      <a:tailEnd type="none" w="med" len="med"/>
+                    </a:lnB>
+                    <a:solidFill>
+                      <a:srgbClr val="1F8A70"/>
+                    </a:solidFill>
+                  </a:tcPr>
+                </a:tc>
+              </a:tr>
+              <a:tr h="457200">
+                <a:tc>
+                  <a:txBody>
+                    <a:bodyPr/>
+                    <a:lstStyle/>
+                    <a:p>
+                      <a:pPr algn="l" indent="0" marL="0">
+                        <a:buNone/>
+                      </a:pPr>
+                      <a:r>
+                        <a:rPr lang="en-US" sz="1300" dirty="0">
+                          <a:solidFill>
+                            <a:srgbClr val="14232E"/>
+                          </a:solidFill>
+                        </a:rPr>
+                        <a:t>Laboratoriya: 5 L bioreaktorlar, GC-FID, avtoklav, shaker</a:t>
+                      </a:r>
+                      <a:endParaRPr lang="en-US" sz="1300" dirty="0"/>
+                    </a:p>
+                  </a:txBody>
+                  <a:tcPr marL="76200" marR="76200" marT="38100" marB="38100" anchor="ctr">
+                    <a:lnL w="6350" cap="flat" cmpd="sng" algn="ctr">
+                      <a:solidFill>
+                        <a:srgbClr val="C9D6DD"/>
+                      </a:solidFill>
+                      <a:prstDash val="solid"/>
+                      <a:round/>
+                      <a:headEnd type="none" w="med" len="med"/>
+                      <a:tailEnd type="none" w="med" len="med"/>
+                    </a:lnL>
+                    <a:lnR w="6350" cap="flat" cmpd="sng" algn="ctr">
+                      <a:solidFill>
+                        <a:srgbClr val="C9D6DD"/>
+                      </a:solidFill>
+                      <a:prstDash val="solid"/>
+                      <a:round/>
+                      <a:headEnd type="none" w="med" len="med"/>
+                      <a:tailEnd type="none" w="med" len="med"/>
+                    </a:lnR>
+                    <a:lnT w="6350" cap="flat" cmpd="sng" algn="ctr">
+                      <a:solidFill>
+                        <a:srgbClr val="C9D6DD"/>
+                      </a:solidFill>
+                      <a:prstDash val="solid"/>
+                      <a:round/>
+                      <a:headEnd type="none" w="med" len="med"/>
+                      <a:tailEnd type="none" w="med" len="med"/>
+                    </a:lnT>
+                    <a:lnB w="6350" cap="flat" cmpd="sng" algn="ctr">
+                      <a:solidFill>
+                        <a:srgbClr val="C9D6DD"/>
+                      </a:solidFill>
+                      <a:prstDash val="solid"/>
+                      <a:round/>
+                      <a:headEnd type="none" w="med" len="med"/>
+                      <a:tailEnd type="none" w="med" len="med"/>
+                    </a:lnB>
+                    <a:solidFill>
+                      <a:srgbClr val="FFFFFF"/>
+                    </a:solidFill>
+                  </a:tcPr>
+                </a:tc>
+                <a:tc>
+                  <a:txBody>
+                    <a:bodyPr/>
+                    <a:lstStyle/>
+                    <a:p>
+                      <a:pPr algn="l" indent="0" marL="0">
+                        <a:buNone/>
+                      </a:pPr>
+                      <a:r>
+                        <a:rPr lang="en-US" sz="1300" dirty="0">
+                          <a:solidFill>
+                            <a:srgbClr val="14232E"/>
+                          </a:solidFill>
+                        </a:rPr>
+                        <a:t>1</a:t>
+                      </a:r>
+                      <a:endParaRPr lang="en-US" sz="1300" dirty="0"/>
+                    </a:p>
+                  </a:txBody>
+                  <a:tcPr marL="76200" marR="76200" marT="38100" marB="38100" anchor="ctr">
+                    <a:lnL w="6350" cap="flat" cmpd="sng" algn="ctr">
+                      <a:solidFill>
+                        <a:srgbClr val="C9D6DD"/>
+                      </a:solidFill>
+                      <a:prstDash val="solid"/>
+                      <a:round/>
+                      <a:headEnd type="none" w="med" len="med"/>
+                      <a:tailEnd type="none" w="med" len="med"/>
+                    </a:lnL>
+                    <a:lnR w="6350" cap="flat" cmpd="sng" algn="ctr">
+                      <a:solidFill>
+                        <a:srgbClr val="C9D6DD"/>
+                      </a:solidFill>
+                      <a:prstDash val="solid"/>
+                      <a:round/>
+                      <a:headEnd type="none" w="med" len="med"/>
+                      <a:tailEnd type="none" w="med" len="med"/>
+                    </a:lnR>
+                    <a:lnT w="6350" cap="flat" cmpd="sng" algn="ctr">
+                      <a:solidFill>
+                        <a:srgbClr val="C9D6DD"/>
+                      </a:solidFill>
+                      <a:prstDash val="solid"/>
+                      <a:round/>
+                      <a:headEnd type="none" w="med" len="med"/>
+                      <a:tailEnd type="none" w="med" len="med"/>
+                    </a:lnT>
+                    <a:lnB w="6350" cap="flat" cmpd="sng" algn="ctr">
+                      <a:solidFill>
+                        <a:srgbClr val="C9D6DD"/>
+                      </a:solidFill>
+                      <a:prstDash val="solid"/>
+                      <a:round/>
+                      <a:headEnd type="none" w="med" len="med"/>
+                      <a:tailEnd type="none" w="med" len="med"/>
+                    </a:lnB>
+                    <a:solidFill>
+                      <a:srgbClr val="FFFFFF"/>
+                    </a:solidFill>
+                  </a:tcPr>
+                </a:tc>
+                <a:tc>
+                  <a:txBody>
+                    <a:bodyPr/>
+                    <a:lstStyle/>
+                    <a:p>
+                      <a:pPr algn="r" indent="0" marL="0">
+                        <a:buNone/>
+                      </a:pPr>
+                      <a:r>
+                        <a:rPr lang="en-US" sz="1300" dirty="0">
+                          <a:solidFill>
+                            <a:srgbClr val="14232E"/>
+                          </a:solidFill>
+                        </a:rPr>
+                        <a:t>$109 500</a:t>
+                      </a:r>
+                      <a:endParaRPr lang="en-US" sz="1300" dirty="0"/>
+                    </a:p>
+                  </a:txBody>
+                  <a:tcPr marL="76200" marR="76200" marT="38100" marB="38100" anchor="ctr">
+                    <a:lnL w="6350" cap="flat" cmpd="sng" algn="ctr">
+                      <a:solidFill>
+                        <a:srgbClr val="C9D6DD"/>
+                      </a:solidFill>
+                      <a:prstDash val="solid"/>
+                      <a:round/>
+                      <a:headEnd type="none" w="med" len="med"/>
+                      <a:tailEnd type="none" w="med" len="med"/>
+                    </a:lnL>
+                    <a:lnR w="6350" cap="flat" cmpd="sng" algn="ctr">
+                      <a:solidFill>
+                        <a:srgbClr val="C9D6DD"/>
+                      </a:solidFill>
+                      <a:prstDash val="solid"/>
+                      <a:round/>
+                      <a:headEnd type="none" w="med" len="med"/>
+                      <a:tailEnd type="none" w="med" len="med"/>
+                    </a:lnR>
+                    <a:lnT w="6350" cap="flat" cmpd="sng" algn="ctr">
+                      <a:solidFill>
+                        <a:srgbClr val="C9D6DD"/>
+                      </a:solidFill>
+                      <a:prstDash val="solid"/>
+                      <a:round/>
+                      <a:headEnd type="none" w="med" len="med"/>
+                      <a:tailEnd type="none" w="med" len="med"/>
+                    </a:lnT>
+                    <a:lnB w="6350" cap="flat" cmpd="sng" algn="ctr">
+                      <a:solidFill>
+                        <a:srgbClr val="C9D6DD"/>
+                      </a:solidFill>
+                      <a:prstDash val="solid"/>
+                      <a:round/>
+                      <a:headEnd type="none" w="med" len="med"/>
+                      <a:tailEnd type="none" w="med" len="med"/>
+                    </a:lnB>
+                    <a:solidFill>
+                      <a:srgbClr val="FFFFFF"/>
+                    </a:solidFill>
+                  </a:tcPr>
+                </a:tc>
+                <a:tc>
+                  <a:txBody>
+                    <a:bodyPr/>
+                    <a:lstStyle/>
+                    <a:p>
+                      <a:pPr algn="l" indent="0" marL="0">
+                        <a:buNone/>
+                      </a:pPr>
+                      <a:r>
+                        <a:rPr lang="en-US" sz="1300" dirty="0">
+                          <a:solidFill>
+                            <a:srgbClr val="14232E"/>
+                          </a:solidFill>
+                        </a:rPr>
+                        <a:t>Sartorius, Eppendorf, Agilent, Shimadzu</a:t>
+                      </a:r>
+                      <a:endParaRPr lang="en-US" sz="1300" dirty="0"/>
+                    </a:p>
+                  </a:txBody>
+                  <a:tcPr marL="76200" marR="76200" marT="38100" marB="38100" anchor="ctr">
+                    <a:lnL w="6350" cap="flat" cmpd="sng" algn="ctr">
+                      <a:solidFill>
+                        <a:srgbClr val="C9D6DD"/>
+                      </a:solidFill>
+                      <a:prstDash val="solid"/>
+                      <a:round/>
+                      <a:headEnd type="none" w="med" len="med"/>
+                      <a:tailEnd type="none" w="med" len="med"/>
+                    </a:lnL>
+                    <a:lnR w="6350" cap="flat" cmpd="sng" algn="ctr">
+                      <a:solidFill>
+                        <a:srgbClr val="C9D6DD"/>
+                      </a:solidFill>
+                      <a:prstDash val="solid"/>
+                      <a:round/>
+                      <a:headEnd type="none" w="med" len="med"/>
+                      <a:tailEnd type="none" w="med" len="med"/>
+                    </a:lnR>
+                    <a:lnT w="6350" cap="flat" cmpd="sng" algn="ctr">
+                      <a:solidFill>
+                        <a:srgbClr val="C9D6DD"/>
+                      </a:solidFill>
+                      <a:prstDash val="solid"/>
+                      <a:round/>
+                      <a:headEnd type="none" w="med" len="med"/>
+                      <a:tailEnd type="none" w="med" len="med"/>
+                    </a:lnT>
+                    <a:lnB w="6350" cap="flat" cmpd="sng" algn="ctr">
+                      <a:solidFill>
+                        <a:srgbClr val="C9D6DD"/>
+                      </a:solidFill>
+                      <a:prstDash val="solid"/>
+                      <a:round/>
+                      <a:headEnd type="none" w="med" len="med"/>
+                      <a:tailEnd type="none" w="med" len="med"/>
+                    </a:lnB>
+                    <a:solidFill>
+                      <a:srgbClr val="FFFFFF"/>
+                    </a:solidFill>
+                  </a:tcPr>
+                </a:tc>
+              </a:tr>
+              <a:tr h="457200">
+                <a:tc>
+                  <a:txBody>
+                    <a:bodyPr/>
+                    <a:lstStyle/>
+                    <a:p>
+                      <a:pPr algn="l" indent="0" marL="0">
+                        <a:buNone/>
+                      </a:pPr>
+                      <a:r>
+                        <a:rPr lang="en-US" sz="1300" dirty="0">
+                          <a:solidFill>
+                            <a:srgbClr val="14232E"/>
+                          </a:solidFill>
+                        </a:rPr>
+                        <a:t>Pilot fermenter 300 L + pilot ajratish</a:t>
+                      </a:r>
+                      <a:endParaRPr lang="en-US" sz="1300" dirty="0"/>
+                    </a:p>
+                  </a:txBody>
+                  <a:tcPr marL="76200" marR="76200" marT="38100" marB="38100" anchor="ctr">
+                    <a:lnL w="6350" cap="flat" cmpd="sng" algn="ctr">
+                      <a:solidFill>
+                        <a:srgbClr val="C9D6DD"/>
+                      </a:solidFill>
+                      <a:prstDash val="solid"/>
+                      <a:round/>
+                      <a:headEnd type="none" w="med" len="med"/>
+                      <a:tailEnd type="none" w="med" len="med"/>
+                    </a:lnL>
+                    <a:lnR w="6350" cap="flat" cmpd="sng" algn="ctr">
+                      <a:solidFill>
+                        <a:srgbClr val="C9D6DD"/>
+                      </a:solidFill>
+                      <a:prstDash val="solid"/>
+                      <a:round/>
+                      <a:headEnd type="none" w="med" len="med"/>
+                      <a:tailEnd type="none" w="med" len="med"/>
+                    </a:lnR>
+                    <a:lnT w="6350" cap="flat" cmpd="sng" algn="ctr">
+                      <a:solidFill>
+                        <a:srgbClr val="C9D6DD"/>
+                      </a:solidFill>
+                      <a:prstDash val="solid"/>
+                      <a:round/>
+                      <a:headEnd type="none" w="med" len="med"/>
+                      <a:tailEnd type="none" w="med" len="med"/>
+                    </a:lnT>
+                    <a:lnB w="6350" cap="flat" cmpd="sng" algn="ctr">
+                      <a:solidFill>
+                        <a:srgbClr val="C9D6DD"/>
+                      </a:solidFill>
+                      <a:prstDash val="solid"/>
+                      <a:round/>
+                      <a:headEnd type="none" w="med" len="med"/>
+                      <a:tailEnd type="none" w="med" len="med"/>
+                    </a:lnB>
+                    <a:solidFill>
+                      <a:srgbClr val="EAF3F1"/>
+                    </a:solidFill>
+                  </a:tcPr>
+                </a:tc>
+                <a:tc>
+                  <a:txBody>
+                    <a:bodyPr/>
+                    <a:lstStyle/>
+                    <a:p>
+                      <a:pPr algn="l" indent="0" marL="0">
+                        <a:buNone/>
+                      </a:pPr>
+                      <a:r>
+                        <a:rPr lang="en-US" sz="1300" dirty="0">
+                          <a:solidFill>
+                            <a:srgbClr val="14232E"/>
+                          </a:solidFill>
+                        </a:rPr>
+                        <a:t>1</a:t>
+                      </a:r>
+                      <a:endParaRPr lang="en-US" sz="1300" dirty="0"/>
+                    </a:p>
+                  </a:txBody>
+                  <a:tcPr marL="76200" marR="76200" marT="38100" marB="38100" anchor="ctr">
+                    <a:lnL w="6350" cap="flat" cmpd="sng" algn="ctr">
+                      <a:solidFill>
+                        <a:srgbClr val="C9D6DD"/>
+                      </a:solidFill>
+                      <a:prstDash val="solid"/>
+                      <a:round/>
+                      <a:headEnd type="none" w="med" len="med"/>
+                      <a:tailEnd type="none" w="med" len="med"/>
+                    </a:lnL>
+                    <a:lnR w="6350" cap="flat" cmpd="sng" algn="ctr">
+                      <a:solidFill>
+                        <a:srgbClr val="C9D6DD"/>
+                      </a:solidFill>
+                      <a:prstDash val="solid"/>
+                      <a:round/>
+                      <a:headEnd type="none" w="med" len="med"/>
+                      <a:tailEnd type="none" w="med" len="med"/>
+                    </a:lnR>
+                    <a:lnT w="6350" cap="flat" cmpd="sng" algn="ctr">
+                      <a:solidFill>
+                        <a:srgbClr val="C9D6DD"/>
+                      </a:solidFill>
+                      <a:prstDash val="solid"/>
+                      <a:round/>
+                      <a:headEnd type="none" w="med" len="med"/>
+                      <a:tailEnd type="none" w="med" len="med"/>
+                    </a:lnT>
+                    <a:lnB w="6350" cap="flat" cmpd="sng" algn="ctr">
+                      <a:solidFill>
+                        <a:srgbClr val="C9D6DD"/>
+                      </a:solidFill>
+                      <a:prstDash val="solid"/>
+                      <a:round/>
+                      <a:headEnd type="none" w="med" len="med"/>
+                      <a:tailEnd type="none" w="med" len="med"/>
+                    </a:lnB>
+                    <a:solidFill>
+                      <a:srgbClr val="EAF3F1"/>
+                    </a:solidFill>
+                  </a:tcPr>
+                </a:tc>
+                <a:tc>
+                  <a:txBody>
+                    <a:bodyPr/>
+                    <a:lstStyle/>
+                    <a:p>
+                      <a:pPr algn="r" indent="0" marL="0">
+                        <a:buNone/>
+                      </a:pPr>
+                      <a:r>
+                        <a:rPr lang="en-US" sz="1300" dirty="0">
+                          <a:solidFill>
+                            <a:srgbClr val="14232E"/>
+                          </a:solidFill>
+                        </a:rPr>
+                        <a:t>$67 000</a:t>
+                      </a:r>
+                      <a:endParaRPr lang="en-US" sz="1300" dirty="0"/>
+                    </a:p>
+                  </a:txBody>
+                  <a:tcPr marL="76200" marR="76200" marT="38100" marB="38100" anchor="ctr">
+                    <a:lnL w="6350" cap="flat" cmpd="sng" algn="ctr">
+                      <a:solidFill>
+                        <a:srgbClr val="C9D6DD"/>
+                      </a:solidFill>
+                      <a:prstDash val="solid"/>
+                      <a:round/>
+                      <a:headEnd type="none" w="med" len="med"/>
+                      <a:tailEnd type="none" w="med" len="med"/>
+                    </a:lnL>
+                    <a:lnR w="6350" cap="flat" cmpd="sng" algn="ctr">
+                      <a:solidFill>
+                        <a:srgbClr val="C9D6DD"/>
+                      </a:solidFill>
+                      <a:prstDash val="solid"/>
+                      <a:round/>
+                      <a:headEnd type="none" w="med" len="med"/>
+                      <a:tailEnd type="none" w="med" len="med"/>
+                    </a:lnR>
+                    <a:lnT w="6350" cap="flat" cmpd="sng" algn="ctr">
+                      <a:solidFill>
+                        <a:srgbClr val="C9D6DD"/>
+                      </a:solidFill>
+                      <a:prstDash val="solid"/>
+                      <a:round/>
+                      <a:headEnd type="none" w="med" len="med"/>
+                      <a:tailEnd type="none" w="med" len="med"/>
+                    </a:lnT>
+                    <a:lnB w="6350" cap="flat" cmpd="sng" algn="ctr">
+                      <a:solidFill>
+                        <a:srgbClr val="C9D6DD"/>
+                      </a:solidFill>
+                      <a:prstDash val="solid"/>
+                      <a:round/>
+                      <a:headEnd type="none" w="med" len="med"/>
+                      <a:tailEnd type="none" w="med" len="med"/>
+                    </a:lnB>
+                    <a:solidFill>
+                      <a:srgbClr val="EAF3F1"/>
+                    </a:solidFill>
+                  </a:tcPr>
+                </a:tc>
+                <a:tc>
+                  <a:txBody>
+                    <a:bodyPr/>
+                    <a:lstStyle/>
+                    <a:p>
+                      <a:pPr algn="l" indent="0" marL="0">
+                        <a:buNone/>
+                      </a:pPr>
+                      <a:r>
+                        <a:rPr lang="en-US" sz="1300" dirty="0">
+                          <a:solidFill>
+                            <a:srgbClr val="14232E"/>
+                          </a:solidFill>
+                        </a:rPr>
+                        <a:t>Bailun, T&amp;J Bio-engineering</a:t>
+                      </a:r>
+                      <a:endParaRPr lang="en-US" sz="1300" dirty="0"/>
+                    </a:p>
+                  </a:txBody>
+                  <a:tcPr marL="76200" marR="76200" marT="38100" marB="38100" anchor="ctr">
+                    <a:lnL w="6350" cap="flat" cmpd="sng" algn="ctr">
+                      <a:solidFill>
+                        <a:srgbClr val="C9D6DD"/>
+                      </a:solidFill>
+                      <a:prstDash val="solid"/>
+                      <a:round/>
+                      <a:headEnd type="none" w="med" len="med"/>
+                      <a:tailEnd type="none" w="med" len="med"/>
+                    </a:lnL>
+                    <a:lnR w="6350" cap="flat" cmpd="sng" algn="ctr">
+                      <a:solidFill>
+                        <a:srgbClr val="C9D6DD"/>
+                      </a:solidFill>
+                      <a:prstDash val="solid"/>
+                      <a:round/>
+                      <a:headEnd type="none" w="med" len="med"/>
+                      <a:tailEnd type="none" w="med" len="med"/>
+                    </a:lnR>
+                    <a:lnT w="6350" cap="flat" cmpd="sng" algn="ctr">
+                      <a:solidFill>
+                        <a:srgbClr val="C9D6DD"/>
+                      </a:solidFill>
+                      <a:prstDash val="solid"/>
+                      <a:round/>
+                      <a:headEnd type="none" w="med" len="med"/>
+                      <a:tailEnd type="none" w="med" len="med"/>
+                    </a:lnT>
+                    <a:lnB w="6350" cap="flat" cmpd="sng" algn="ctr">
+                      <a:solidFill>
+                        <a:srgbClr val="C9D6DD"/>
+                      </a:solidFill>
+                      <a:prstDash val="solid"/>
+                      <a:round/>
+                      <a:headEnd type="none" w="med" len="med"/>
+                      <a:tailEnd type="none" w="med" len="med"/>
+                    </a:lnB>
+                    <a:solidFill>
+                      <a:srgbClr val="EAF3F1"/>
+                    </a:solidFill>
+                  </a:tcPr>
+                </a:tc>
+              </a:tr>
+              <a:tr h="457200">
+                <a:tc>
+                  <a:txBody>
+                    <a:bodyPr/>
+                    <a:lstStyle/>
+                    <a:p>
+                      <a:pPr algn="l" indent="0" marL="0">
+                        <a:buNone/>
+                      </a:pPr>
+                      <a:r>
+                        <a:rPr lang="en-US" sz="1300" dirty="0">
+                          <a:solidFill>
+                            <a:srgbClr val="14232E"/>
+                          </a:solidFill>
+                        </a:rPr>
+                        <a:t>Kompaundlash ekstruderi + 2 plyonka liniyasi</a:t>
+                      </a:r>
+                      <a:endParaRPr lang="en-US" sz="1300" dirty="0"/>
+                    </a:p>
+                  </a:txBody>
+                  <a:tcPr marL="76200" marR="76200" marT="38100" marB="38100" anchor="ctr">
+                    <a:lnL w="6350" cap="flat" cmpd="sng" algn="ctr">
+                      <a:solidFill>
+                        <a:srgbClr val="C9D6DD"/>
+                      </a:solidFill>
+                      <a:prstDash val="solid"/>
+                      <a:round/>
+                      <a:headEnd type="none" w="med" len="med"/>
+                      <a:tailEnd type="none" w="med" len="med"/>
+                    </a:lnL>
+                    <a:lnR w="6350" cap="flat" cmpd="sng" algn="ctr">
+                      <a:solidFill>
+                        <a:srgbClr val="C9D6DD"/>
+                      </a:solidFill>
+                      <a:prstDash val="solid"/>
+                      <a:round/>
+                      <a:headEnd type="none" w="med" len="med"/>
+                      <a:tailEnd type="none" w="med" len="med"/>
+                    </a:lnR>
+                    <a:lnT w="6350" cap="flat" cmpd="sng" algn="ctr">
+                      <a:solidFill>
+                        <a:srgbClr val="C9D6DD"/>
+                      </a:solidFill>
+                      <a:prstDash val="solid"/>
+                      <a:round/>
+                      <a:headEnd type="none" w="med" len="med"/>
+                      <a:tailEnd type="none" w="med" len="med"/>
+                    </a:lnT>
+                    <a:lnB w="6350" cap="flat" cmpd="sng" algn="ctr">
+                      <a:solidFill>
+                        <a:srgbClr val="C9D6DD"/>
+                      </a:solidFill>
+                      <a:prstDash val="solid"/>
+                      <a:round/>
+                      <a:headEnd type="none" w="med" len="med"/>
+                      <a:tailEnd type="none" w="med" len="med"/>
+                    </a:lnB>
+                    <a:solidFill>
+                      <a:srgbClr val="FFFFFF"/>
+                    </a:solidFill>
+                  </a:tcPr>
+                </a:tc>
+                <a:tc>
+                  <a:txBody>
+                    <a:bodyPr/>
+                    <a:lstStyle/>
+                    <a:p>
+                      <a:pPr algn="l" indent="0" marL="0">
+                        <a:buNone/>
+                      </a:pPr>
+                      <a:r>
+                        <a:rPr lang="en-US" sz="1300" dirty="0">
+                          <a:solidFill>
+                            <a:srgbClr val="14232E"/>
+                          </a:solidFill>
+                        </a:rPr>
+                        <a:t>1–2</a:t>
+                      </a:r>
+                      <a:endParaRPr lang="en-US" sz="1300" dirty="0"/>
+                    </a:p>
+                  </a:txBody>
+                  <a:tcPr marL="76200" marR="76200" marT="38100" marB="38100" anchor="ctr">
+                    <a:lnL w="6350" cap="flat" cmpd="sng" algn="ctr">
+                      <a:solidFill>
+                        <a:srgbClr val="C9D6DD"/>
+                      </a:solidFill>
+                      <a:prstDash val="solid"/>
+                      <a:round/>
+                      <a:headEnd type="none" w="med" len="med"/>
+                      <a:tailEnd type="none" w="med" len="med"/>
+                    </a:lnL>
+                    <a:lnR w="6350" cap="flat" cmpd="sng" algn="ctr">
+                      <a:solidFill>
+                        <a:srgbClr val="C9D6DD"/>
+                      </a:solidFill>
+                      <a:prstDash val="solid"/>
+                      <a:round/>
+                      <a:headEnd type="none" w="med" len="med"/>
+                      <a:tailEnd type="none" w="med" len="med"/>
+                    </a:lnR>
+                    <a:lnT w="6350" cap="flat" cmpd="sng" algn="ctr">
+                      <a:solidFill>
+                        <a:srgbClr val="C9D6DD"/>
+                      </a:solidFill>
+                      <a:prstDash val="solid"/>
+                      <a:round/>
+                      <a:headEnd type="none" w="med" len="med"/>
+                      <a:tailEnd type="none" w="med" len="med"/>
+                    </a:lnT>
+                    <a:lnB w="6350" cap="flat" cmpd="sng" algn="ctr">
+                      <a:solidFill>
+                        <a:srgbClr val="C9D6DD"/>
+                      </a:solidFill>
+                      <a:prstDash val="solid"/>
+                      <a:round/>
+                      <a:headEnd type="none" w="med" len="med"/>
+                      <a:tailEnd type="none" w="med" len="med"/>
+                    </a:lnB>
+                    <a:solidFill>
+                      <a:srgbClr val="FFFFFF"/>
+                    </a:solidFill>
+                  </a:tcPr>
+                </a:tc>
+                <a:tc>
+                  <a:txBody>
+                    <a:bodyPr/>
+                    <a:lstStyle/>
+                    <a:p>
+                      <a:pPr algn="r" indent="0" marL="0">
+                        <a:buNone/>
+                      </a:pPr>
+                      <a:r>
+                        <a:rPr lang="en-US" sz="1300" dirty="0">
+                          <a:solidFill>
+                            <a:srgbClr val="14232E"/>
+                          </a:solidFill>
+                        </a:rPr>
+                        <a:t>$225 000</a:t>
+                      </a:r>
+                      <a:endParaRPr lang="en-US" sz="1300" dirty="0"/>
+                    </a:p>
+                  </a:txBody>
+                  <a:tcPr marL="76200" marR="76200" marT="38100" marB="38100" anchor="ctr">
+                    <a:lnL w="6350" cap="flat" cmpd="sng" algn="ctr">
+                      <a:solidFill>
+                        <a:srgbClr val="C9D6DD"/>
+                      </a:solidFill>
+                      <a:prstDash val="solid"/>
+                      <a:round/>
+                      <a:headEnd type="none" w="med" len="med"/>
+                      <a:tailEnd type="none" w="med" len="med"/>
+                    </a:lnL>
+                    <a:lnR w="6350" cap="flat" cmpd="sng" algn="ctr">
+                      <a:solidFill>
+                        <a:srgbClr val="C9D6DD"/>
+                      </a:solidFill>
+                      <a:prstDash val="solid"/>
+                      <a:round/>
+                      <a:headEnd type="none" w="med" len="med"/>
+                      <a:tailEnd type="none" w="med" len="med"/>
+                    </a:lnR>
+                    <a:lnT w="6350" cap="flat" cmpd="sng" algn="ctr">
+                      <a:solidFill>
+                        <a:srgbClr val="C9D6DD"/>
+                      </a:solidFill>
+                      <a:prstDash val="solid"/>
+                      <a:round/>
+                      <a:headEnd type="none" w="med" len="med"/>
+                      <a:tailEnd type="none" w="med" len="med"/>
+                    </a:lnT>
+                    <a:lnB w="6350" cap="flat" cmpd="sng" algn="ctr">
+                      <a:solidFill>
+                        <a:srgbClr val="C9D6DD"/>
+                      </a:solidFill>
+                      <a:prstDash val="solid"/>
+                      <a:round/>
+                      <a:headEnd type="none" w="med" len="med"/>
+                      <a:tailEnd type="none" w="med" len="med"/>
+                    </a:lnB>
+                    <a:solidFill>
+                      <a:srgbClr val="FFFFFF"/>
+                    </a:solidFill>
+                  </a:tcPr>
+                </a:tc>
+                <a:tc>
+                  <a:txBody>
+                    <a:bodyPr/>
+                    <a:lstStyle/>
+                    <a:p>
+                      <a:pPr algn="l" indent="0" marL="0">
+                        <a:buNone/>
+                      </a:pPr>
+                      <a:r>
+                        <a:rPr lang="en-US" sz="1300" dirty="0">
+                          <a:solidFill>
+                            <a:srgbClr val="14232E"/>
+                          </a:solidFill>
+                        </a:rPr>
+                        <a:t>Coperion, Nanjing Kerke, Ruian Ruipai</a:t>
+                      </a:r>
+                      <a:endParaRPr lang="en-US" sz="1300" dirty="0"/>
+                    </a:p>
+                  </a:txBody>
+                  <a:tcPr marL="76200" marR="76200" marT="38100" marB="38100" anchor="ctr">
+                    <a:lnL w="6350" cap="flat" cmpd="sng" algn="ctr">
+                      <a:solidFill>
+                        <a:srgbClr val="C9D6DD"/>
+                      </a:solidFill>
+                      <a:prstDash val="solid"/>
+                      <a:round/>
+                      <a:headEnd type="none" w="med" len="med"/>
+                      <a:tailEnd type="none" w="med" len="med"/>
+                    </a:lnL>
+                    <a:lnR w="6350" cap="flat" cmpd="sng" algn="ctr">
+                      <a:solidFill>
+                        <a:srgbClr val="C9D6DD"/>
+                      </a:solidFill>
+                      <a:prstDash val="solid"/>
+                      <a:round/>
+                      <a:headEnd type="none" w="med" len="med"/>
+                      <a:tailEnd type="none" w="med" len="med"/>
+                    </a:lnR>
+                    <a:lnT w="6350" cap="flat" cmpd="sng" algn="ctr">
+                      <a:solidFill>
+                        <a:srgbClr val="C9D6DD"/>
+                      </a:solidFill>
+                      <a:prstDash val="solid"/>
+                      <a:round/>
+                      <a:headEnd type="none" w="med" len="med"/>
+                      <a:tailEnd type="none" w="med" len="med"/>
+                    </a:lnT>
+                    <a:lnB w="6350" cap="flat" cmpd="sng" algn="ctr">
+                      <a:solidFill>
+                        <a:srgbClr val="C9D6DD"/>
+                      </a:solidFill>
+                      <a:prstDash val="solid"/>
+                      <a:round/>
+                      <a:headEnd type="none" w="med" len="med"/>
+                      <a:tailEnd type="none" w="med" len="med"/>
+                    </a:lnB>
+                    <a:solidFill>
+                      <a:srgbClr val="FFFFFF"/>
+                    </a:solidFill>
+                  </a:tcPr>
+                </a:tc>
+              </a:tr>
+              <a:tr h="457200">
+                <a:tc>
+                  <a:txBody>
+                    <a:bodyPr/>
+                    <a:lstStyle/>
+                    <a:p>
+                      <a:pPr algn="l" indent="0" marL="0">
+                        <a:buNone/>
+                      </a:pPr>
+                      <a:r>
+                        <a:rPr lang="en-US" sz="1300" dirty="0">
+                          <a:solidFill>
+                            <a:srgbClr val="14232E"/>
+                          </a:solidFill>
+                        </a:rPr>
+                        <a:t>Paket mashinalari, fleksobosma</a:t>
+                      </a:r>
+                      <a:endParaRPr lang="en-US" sz="1300" dirty="0"/>
+                    </a:p>
+                  </a:txBody>
+                  <a:tcPr marL="76200" marR="76200" marT="38100" marB="38100" anchor="ctr">
+                    <a:lnL w="6350" cap="flat" cmpd="sng" algn="ctr">
+                      <a:solidFill>
+                        <a:srgbClr val="C9D6DD"/>
+                      </a:solidFill>
+                      <a:prstDash val="solid"/>
+                      <a:round/>
+                      <a:headEnd type="none" w="med" len="med"/>
+                      <a:tailEnd type="none" w="med" len="med"/>
+                    </a:lnL>
+                    <a:lnR w="6350" cap="flat" cmpd="sng" algn="ctr">
+                      <a:solidFill>
+                        <a:srgbClr val="C9D6DD"/>
+                      </a:solidFill>
+                      <a:prstDash val="solid"/>
+                      <a:round/>
+                      <a:headEnd type="none" w="med" len="med"/>
+                      <a:tailEnd type="none" w="med" len="med"/>
+                    </a:lnR>
+                    <a:lnT w="6350" cap="flat" cmpd="sng" algn="ctr">
+                      <a:solidFill>
+                        <a:srgbClr val="C9D6DD"/>
+                      </a:solidFill>
+                      <a:prstDash val="solid"/>
+                      <a:round/>
+                      <a:headEnd type="none" w="med" len="med"/>
+                      <a:tailEnd type="none" w="med" len="med"/>
+                    </a:lnT>
+                    <a:lnB w="6350" cap="flat" cmpd="sng" algn="ctr">
+                      <a:solidFill>
+                        <a:srgbClr val="C9D6DD"/>
+                      </a:solidFill>
+                      <a:prstDash val="solid"/>
+                      <a:round/>
+                      <a:headEnd type="none" w="med" len="med"/>
+                      <a:tailEnd type="none" w="med" len="med"/>
+                    </a:lnB>
+                    <a:solidFill>
+                      <a:srgbClr val="EAF3F1"/>
+                    </a:solidFill>
+                  </a:tcPr>
+                </a:tc>
+                <a:tc>
+                  <a:txBody>
+                    <a:bodyPr/>
+                    <a:lstStyle/>
+                    <a:p>
+                      <a:pPr algn="l" indent="0" marL="0">
+                        <a:buNone/>
+                      </a:pPr>
+                      <a:r>
+                        <a:rPr lang="en-US" sz="1300" dirty="0">
+                          <a:solidFill>
+                            <a:srgbClr val="14232E"/>
+                          </a:solidFill>
+                        </a:rPr>
+                        <a:t>1</a:t>
+                      </a:r>
+                      <a:endParaRPr lang="en-US" sz="1300" dirty="0"/>
+                    </a:p>
+                  </a:txBody>
+                  <a:tcPr marL="76200" marR="76200" marT="38100" marB="38100" anchor="ctr">
+                    <a:lnL w="6350" cap="flat" cmpd="sng" algn="ctr">
+                      <a:solidFill>
+                        <a:srgbClr val="C9D6DD"/>
+                      </a:solidFill>
+                      <a:prstDash val="solid"/>
+                      <a:round/>
+                      <a:headEnd type="none" w="med" len="med"/>
+                      <a:tailEnd type="none" w="med" len="med"/>
+                    </a:lnL>
+                    <a:lnR w="6350" cap="flat" cmpd="sng" algn="ctr">
+                      <a:solidFill>
+                        <a:srgbClr val="C9D6DD"/>
+                      </a:solidFill>
+                      <a:prstDash val="solid"/>
+                      <a:round/>
+                      <a:headEnd type="none" w="med" len="med"/>
+                      <a:tailEnd type="none" w="med" len="med"/>
+                    </a:lnR>
+                    <a:lnT w="6350" cap="flat" cmpd="sng" algn="ctr">
+                      <a:solidFill>
+                        <a:srgbClr val="C9D6DD"/>
+                      </a:solidFill>
+                      <a:prstDash val="solid"/>
+                      <a:round/>
+                      <a:headEnd type="none" w="med" len="med"/>
+                      <a:tailEnd type="none" w="med" len="med"/>
+                    </a:lnT>
+                    <a:lnB w="6350" cap="flat" cmpd="sng" algn="ctr">
+                      <a:solidFill>
+                        <a:srgbClr val="C9D6DD"/>
+                      </a:solidFill>
+                      <a:prstDash val="solid"/>
+                      <a:round/>
+                      <a:headEnd type="none" w="med" len="med"/>
+                      <a:tailEnd type="none" w="med" len="med"/>
+                    </a:lnB>
+                    <a:solidFill>
+                      <a:srgbClr val="EAF3F1"/>
+                    </a:solidFill>
+                  </a:tcPr>
+                </a:tc>
+                <a:tc>
+                  <a:txBody>
+                    <a:bodyPr/>
+                    <a:lstStyle/>
+                    <a:p>
+                      <a:pPr algn="r" indent="0" marL="0">
+                        <a:buNone/>
+                      </a:pPr>
+                      <a:r>
+                        <a:rPr lang="en-US" sz="1300" dirty="0">
+                          <a:solidFill>
+                            <a:srgbClr val="14232E"/>
+                          </a:solidFill>
+                        </a:rPr>
+                        <a:t>$58 000</a:t>
+                      </a:r>
+                      <a:endParaRPr lang="en-US" sz="1300" dirty="0"/>
+                    </a:p>
+                  </a:txBody>
+                  <a:tcPr marL="76200" marR="76200" marT="38100" marB="38100" anchor="ctr">
+                    <a:lnL w="6350" cap="flat" cmpd="sng" algn="ctr">
+                      <a:solidFill>
+                        <a:srgbClr val="C9D6DD"/>
+                      </a:solidFill>
+                      <a:prstDash val="solid"/>
+                      <a:round/>
+                      <a:headEnd type="none" w="med" len="med"/>
+                      <a:tailEnd type="none" w="med" len="med"/>
+                    </a:lnL>
+                    <a:lnR w="6350" cap="flat" cmpd="sng" algn="ctr">
+                      <a:solidFill>
+                        <a:srgbClr val="C9D6DD"/>
+                      </a:solidFill>
+                      <a:prstDash val="solid"/>
+                      <a:round/>
+                      <a:headEnd type="none" w="med" len="med"/>
+                      <a:tailEnd type="none" w="med" len="med"/>
+                    </a:lnR>
+                    <a:lnT w="6350" cap="flat" cmpd="sng" algn="ctr">
+                      <a:solidFill>
+                        <a:srgbClr val="C9D6DD"/>
+                      </a:solidFill>
+                      <a:prstDash val="solid"/>
+                      <a:round/>
+                      <a:headEnd type="none" w="med" len="med"/>
+                      <a:tailEnd type="none" w="med" len="med"/>
+                    </a:lnT>
+                    <a:lnB w="6350" cap="flat" cmpd="sng" algn="ctr">
+                      <a:solidFill>
+                        <a:srgbClr val="C9D6DD"/>
+                      </a:solidFill>
+                      <a:prstDash val="solid"/>
+                      <a:round/>
+                      <a:headEnd type="none" w="med" len="med"/>
+                      <a:tailEnd type="none" w="med" len="med"/>
+                    </a:lnB>
+                    <a:solidFill>
+                      <a:srgbClr val="EAF3F1"/>
+                    </a:solidFill>
+                  </a:tcPr>
+                </a:tc>
+                <a:tc>
+                  <a:txBody>
+                    <a:bodyPr/>
+                    <a:lstStyle/>
+                    <a:p>
+                      <a:pPr algn="l" indent="0" marL="0">
+                        <a:buNone/>
+                      </a:pPr>
+                      <a:r>
+                        <a:rPr lang="en-US" sz="1300" dirty="0">
+                          <a:solidFill>
+                            <a:srgbClr val="14232E"/>
+                          </a:solidFill>
+                        </a:rPr>
+                        <a:t>Ruian Xinye, Ruian Changhong</a:t>
+                      </a:r>
+                      <a:endParaRPr lang="en-US" sz="1300" dirty="0"/>
+                    </a:p>
+                  </a:txBody>
+                  <a:tcPr marL="76200" marR="76200" marT="38100" marB="38100" anchor="ctr">
+                    <a:lnL w="6350" cap="flat" cmpd="sng" algn="ctr">
+                      <a:solidFill>
+                        <a:srgbClr val="C9D6DD"/>
+                      </a:solidFill>
+                      <a:prstDash val="solid"/>
+                      <a:round/>
+                      <a:headEnd type="none" w="med" len="med"/>
+                      <a:tailEnd type="none" w="med" len="med"/>
+                    </a:lnL>
+                    <a:lnR w="6350" cap="flat" cmpd="sng" algn="ctr">
+                      <a:solidFill>
+                        <a:srgbClr val="C9D6DD"/>
+                      </a:solidFill>
+                      <a:prstDash val="solid"/>
+                      <a:round/>
+                      <a:headEnd type="none" w="med" len="med"/>
+                      <a:tailEnd type="none" w="med" len="med"/>
+                    </a:lnR>
+                    <a:lnT w="6350" cap="flat" cmpd="sng" algn="ctr">
+                      <a:solidFill>
+                        <a:srgbClr val="C9D6DD"/>
+                      </a:solidFill>
+                      <a:prstDash val="solid"/>
+                      <a:round/>
+                      <a:headEnd type="none" w="med" len="med"/>
+                      <a:tailEnd type="none" w="med" len="med"/>
+                    </a:lnT>
+                    <a:lnB w="6350" cap="flat" cmpd="sng" algn="ctr">
+                      <a:solidFill>
+                        <a:srgbClr val="C9D6DD"/>
+                      </a:solidFill>
+                      <a:prstDash val="solid"/>
+                      <a:round/>
+                      <a:headEnd type="none" w="med" len="med"/>
+                      <a:tailEnd type="none" w="med" len="med"/>
+                    </a:lnB>
+                    <a:solidFill>
+                      <a:srgbClr val="EAF3F1"/>
+                    </a:solidFill>
+                  </a:tcPr>
+                </a:tc>
+              </a:tr>
+              <a:tr h="457200">
+                <a:tc>
+                  <a:txBody>
+                    <a:bodyPr/>
+                    <a:lstStyle/>
+                    <a:p>
+                      <a:pPr algn="l" indent="0" marL="0">
+                        <a:buNone/>
+                      </a:pPr>
+                      <a:r>
+                        <a:rPr lang="en-US" sz="1300" dirty="0">
+                          <a:solidFill>
+                            <a:srgbClr val="14232E"/>
+                          </a:solidFill>
+                        </a:rPr>
+                        <a:t>Fermenterlar: 1 m³ urug‘ + 2 × 10 m³</a:t>
+                      </a:r>
+                      <a:endParaRPr lang="en-US" sz="1300" dirty="0"/>
+                    </a:p>
+                  </a:txBody>
+                  <a:tcPr marL="76200" marR="76200" marT="38100" marB="38100" anchor="ctr">
+                    <a:lnL w="6350" cap="flat" cmpd="sng" algn="ctr">
+                      <a:solidFill>
+                        <a:srgbClr val="C9D6DD"/>
+                      </a:solidFill>
+                      <a:prstDash val="solid"/>
+                      <a:round/>
+                      <a:headEnd type="none" w="med" len="med"/>
+                      <a:tailEnd type="none" w="med" len="med"/>
+                    </a:lnL>
+                    <a:lnR w="6350" cap="flat" cmpd="sng" algn="ctr">
+                      <a:solidFill>
+                        <a:srgbClr val="C9D6DD"/>
+                      </a:solidFill>
+                      <a:prstDash val="solid"/>
+                      <a:round/>
+                      <a:headEnd type="none" w="med" len="med"/>
+                      <a:tailEnd type="none" w="med" len="med"/>
+                    </a:lnR>
+                    <a:lnT w="6350" cap="flat" cmpd="sng" algn="ctr">
+                      <a:solidFill>
+                        <a:srgbClr val="C9D6DD"/>
+                      </a:solidFill>
+                      <a:prstDash val="solid"/>
+                      <a:round/>
+                      <a:headEnd type="none" w="med" len="med"/>
+                      <a:tailEnd type="none" w="med" len="med"/>
+                    </a:lnT>
+                    <a:lnB w="6350" cap="flat" cmpd="sng" algn="ctr">
+                      <a:solidFill>
+                        <a:srgbClr val="C9D6DD"/>
+                      </a:solidFill>
+                      <a:prstDash val="solid"/>
+                      <a:round/>
+                      <a:headEnd type="none" w="med" len="med"/>
+                      <a:tailEnd type="none" w="med" len="med"/>
+                    </a:lnB>
+                    <a:solidFill>
+                      <a:srgbClr val="FFFFFF"/>
+                    </a:solidFill>
+                  </a:tcPr>
+                </a:tc>
+                <a:tc>
+                  <a:txBody>
+                    <a:bodyPr/>
+                    <a:lstStyle/>
+                    <a:p>
+                      <a:pPr algn="l" indent="0" marL="0">
+                        <a:buNone/>
+                      </a:pPr>
+                      <a:r>
+                        <a:rPr lang="en-US" sz="1300" dirty="0">
+                          <a:solidFill>
+                            <a:srgbClr val="14232E"/>
+                          </a:solidFill>
+                        </a:rPr>
+                        <a:t>2</a:t>
+                      </a:r>
+                      <a:endParaRPr lang="en-US" sz="1300" dirty="0"/>
+                    </a:p>
+                  </a:txBody>
+                  <a:tcPr marL="76200" marR="76200" marT="38100" marB="38100" anchor="ctr">
+                    <a:lnL w="6350" cap="flat" cmpd="sng" algn="ctr">
+                      <a:solidFill>
+                        <a:srgbClr val="C9D6DD"/>
+                      </a:solidFill>
+                      <a:prstDash val="solid"/>
+                      <a:round/>
+                      <a:headEnd type="none" w="med" len="med"/>
+                      <a:tailEnd type="none" w="med" len="med"/>
+                    </a:lnL>
+                    <a:lnR w="6350" cap="flat" cmpd="sng" algn="ctr">
+                      <a:solidFill>
+                        <a:srgbClr val="C9D6DD"/>
+                      </a:solidFill>
+                      <a:prstDash val="solid"/>
+                      <a:round/>
+                      <a:headEnd type="none" w="med" len="med"/>
+                      <a:tailEnd type="none" w="med" len="med"/>
+                    </a:lnR>
+                    <a:lnT w="6350" cap="flat" cmpd="sng" algn="ctr">
+                      <a:solidFill>
+                        <a:srgbClr val="C9D6DD"/>
+                      </a:solidFill>
+                      <a:prstDash val="solid"/>
+                      <a:round/>
+                      <a:headEnd type="none" w="med" len="med"/>
+                      <a:tailEnd type="none" w="med" len="med"/>
+                    </a:lnT>
+                    <a:lnB w="6350" cap="flat" cmpd="sng" algn="ctr">
+                      <a:solidFill>
+                        <a:srgbClr val="C9D6DD"/>
+                      </a:solidFill>
+                      <a:prstDash val="solid"/>
+                      <a:round/>
+                      <a:headEnd type="none" w="med" len="med"/>
+                      <a:tailEnd type="none" w="med" len="med"/>
+                    </a:lnB>
+                    <a:solidFill>
+                      <a:srgbClr val="FFFFFF"/>
+                    </a:solidFill>
+                  </a:tcPr>
+                </a:tc>
+                <a:tc>
+                  <a:txBody>
+                    <a:bodyPr/>
+                    <a:lstStyle/>
+                    <a:p>
+                      <a:pPr algn="r" indent="0" marL="0">
+                        <a:buNone/>
+                      </a:pPr>
+                      <a:r>
+                        <a:rPr lang="en-US" sz="1300" dirty="0">
+                          <a:solidFill>
+                            <a:srgbClr val="14232E"/>
+                          </a:solidFill>
+                        </a:rPr>
+                        <a:t>$220 000</a:t>
+                      </a:r>
+                      <a:endParaRPr lang="en-US" sz="1300" dirty="0"/>
+                    </a:p>
+                  </a:txBody>
+                  <a:tcPr marL="76200" marR="76200" marT="38100" marB="38100" anchor="ctr">
+                    <a:lnL w="6350" cap="flat" cmpd="sng" algn="ctr">
+                      <a:solidFill>
+                        <a:srgbClr val="C9D6DD"/>
+                      </a:solidFill>
+                      <a:prstDash val="solid"/>
+                      <a:round/>
+                      <a:headEnd type="none" w="med" len="med"/>
+                      <a:tailEnd type="none" w="med" len="med"/>
+                    </a:lnL>
+                    <a:lnR w="6350" cap="flat" cmpd="sng" algn="ctr">
+                      <a:solidFill>
+                        <a:srgbClr val="C9D6DD"/>
+                      </a:solidFill>
+                      <a:prstDash val="solid"/>
+                      <a:round/>
+                      <a:headEnd type="none" w="med" len="med"/>
+                      <a:tailEnd type="none" w="med" len="med"/>
+                    </a:lnR>
+                    <a:lnT w="6350" cap="flat" cmpd="sng" algn="ctr">
+                      <a:solidFill>
+                        <a:srgbClr val="C9D6DD"/>
+                      </a:solidFill>
+                      <a:prstDash val="solid"/>
+                      <a:round/>
+                      <a:headEnd type="none" w="med" len="med"/>
+                      <a:tailEnd type="none" w="med" len="med"/>
+                    </a:lnT>
+                    <a:lnB w="6350" cap="flat" cmpd="sng" algn="ctr">
+                      <a:solidFill>
+                        <a:srgbClr val="C9D6DD"/>
+                      </a:solidFill>
+                      <a:prstDash val="solid"/>
+                      <a:round/>
+                      <a:headEnd type="none" w="med" len="med"/>
+                      <a:tailEnd type="none" w="med" len="med"/>
+                    </a:lnB>
+                    <a:solidFill>
+                      <a:srgbClr val="FFFFFF"/>
+                    </a:solidFill>
+                  </a:tcPr>
+                </a:tc>
+                <a:tc>
+                  <a:txBody>
+                    <a:bodyPr/>
+                    <a:lstStyle/>
+                    <a:p>
+                      <a:pPr algn="l" indent="0" marL="0">
+                        <a:buNone/>
+                      </a:pPr>
+                      <a:r>
+                        <a:rPr lang="en-US" sz="1300" dirty="0">
+                          <a:solidFill>
+                            <a:srgbClr val="14232E"/>
+                          </a:solidFill>
+                        </a:rPr>
+                        <a:t>Bailun, T&amp;J, Bioengineering AG</a:t>
+                      </a:r>
+                      <a:endParaRPr lang="en-US" sz="1300" dirty="0"/>
+                    </a:p>
+                  </a:txBody>
+                  <a:tcPr marL="76200" marR="76200" marT="38100" marB="38100" anchor="ctr">
+                    <a:lnL w="6350" cap="flat" cmpd="sng" algn="ctr">
+                      <a:solidFill>
+                        <a:srgbClr val="C9D6DD"/>
+                      </a:solidFill>
+                      <a:prstDash val="solid"/>
+                      <a:round/>
+                      <a:headEnd type="none" w="med" len="med"/>
+                      <a:tailEnd type="none" w="med" len="med"/>
+                    </a:lnL>
+                    <a:lnR w="6350" cap="flat" cmpd="sng" algn="ctr">
+                      <a:solidFill>
+                        <a:srgbClr val="C9D6DD"/>
+                      </a:solidFill>
+                      <a:prstDash val="solid"/>
+                      <a:round/>
+                      <a:headEnd type="none" w="med" len="med"/>
+                      <a:tailEnd type="none" w="med" len="med"/>
+                    </a:lnR>
+                    <a:lnT w="6350" cap="flat" cmpd="sng" algn="ctr">
+                      <a:solidFill>
+                        <a:srgbClr val="C9D6DD"/>
+                      </a:solidFill>
+                      <a:prstDash val="solid"/>
+                      <a:round/>
+                      <a:headEnd type="none" w="med" len="med"/>
+                      <a:tailEnd type="none" w="med" len="med"/>
+                    </a:lnT>
+                    <a:lnB w="6350" cap="flat" cmpd="sng" algn="ctr">
+                      <a:solidFill>
+                        <a:srgbClr val="C9D6DD"/>
+                      </a:solidFill>
+                      <a:prstDash val="solid"/>
+                      <a:round/>
+                      <a:headEnd type="none" w="med" len="med"/>
+                      <a:tailEnd type="none" w="med" len="med"/>
+                    </a:lnB>
+                    <a:solidFill>
+                      <a:srgbClr val="FFFFFF"/>
+                    </a:solidFill>
+                  </a:tcPr>
+                </a:tc>
+              </a:tr>
+              <a:tr h="457200">
+                <a:tc>
+                  <a:txBody>
+                    <a:bodyPr/>
+                    <a:lstStyle/>
+                    <a:p>
+                      <a:pPr algn="l" indent="0" marL="0">
+                        <a:buNone/>
+                      </a:pPr>
+                      <a:r>
+                        <a:rPr lang="en-US" sz="1300" dirty="0">
+                          <a:solidFill>
+                            <a:srgbClr val="14232E"/>
+                          </a:solidFill>
+                        </a:rPr>
+                        <a:t>Ajratish: 2 separator, reaktorlar, purkab quritgich</a:t>
+                      </a:r>
+                      <a:endParaRPr lang="en-US" sz="1300" dirty="0"/>
+                    </a:p>
+                  </a:txBody>
+                  <a:tcPr marL="76200" marR="76200" marT="38100" marB="38100" anchor="ctr">
+                    <a:lnL w="6350" cap="flat" cmpd="sng" algn="ctr">
+                      <a:solidFill>
+                        <a:srgbClr val="C9D6DD"/>
+                      </a:solidFill>
+                      <a:prstDash val="solid"/>
+                      <a:round/>
+                      <a:headEnd type="none" w="med" len="med"/>
+                      <a:tailEnd type="none" w="med" len="med"/>
+                    </a:lnL>
+                    <a:lnR w="6350" cap="flat" cmpd="sng" algn="ctr">
+                      <a:solidFill>
+                        <a:srgbClr val="C9D6DD"/>
+                      </a:solidFill>
+                      <a:prstDash val="solid"/>
+                      <a:round/>
+                      <a:headEnd type="none" w="med" len="med"/>
+                      <a:tailEnd type="none" w="med" len="med"/>
+                    </a:lnR>
+                    <a:lnT w="6350" cap="flat" cmpd="sng" algn="ctr">
+                      <a:solidFill>
+                        <a:srgbClr val="C9D6DD"/>
+                      </a:solidFill>
+                      <a:prstDash val="solid"/>
+                      <a:round/>
+                      <a:headEnd type="none" w="med" len="med"/>
+                      <a:tailEnd type="none" w="med" len="med"/>
+                    </a:lnT>
+                    <a:lnB w="6350" cap="flat" cmpd="sng" algn="ctr">
+                      <a:solidFill>
+                        <a:srgbClr val="C9D6DD"/>
+                      </a:solidFill>
+                      <a:prstDash val="solid"/>
+                      <a:round/>
+                      <a:headEnd type="none" w="med" len="med"/>
+                      <a:tailEnd type="none" w="med" len="med"/>
+                    </a:lnB>
+                    <a:solidFill>
+                      <a:srgbClr val="EAF3F1"/>
+                    </a:solidFill>
+                  </a:tcPr>
+                </a:tc>
+                <a:tc>
+                  <a:txBody>
+                    <a:bodyPr/>
+                    <a:lstStyle/>
+                    <a:p>
+                      <a:pPr algn="l" indent="0" marL="0">
+                        <a:buNone/>
+                      </a:pPr>
+                      <a:r>
+                        <a:rPr lang="en-US" sz="1300" dirty="0">
+                          <a:solidFill>
+                            <a:srgbClr val="14232E"/>
+                          </a:solidFill>
+                        </a:rPr>
+                        <a:t>2</a:t>
+                      </a:r>
+                      <a:endParaRPr lang="en-US" sz="1300" dirty="0"/>
+                    </a:p>
+                  </a:txBody>
+                  <a:tcPr marL="76200" marR="76200" marT="38100" marB="38100" anchor="ctr">
+                    <a:lnL w="6350" cap="flat" cmpd="sng" algn="ctr">
+                      <a:solidFill>
+                        <a:srgbClr val="C9D6DD"/>
+                      </a:solidFill>
+                      <a:prstDash val="solid"/>
+                      <a:round/>
+                      <a:headEnd type="none" w="med" len="med"/>
+                      <a:tailEnd type="none" w="med" len="med"/>
+                    </a:lnL>
+                    <a:lnR w="6350" cap="flat" cmpd="sng" algn="ctr">
+                      <a:solidFill>
+                        <a:srgbClr val="C9D6DD"/>
+                      </a:solidFill>
+                      <a:prstDash val="solid"/>
+                      <a:round/>
+                      <a:headEnd type="none" w="med" len="med"/>
+                      <a:tailEnd type="none" w="med" len="med"/>
+                    </a:lnR>
+                    <a:lnT w="6350" cap="flat" cmpd="sng" algn="ctr">
+                      <a:solidFill>
+                        <a:srgbClr val="C9D6DD"/>
+                      </a:solidFill>
+                      <a:prstDash val="solid"/>
+                      <a:round/>
+                      <a:headEnd type="none" w="med" len="med"/>
+                      <a:tailEnd type="none" w="med" len="med"/>
+                    </a:lnT>
+                    <a:lnB w="6350" cap="flat" cmpd="sng" algn="ctr">
+                      <a:solidFill>
+                        <a:srgbClr val="C9D6DD"/>
+                      </a:solidFill>
+                      <a:prstDash val="solid"/>
+                      <a:round/>
+                      <a:headEnd type="none" w="med" len="med"/>
+                      <a:tailEnd type="none" w="med" len="med"/>
+                    </a:lnB>
+                    <a:solidFill>
+                      <a:srgbClr val="EAF3F1"/>
+                    </a:solidFill>
+                  </a:tcPr>
+                </a:tc>
+                <a:tc>
+                  <a:txBody>
+                    <a:bodyPr/>
+                    <a:lstStyle/>
+                    <a:p>
+                      <a:pPr algn="r" indent="0" marL="0">
+                        <a:buNone/>
+                      </a:pPr>
+                      <a:r>
+                        <a:rPr lang="en-US" sz="1300" dirty="0">
+                          <a:solidFill>
+                            <a:srgbClr val="14232E"/>
+                          </a:solidFill>
+                        </a:rPr>
+                        <a:t>$200 000</a:t>
+                      </a:r>
+                      <a:endParaRPr lang="en-US" sz="1300" dirty="0"/>
+                    </a:p>
+                  </a:txBody>
+                  <a:tcPr marL="76200" marR="76200" marT="38100" marB="38100" anchor="ctr">
+                    <a:lnL w="6350" cap="flat" cmpd="sng" algn="ctr">
+                      <a:solidFill>
+                        <a:srgbClr val="C9D6DD"/>
+                      </a:solidFill>
+                      <a:prstDash val="solid"/>
+                      <a:round/>
+                      <a:headEnd type="none" w="med" len="med"/>
+                      <a:tailEnd type="none" w="med" len="med"/>
+                    </a:lnL>
+                    <a:lnR w="6350" cap="flat" cmpd="sng" algn="ctr">
+                      <a:solidFill>
+                        <a:srgbClr val="C9D6DD"/>
+                      </a:solidFill>
+                      <a:prstDash val="solid"/>
+                      <a:round/>
+                      <a:headEnd type="none" w="med" len="med"/>
+                      <a:tailEnd type="none" w="med" len="med"/>
+                    </a:lnR>
+                    <a:lnT w="6350" cap="flat" cmpd="sng" algn="ctr">
+                      <a:solidFill>
+                        <a:srgbClr val="C9D6DD"/>
+                      </a:solidFill>
+                      <a:prstDash val="solid"/>
+                      <a:round/>
+                      <a:headEnd type="none" w="med" len="med"/>
+                      <a:tailEnd type="none" w="med" len="med"/>
+                    </a:lnT>
+                    <a:lnB w="6350" cap="flat" cmpd="sng" algn="ctr">
+                      <a:solidFill>
+                        <a:srgbClr val="C9D6DD"/>
+                      </a:solidFill>
+                      <a:prstDash val="solid"/>
+                      <a:round/>
+                      <a:headEnd type="none" w="med" len="med"/>
+                      <a:tailEnd type="none" w="med" len="med"/>
+                    </a:lnB>
+                    <a:solidFill>
+                      <a:srgbClr val="EAF3F1"/>
+                    </a:solidFill>
+                  </a:tcPr>
+                </a:tc>
+                <a:tc>
+                  <a:txBody>
+                    <a:bodyPr/>
+                    <a:lstStyle/>
+                    <a:p>
+                      <a:pPr algn="l" indent="0" marL="0">
+                        <a:buNone/>
+                      </a:pPr>
+                      <a:r>
+                        <a:rPr lang="en-US" sz="1300" dirty="0">
+                          <a:solidFill>
+                            <a:srgbClr val="14232E"/>
+                          </a:solidFill>
+                        </a:rPr>
+                        <a:t>Alfa Laval, GEA, Changzhou Lemar</a:t>
+                      </a:r>
+                      <a:endParaRPr lang="en-US" sz="1300" dirty="0"/>
+                    </a:p>
+                  </a:txBody>
+                  <a:tcPr marL="76200" marR="76200" marT="38100" marB="38100" anchor="ctr">
+                    <a:lnL w="6350" cap="flat" cmpd="sng" algn="ctr">
+                      <a:solidFill>
+                        <a:srgbClr val="C9D6DD"/>
+                      </a:solidFill>
+                      <a:prstDash val="solid"/>
+                      <a:round/>
+                      <a:headEnd type="none" w="med" len="med"/>
+                      <a:tailEnd type="none" w="med" len="med"/>
+                    </a:lnL>
+                    <a:lnR w="6350" cap="flat" cmpd="sng" algn="ctr">
+                      <a:solidFill>
+                        <a:srgbClr val="C9D6DD"/>
+                      </a:solidFill>
+                      <a:prstDash val="solid"/>
+                      <a:round/>
+                      <a:headEnd type="none" w="med" len="med"/>
+                      <a:tailEnd type="none" w="med" len="med"/>
+                    </a:lnR>
+                    <a:lnT w="6350" cap="flat" cmpd="sng" algn="ctr">
+                      <a:solidFill>
+                        <a:srgbClr val="C9D6DD"/>
+                      </a:solidFill>
+                      <a:prstDash val="solid"/>
+                      <a:round/>
+                      <a:headEnd type="none" w="med" len="med"/>
+                      <a:tailEnd type="none" w="med" len="med"/>
+                    </a:lnT>
+                    <a:lnB w="6350" cap="flat" cmpd="sng" algn="ctr">
+                      <a:solidFill>
+                        <a:srgbClr val="C9D6DD"/>
+                      </a:solidFill>
+                      <a:prstDash val="solid"/>
+                      <a:round/>
+                      <a:headEnd type="none" w="med" len="med"/>
+                      <a:tailEnd type="none" w="med" len="med"/>
+                    </a:lnB>
+                    <a:solidFill>
+                      <a:srgbClr val="EAF3F1"/>
+                    </a:solidFill>
+                  </a:tcPr>
+                </a:tc>
+              </a:tr>
+              <a:tr h="457200">
+                <a:tc>
+                  <a:txBody>
+                    <a:bodyPr/>
+                    <a:lstStyle/>
+                    <a:p>
+                      <a:pPr algn="l" indent="0" marL="0">
+                        <a:buNone/>
+                      </a:pPr>
+                      <a:r>
+                        <a:rPr lang="en-US" sz="1300" dirty="0">
+                          <a:solidFill>
+                            <a:srgbClr val="14232E"/>
+                          </a:solidFill>
+                        </a:rPr>
+                        <a:t>Utilitalar: bug‘ qozoni, havo, sovutish, suv, oqova</a:t>
+                      </a:r>
+                      <a:endParaRPr lang="en-US" sz="1300" dirty="0"/>
+                    </a:p>
+                  </a:txBody>
+                  <a:tcPr marL="76200" marR="76200" marT="38100" marB="38100" anchor="ctr">
+                    <a:lnL w="6350" cap="flat" cmpd="sng" algn="ctr">
+                      <a:solidFill>
+                        <a:srgbClr val="C9D6DD"/>
+                      </a:solidFill>
+                      <a:prstDash val="solid"/>
+                      <a:round/>
+                      <a:headEnd type="none" w="med" len="med"/>
+                      <a:tailEnd type="none" w="med" len="med"/>
+                    </a:lnL>
+                    <a:lnR w="6350" cap="flat" cmpd="sng" algn="ctr">
+                      <a:solidFill>
+                        <a:srgbClr val="C9D6DD"/>
+                      </a:solidFill>
+                      <a:prstDash val="solid"/>
+                      <a:round/>
+                      <a:headEnd type="none" w="med" len="med"/>
+                      <a:tailEnd type="none" w="med" len="med"/>
+                    </a:lnR>
+                    <a:lnT w="6350" cap="flat" cmpd="sng" algn="ctr">
+                      <a:solidFill>
+                        <a:srgbClr val="C9D6DD"/>
+                      </a:solidFill>
+                      <a:prstDash val="solid"/>
+                      <a:round/>
+                      <a:headEnd type="none" w="med" len="med"/>
+                      <a:tailEnd type="none" w="med" len="med"/>
+                    </a:lnT>
+                    <a:lnB w="6350" cap="flat" cmpd="sng" algn="ctr">
+                      <a:solidFill>
+                        <a:srgbClr val="C9D6DD"/>
+                      </a:solidFill>
+                      <a:prstDash val="solid"/>
+                      <a:round/>
+                      <a:headEnd type="none" w="med" len="med"/>
+                      <a:tailEnd type="none" w="med" len="med"/>
+                    </a:lnB>
+                    <a:solidFill>
+                      <a:srgbClr val="FFFFFF"/>
+                    </a:solidFill>
+                  </a:tcPr>
+                </a:tc>
+                <a:tc>
+                  <a:txBody>
+                    <a:bodyPr/>
+                    <a:lstStyle/>
+                    <a:p>
+                      <a:pPr algn="l" indent="0" marL="0">
+                        <a:buNone/>
+                      </a:pPr>
+                      <a:r>
+                        <a:rPr lang="en-US" sz="1300" dirty="0">
+                          <a:solidFill>
+                            <a:srgbClr val="14232E"/>
+                          </a:solidFill>
+                        </a:rPr>
+                        <a:t>2</a:t>
+                      </a:r>
+                      <a:endParaRPr lang="en-US" sz="1300" dirty="0"/>
+                    </a:p>
+                  </a:txBody>
+                  <a:tcPr marL="76200" marR="76200" marT="38100" marB="38100" anchor="ctr">
+                    <a:lnL w="6350" cap="flat" cmpd="sng" algn="ctr">
+                      <a:solidFill>
+                        <a:srgbClr val="C9D6DD"/>
+                      </a:solidFill>
+                      <a:prstDash val="solid"/>
+                      <a:round/>
+                      <a:headEnd type="none" w="med" len="med"/>
+                      <a:tailEnd type="none" w="med" len="med"/>
+                    </a:lnL>
+                    <a:lnR w="6350" cap="flat" cmpd="sng" algn="ctr">
+                      <a:solidFill>
+                        <a:srgbClr val="C9D6DD"/>
+                      </a:solidFill>
+                      <a:prstDash val="solid"/>
+                      <a:round/>
+                      <a:headEnd type="none" w="med" len="med"/>
+                      <a:tailEnd type="none" w="med" len="med"/>
+                    </a:lnR>
+                    <a:lnT w="6350" cap="flat" cmpd="sng" algn="ctr">
+                      <a:solidFill>
+                        <a:srgbClr val="C9D6DD"/>
+                      </a:solidFill>
+                      <a:prstDash val="solid"/>
+                      <a:round/>
+                      <a:headEnd type="none" w="med" len="med"/>
+                      <a:tailEnd type="none" w="med" len="med"/>
+                    </a:lnT>
+                    <a:lnB w="6350" cap="flat" cmpd="sng" algn="ctr">
+                      <a:solidFill>
+                        <a:srgbClr val="C9D6DD"/>
+                      </a:solidFill>
+                      <a:prstDash val="solid"/>
+                      <a:round/>
+                      <a:headEnd type="none" w="med" len="med"/>
+                      <a:tailEnd type="none" w="med" len="med"/>
+                    </a:lnB>
+                    <a:solidFill>
+                      <a:srgbClr val="FFFFFF"/>
+                    </a:solidFill>
+                  </a:tcPr>
+                </a:tc>
+                <a:tc>
+                  <a:txBody>
+                    <a:bodyPr/>
+                    <a:lstStyle/>
+                    <a:p>
+                      <a:pPr algn="r" indent="0" marL="0">
+                        <a:buNone/>
+                      </a:pPr>
+                      <a:r>
+                        <a:rPr lang="en-US" sz="1300" dirty="0">
+                          <a:solidFill>
+                            <a:srgbClr val="14232E"/>
+                          </a:solidFill>
+                        </a:rPr>
+                        <a:t>$230 000</a:t>
+                      </a:r>
+                      <a:endParaRPr lang="en-US" sz="1300" dirty="0"/>
+                    </a:p>
+                  </a:txBody>
+                  <a:tcPr marL="76200" marR="76200" marT="38100" marB="38100" anchor="ctr">
+                    <a:lnL w="6350" cap="flat" cmpd="sng" algn="ctr">
+                      <a:solidFill>
+                        <a:srgbClr val="C9D6DD"/>
+                      </a:solidFill>
+                      <a:prstDash val="solid"/>
+                      <a:round/>
+                      <a:headEnd type="none" w="med" len="med"/>
+                      <a:tailEnd type="none" w="med" len="med"/>
+                    </a:lnL>
+                    <a:lnR w="6350" cap="flat" cmpd="sng" algn="ctr">
+                      <a:solidFill>
+                        <a:srgbClr val="C9D6DD"/>
+                      </a:solidFill>
+                      <a:prstDash val="solid"/>
+                      <a:round/>
+                      <a:headEnd type="none" w="med" len="med"/>
+                      <a:tailEnd type="none" w="med" len="med"/>
+                    </a:lnR>
+                    <a:lnT w="6350" cap="flat" cmpd="sng" algn="ctr">
+                      <a:solidFill>
+                        <a:srgbClr val="C9D6DD"/>
+                      </a:solidFill>
+                      <a:prstDash val="solid"/>
+                      <a:round/>
+                      <a:headEnd type="none" w="med" len="med"/>
+                      <a:tailEnd type="none" w="med" len="med"/>
+                    </a:lnT>
+                    <a:lnB w="6350" cap="flat" cmpd="sng" algn="ctr">
+                      <a:solidFill>
+                        <a:srgbClr val="C9D6DD"/>
+                      </a:solidFill>
+                      <a:prstDash val="solid"/>
+                      <a:round/>
+                      <a:headEnd type="none" w="med" len="med"/>
+                      <a:tailEnd type="none" w="med" len="med"/>
+                    </a:lnB>
+                    <a:solidFill>
+                      <a:srgbClr val="FFFFFF"/>
+                    </a:solidFill>
+                  </a:tcPr>
+                </a:tc>
+                <a:tc>
+                  <a:txBody>
+                    <a:bodyPr/>
+                    <a:lstStyle/>
+                    <a:p>
+                      <a:pPr algn="l" indent="0" marL="0">
+                        <a:buNone/>
+                      </a:pPr>
+                      <a:r>
+                        <a:rPr lang="en-US" sz="1300" dirty="0">
+                          <a:solidFill>
+                            <a:srgbClr val="14232E"/>
+                          </a:solidFill>
+                        </a:rPr>
+                        <a:t>Atlas Copco, Bosch, Siemens</a:t>
+                      </a:r>
+                      <a:endParaRPr lang="en-US" sz="1300" dirty="0"/>
+                    </a:p>
+                  </a:txBody>
+                  <a:tcPr marL="76200" marR="76200" marT="38100" marB="38100" anchor="ctr">
+                    <a:lnL w="6350" cap="flat" cmpd="sng" algn="ctr">
+                      <a:solidFill>
+                        <a:srgbClr val="C9D6DD"/>
+                      </a:solidFill>
+                      <a:prstDash val="solid"/>
+                      <a:round/>
+                      <a:headEnd type="none" w="med" len="med"/>
+                      <a:tailEnd type="none" w="med" len="med"/>
+                    </a:lnL>
+                    <a:lnR w="6350" cap="flat" cmpd="sng" algn="ctr">
+                      <a:solidFill>
+                        <a:srgbClr val="C9D6DD"/>
+                      </a:solidFill>
+                      <a:prstDash val="solid"/>
+                      <a:round/>
+                      <a:headEnd type="none" w="med" len="med"/>
+                      <a:tailEnd type="none" w="med" len="med"/>
+                    </a:lnR>
+                    <a:lnT w="6350" cap="flat" cmpd="sng" algn="ctr">
+                      <a:solidFill>
+                        <a:srgbClr val="C9D6DD"/>
+                      </a:solidFill>
+                      <a:prstDash val="solid"/>
+                      <a:round/>
+                      <a:headEnd type="none" w="med" len="med"/>
+                      <a:tailEnd type="none" w="med" len="med"/>
+                    </a:lnT>
+                    <a:lnB w="6350" cap="flat" cmpd="sng" algn="ctr">
+                      <a:solidFill>
+                        <a:srgbClr val="C9D6DD"/>
+                      </a:solidFill>
+                      <a:prstDash val="solid"/>
+                      <a:round/>
+                      <a:headEnd type="none" w="med" len="med"/>
+                      <a:tailEnd type="none" w="med" len="med"/>
+                    </a:lnB>
+                    <a:solidFill>
+                      <a:srgbClr val="FFFFFF"/>
+                    </a:solidFill>
+                  </a:tcPr>
+                </a:tc>
+              </a:tr>
+              <a:tr h="457200">
+                <a:tc>
+                  <a:txBody>
+                    <a:bodyPr/>
+                    <a:lstStyle/>
+                    <a:p>
+                      <a:pPr algn="l" indent="0" marL="0">
+                        <a:buNone/>
+                      </a:pPr>
+                      <a:r>
+                        <a:rPr lang="en-US" sz="1300" b="1" dirty="0">
+                          <a:solidFill>
+                            <a:srgbClr val="14232E"/>
+                          </a:solidFill>
+                        </a:rPr>
+                        <a:t>Jami CAPEX (montaj, logistika, zaxira bilan)</a:t>
+                      </a:r>
+                      <a:endParaRPr lang="en-US" sz="1300" dirty="0"/>
+                    </a:p>
+                  </a:txBody>
+                  <a:tcPr marL="76200" marR="76200" marT="38100" marB="38100" anchor="ctr">
+                    <a:lnL w="6350" cap="flat" cmpd="sng" algn="ctr">
+                      <a:solidFill>
+                        <a:srgbClr val="C9D6DD"/>
+                      </a:solidFill>
+                      <a:prstDash val="solid"/>
+                      <a:round/>
+                      <a:headEnd type="none" w="med" len="med"/>
+                      <a:tailEnd type="none" w="med" len="med"/>
+                    </a:lnL>
+                    <a:lnR w="6350" cap="flat" cmpd="sng" algn="ctr">
+                      <a:solidFill>
+                        <a:srgbClr val="C9D6DD"/>
+                      </a:solidFill>
+                      <a:prstDash val="solid"/>
+                      <a:round/>
+                      <a:headEnd type="none" w="med" len="med"/>
+                      <a:tailEnd type="none" w="med" len="med"/>
+                    </a:lnR>
+                    <a:lnT w="6350" cap="flat" cmpd="sng" algn="ctr">
+                      <a:solidFill>
+                        <a:srgbClr val="C9D6DD"/>
+                      </a:solidFill>
+                      <a:prstDash val="solid"/>
+                      <a:round/>
+                      <a:headEnd type="none" w="med" len="med"/>
+                      <a:tailEnd type="none" w="med" len="med"/>
+                    </a:lnT>
+                    <a:lnB w="6350" cap="flat" cmpd="sng" algn="ctr">
+                      <a:solidFill>
+                        <a:srgbClr val="C9D6DD"/>
+                      </a:solidFill>
+                      <a:prstDash val="solid"/>
+                      <a:round/>
+                      <a:headEnd type="none" w="med" len="med"/>
+                      <a:tailEnd type="none" w="med" len="med"/>
+                    </a:lnB>
+                    <a:solidFill>
+                      <a:srgbClr val="EAF3F1"/>
+                    </a:solidFill>
+                  </a:tcPr>
+                </a:tc>
+                <a:tc>
+                  <a:txBody>
+                    <a:bodyPr/>
+                    <a:lstStyle/>
+                    <a:p>
+                      <a:pPr algn="l" indent="0" marL="0">
+                        <a:buNone/>
+                      </a:pPr>
+                      <a:endParaRPr lang="en-US" sz="1300" dirty="0"/>
+                    </a:p>
+                  </a:txBody>
+                  <a:tcPr marL="76200" marR="76200" marT="38100" marB="38100" anchor="ctr">
+                    <a:lnL w="6350" cap="flat" cmpd="sng" algn="ctr">
+                      <a:solidFill>
+                        <a:srgbClr val="C9D6DD"/>
+                      </a:solidFill>
+                      <a:prstDash val="solid"/>
+                      <a:round/>
+                      <a:headEnd type="none" w="med" len="med"/>
+                      <a:tailEnd type="none" w="med" len="med"/>
+                    </a:lnL>
+                    <a:lnR w="6350" cap="flat" cmpd="sng" algn="ctr">
+                      <a:solidFill>
+                        <a:srgbClr val="C9D6DD"/>
+                      </a:solidFill>
+                      <a:prstDash val="solid"/>
+                      <a:round/>
+                      <a:headEnd type="none" w="med" len="med"/>
+                      <a:tailEnd type="none" w="med" len="med"/>
+                    </a:lnR>
+                    <a:lnT w="6350" cap="flat" cmpd="sng" algn="ctr">
+                      <a:solidFill>
+                        <a:srgbClr val="C9D6DD"/>
+                      </a:solidFill>
+                      <a:prstDash val="solid"/>
+                      <a:round/>
+                      <a:headEnd type="none" w="med" len="med"/>
+                      <a:tailEnd type="none" w="med" len="med"/>
+                    </a:lnT>
+                    <a:lnB w="6350" cap="flat" cmpd="sng" algn="ctr">
+                      <a:solidFill>
+                        <a:srgbClr val="C9D6DD"/>
+                      </a:solidFill>
+                      <a:prstDash val="solid"/>
+                      <a:round/>
+                      <a:headEnd type="none" w="med" len="med"/>
+                      <a:tailEnd type="none" w="med" len="med"/>
+                    </a:lnB>
+                    <a:solidFill>
+                      <a:srgbClr val="EAF3F1"/>
+                    </a:solidFill>
+                  </a:tcPr>
+                </a:tc>
+                <a:tc>
+                  <a:txBody>
+                    <a:bodyPr/>
+                    <a:lstStyle/>
+                    <a:p>
+                      <a:pPr algn="r" indent="0" marL="0">
+                        <a:buNone/>
+                      </a:pPr>
+                      <a:r>
+                        <a:rPr lang="en-US" sz="1300" b="1" dirty="0">
+                          <a:solidFill>
+                            <a:srgbClr val="14232E"/>
+                          </a:solidFill>
+                        </a:rPr>
+                        <a:t>$1 703 972</a:t>
+                      </a:r>
+                      <a:endParaRPr lang="en-US" sz="1300" dirty="0"/>
+                    </a:p>
+                  </a:txBody>
+                  <a:tcPr marL="76200" marR="76200" marT="38100" marB="38100" anchor="ctr">
+                    <a:lnL w="6350" cap="flat" cmpd="sng" algn="ctr">
+                      <a:solidFill>
+                        <a:srgbClr val="C9D6DD"/>
+                      </a:solidFill>
+                      <a:prstDash val="solid"/>
+                      <a:round/>
+                      <a:headEnd type="none" w="med" len="med"/>
+                      <a:tailEnd type="none" w="med" len="med"/>
+                    </a:lnL>
+                    <a:lnR w="6350" cap="flat" cmpd="sng" algn="ctr">
+                      <a:solidFill>
+                        <a:srgbClr val="C9D6DD"/>
+                      </a:solidFill>
+                      <a:prstDash val="solid"/>
+                      <a:round/>
+                      <a:headEnd type="none" w="med" len="med"/>
+                      <a:tailEnd type="none" w="med" len="med"/>
+                    </a:lnR>
+                    <a:lnT w="6350" cap="flat" cmpd="sng" algn="ctr">
+                      <a:solidFill>
+                        <a:srgbClr val="C9D6DD"/>
+                      </a:solidFill>
+                      <a:prstDash val="solid"/>
+                      <a:round/>
+                      <a:headEnd type="none" w="med" len="med"/>
+                      <a:tailEnd type="none" w="med" len="med"/>
+                    </a:lnT>
+                    <a:lnB w="6350" cap="flat" cmpd="sng" algn="ctr">
+                      <a:solidFill>
+                        <a:srgbClr val="C9D6DD"/>
+                      </a:solidFill>
+                      <a:prstDash val="solid"/>
+                      <a:round/>
+                      <a:headEnd type="none" w="med" len="med"/>
+                      <a:tailEnd type="none" w="med" len="med"/>
+                    </a:lnB>
+                    <a:solidFill>
+                      <a:srgbClr val="EAF3F1"/>
+                    </a:solidFill>
+                  </a:tcPr>
+                </a:tc>
+                <a:tc>
+                  <a:txBody>
+                    <a:bodyPr/>
+                    <a:lstStyle/>
+                    <a:p>
+                      <a:pPr algn="l" indent="0" marL="0">
+                        <a:buNone/>
+                      </a:pPr>
+                      <a:endParaRPr lang="en-US" sz="1300" dirty="0"/>
+                    </a:p>
+                  </a:txBody>
+                  <a:tcPr marL="76200" marR="76200" marT="38100" marB="38100" anchor="ctr">
+                    <a:lnL w="6350" cap="flat" cmpd="sng" algn="ctr">
+                      <a:solidFill>
+                        <a:srgbClr val="C9D6DD"/>
+                      </a:solidFill>
+                      <a:prstDash val="solid"/>
+                      <a:round/>
+                      <a:headEnd type="none" w="med" len="med"/>
+                      <a:tailEnd type="none" w="med" len="med"/>
+                    </a:lnL>
+                    <a:lnR w="6350" cap="flat" cmpd="sng" algn="ctr">
+                      <a:solidFill>
+                        <a:srgbClr val="C9D6DD"/>
+                      </a:solidFill>
+                      <a:prstDash val="solid"/>
+                      <a:round/>
+                      <a:headEnd type="none" w="med" len="med"/>
+                      <a:tailEnd type="none" w="med" len="med"/>
+                    </a:lnR>
+                    <a:lnT w="6350" cap="flat" cmpd="sng" algn="ctr">
+                      <a:solidFill>
+                        <a:srgbClr val="C9D6DD"/>
+                      </a:solidFill>
+                      <a:prstDash val="solid"/>
+                      <a:round/>
+                      <a:headEnd type="none" w="med" len="med"/>
+                      <a:tailEnd type="none" w="med" len="med"/>
+                    </a:lnT>
+                    <a:lnB w="6350" cap="flat" cmpd="sng" algn="ctr">
+                      <a:solidFill>
+                        <a:srgbClr val="C9D6DD"/>
+                      </a:solidFill>
+                      <a:prstDash val="solid"/>
+                      <a:round/>
+                      <a:headEnd type="none" w="med" len="med"/>
+                      <a:tailEnd type="none" w="med" len="med"/>
+                    </a:lnB>
+                    <a:solidFill>
+                      <a:srgbClr val="EAF3F1"/>
+                    </a:solidFill>
+                  </a:tcPr>
+                </a:tc>
+              </a:tr>
+            </a:tbl>
+          </a:graphicData>
+        </a:graphic>
+      </p:graphicFrame>
+      <p:sp>
+        <p:nvSpPr>
+          <p:cNvPr id="4" name="Text 1"/>
           <p:cNvSpPr txBox="1"/>
           <p:nvPr/>
         </p:nvSpPr>
         <p:spPr>
           <a:xfrm>
-            <a:off x="822960" y="1554480"/>
-            <a:ext cx="4937760" cy="457200"/>
+            <a:off x="548640" y="5806440"/>
+            <a:ext cx="11064240" cy="365760"/>
           </a:xfrm>
           <a:prstGeom prst="rect">
             <a:avLst/>
@@ -3681,527 +5978,14 @@
               <a:buNone/>
             </a:pPr>
             <a:r>
-              <a:rPr lang="en-US" sz="2000" b="1" dirty="0">
-                <a:solidFill>
-                  <a:schemeClr val="accent1"/>
+              <a:rPr lang="en-US" sz="1100" dirty="0">
+                <a:solidFill>
+                  <a:schemeClr val="accent6"/>
                 </a:solidFill>
               </a:rPr>
-              <a:t>Rasmiy saytlar</a:t>
+              <a:t>Narxlar — ochiq bozor e’lonlari asosidagi taxmin. Har bir pozitsiya bo‘yicha kamida 3 ta tijorat taklifi (KP) olinadi.</a:t>
             </a:r>
-            <a:endParaRPr lang="en-US" sz="2000" dirty="0"/>
-          </a:p>
-        </p:txBody>
-      </p:sp>
-      <p:sp>
-        <p:nvSpPr>
-          <p:cNvPr id="5" name="Text 3"/>
-          <p:cNvSpPr txBox="1"/>
-          <p:nvPr/>
-        </p:nvSpPr>
-        <p:spPr>
-          <a:xfrm>
-            <a:off x="822960" y="2057400"/>
-            <a:ext cx="4937760" cy="822960"/>
-          </a:xfrm>
-          <a:prstGeom prst="rect">
-            <a:avLst/>
-          </a:prstGeom>
-          <a:noFill/>
-          <a:ln/>
-        </p:spPr>
-        <p:txBody>
-          <a:bodyPr wrap="square" lIns="0" tIns="0" rIns="0" bIns="0" rtlCol="0" anchor="t"/>
-          <a:lstStyle/>
-          <a:p>
-            <a:pPr indent="0" marL="0">
-              <a:buNone/>
-            </a:pPr>
-            <a:r>
-              <a:rPr lang="en-US" sz="1500" dirty="0">
-                <a:solidFill>
-                  <a:schemeClr val="tx1"/>
-                </a:solidFill>
-              </a:rPr>
-              <a:t>sartorius.com · eppendorf.com · alfalaval.com · gea.com · coperion.com · agilent.com</a:t>
-            </a:r>
-            <a:endParaRPr lang="en-US" sz="1500" dirty="0"/>
-          </a:p>
-        </p:txBody>
-      </p:sp>
-      <p:sp>
-        <p:nvSpPr>
-          <p:cNvPr id="6" name="Text 4"/>
-          <p:cNvSpPr txBox="1"/>
-          <p:nvPr/>
-        </p:nvSpPr>
-        <p:spPr>
-          <a:xfrm>
-            <a:off x="822960" y="2880360"/>
-            <a:ext cx="4937760" cy="457200"/>
-          </a:xfrm>
-          <a:prstGeom prst="rect">
-            <a:avLst/>
-          </a:prstGeom>
-          <a:noFill/>
-          <a:ln/>
-        </p:spPr>
-        <p:txBody>
-          <a:bodyPr wrap="square" lIns="0" tIns="0" rIns="0" bIns="0" rtlCol="0" anchor="ctr"/>
-          <a:lstStyle/>
-          <a:p>
-            <a:pPr indent="0" marL="0">
-              <a:buNone/>
-            </a:pPr>
-            <a:r>
-              <a:rPr lang="en-US" sz="1300" i="1" dirty="0">
-                <a:solidFill>
-                  <a:schemeClr val="accent6"/>
-                </a:solidFill>
-              </a:rPr>
-              <a:t>Eng sifatli rasmlar va texnik tavsif</a:t>
-            </a:r>
-            <a:endParaRPr lang="en-US" sz="1300" dirty="0"/>
-          </a:p>
-        </p:txBody>
-      </p:sp>
-      <p:sp>
-        <p:nvSpPr>
-          <p:cNvPr id="7" name="src 1"/>
-          <p:cNvSpPr/>
-          <p:nvPr/>
-        </p:nvSpPr>
-        <p:spPr>
-          <a:xfrm>
-            <a:off x="6172200" y="1371600"/>
-            <a:ext cx="5440680" cy="2103120"/>
-          </a:xfrm>
-          <a:prstGeom prst="roundRect">
-            <a:avLst>
-              <a:gd name="adj" fmla="val 5217"/>
-            </a:avLst>
-          </a:prstGeom>
-          <a:solidFill>
-            <a:schemeClr val="bg2"/>
-          </a:solidFill>
-          <a:ln w="12700">
-            <a:solidFill>
-              <a:schemeClr val="bg2"/>
-            </a:solidFill>
-            <a:prstDash val="solid"/>
-          </a:ln>
-        </p:spPr>
-      </p:sp>
-      <p:sp>
-        <p:nvSpPr>
-          <p:cNvPr id="8" name="Text 6"/>
-          <p:cNvSpPr txBox="1"/>
-          <p:nvPr/>
-        </p:nvSpPr>
-        <p:spPr>
-          <a:xfrm>
-            <a:off x="6446520" y="1554480"/>
-            <a:ext cx="4937760" cy="457200"/>
-          </a:xfrm>
-          <a:prstGeom prst="rect">
-            <a:avLst/>
-          </a:prstGeom>
-          <a:noFill/>
-          <a:ln/>
-        </p:spPr>
-        <p:txBody>
-          <a:bodyPr wrap="square" lIns="0" tIns="0" rIns="0" bIns="0" rtlCol="0" anchor="ctr"/>
-          <a:lstStyle/>
-          <a:p>
-            <a:pPr indent="0" marL="0">
-              <a:buNone/>
-            </a:pPr>
-            <a:r>
-              <a:rPr lang="en-US" sz="2000" b="1" dirty="0">
-                <a:solidFill>
-                  <a:schemeClr val="accent1"/>
-                </a:solidFill>
-              </a:rPr>
-              <a:t>B2B maydonchalar</a:t>
-            </a:r>
-            <a:endParaRPr lang="en-US" sz="2000" dirty="0"/>
-          </a:p>
-        </p:txBody>
-      </p:sp>
-      <p:sp>
-        <p:nvSpPr>
-          <p:cNvPr id="9" name="Text 7"/>
-          <p:cNvSpPr txBox="1"/>
-          <p:nvPr/>
-        </p:nvSpPr>
-        <p:spPr>
-          <a:xfrm>
-            <a:off x="6446520" y="2057400"/>
-            <a:ext cx="4937760" cy="822960"/>
-          </a:xfrm>
-          <a:prstGeom prst="rect">
-            <a:avLst/>
-          </a:prstGeom>
-          <a:noFill/>
-          <a:ln/>
-        </p:spPr>
-        <p:txBody>
-          <a:bodyPr wrap="square" lIns="0" tIns="0" rIns="0" bIns="0" rtlCol="0" anchor="t"/>
-          <a:lstStyle/>
-          <a:p>
-            <a:pPr indent="0" marL="0">
-              <a:buNone/>
-            </a:pPr>
-            <a:r>
-              <a:rPr lang="en-US" sz="1500" dirty="0">
-                <a:solidFill>
-                  <a:schemeClr val="tx1"/>
-                </a:solidFill>
-              </a:rPr>
-              <a:t>alibaba.com · made-in-china.com (fermenter, blown film machine)</a:t>
-            </a:r>
-            <a:endParaRPr lang="en-US" sz="1500" dirty="0"/>
-          </a:p>
-        </p:txBody>
-      </p:sp>
-      <p:sp>
-        <p:nvSpPr>
-          <p:cNvPr id="10" name="Text 8"/>
-          <p:cNvSpPr txBox="1"/>
-          <p:nvPr/>
-        </p:nvSpPr>
-        <p:spPr>
-          <a:xfrm>
-            <a:off x="6446520" y="2880360"/>
-            <a:ext cx="4937760" cy="457200"/>
-          </a:xfrm>
-          <a:prstGeom prst="rect">
-            <a:avLst/>
-          </a:prstGeom>
-          <a:noFill/>
-          <a:ln/>
-        </p:spPr>
-        <p:txBody>
-          <a:bodyPr wrap="square" lIns="0" tIns="0" rIns="0" bIns="0" rtlCol="0" anchor="ctr"/>
-          <a:lstStyle/>
-          <a:p>
-            <a:pPr indent="0" marL="0">
-              <a:buNone/>
-            </a:pPr>
-            <a:r>
-              <a:rPr lang="en-US" sz="1300" i="1" dirty="0">
-                <a:solidFill>
-                  <a:schemeClr val="accent6"/>
-                </a:solidFill>
-              </a:rPr>
-              <a:t>Narx bilan birga; so‘rovga HD rasm va video yuboriladi</a:t>
-            </a:r>
-            <a:endParaRPr lang="en-US" sz="1300" dirty="0"/>
-          </a:p>
-        </p:txBody>
-      </p:sp>
-      <p:sp>
-        <p:nvSpPr>
-          <p:cNvPr id="11" name="src 2"/>
-          <p:cNvSpPr/>
-          <p:nvPr/>
-        </p:nvSpPr>
-        <p:spPr>
-          <a:xfrm>
-            <a:off x="548640" y="3703320"/>
-            <a:ext cx="5440680" cy="2103120"/>
-          </a:xfrm>
-          <a:prstGeom prst="roundRect">
-            <a:avLst>
-              <a:gd name="adj" fmla="val 5217"/>
-            </a:avLst>
-          </a:prstGeom>
-          <a:solidFill>
-            <a:schemeClr val="bg2"/>
-          </a:solidFill>
-          <a:ln w="12700">
-            <a:solidFill>
-              <a:schemeClr val="bg2"/>
-            </a:solidFill>
-            <a:prstDash val="solid"/>
-          </a:ln>
-        </p:spPr>
-      </p:sp>
-      <p:sp>
-        <p:nvSpPr>
-          <p:cNvPr id="12" name="Text 10"/>
-          <p:cNvSpPr txBox="1"/>
-          <p:nvPr/>
-        </p:nvSpPr>
-        <p:spPr>
-          <a:xfrm>
-            <a:off x="822960" y="3886200"/>
-            <a:ext cx="4937760" cy="457200"/>
-          </a:xfrm>
-          <a:prstGeom prst="rect">
-            <a:avLst/>
-          </a:prstGeom>
-          <a:noFill/>
-          <a:ln/>
-        </p:spPr>
-        <p:txBody>
-          <a:bodyPr wrap="square" lIns="0" tIns="0" rIns="0" bIns="0" rtlCol="0" anchor="ctr"/>
-          <a:lstStyle/>
-          <a:p>
-            <a:pPr indent="0" marL="0">
-              <a:buNone/>
-            </a:pPr>
-            <a:r>
-              <a:rPr lang="en-US" sz="2000" b="1" dirty="0">
-                <a:solidFill>
-                  <a:schemeClr val="accent1"/>
-                </a:solidFill>
-              </a:rPr>
-              <a:t>Erkin litsenziya</a:t>
-            </a:r>
-            <a:endParaRPr lang="en-US" sz="2000" dirty="0"/>
-          </a:p>
-        </p:txBody>
-      </p:sp>
-      <p:sp>
-        <p:nvSpPr>
-          <p:cNvPr id="13" name="Text 11"/>
-          <p:cNvSpPr txBox="1"/>
-          <p:nvPr/>
-        </p:nvSpPr>
-        <p:spPr>
-          <a:xfrm>
-            <a:off x="822960" y="4389120"/>
-            <a:ext cx="4937760" cy="822960"/>
-          </a:xfrm>
-          <a:prstGeom prst="rect">
-            <a:avLst/>
-          </a:prstGeom>
-          <a:noFill/>
-          <a:ln/>
-        </p:spPr>
-        <p:txBody>
-          <a:bodyPr wrap="square" lIns="0" tIns="0" rIns="0" bIns="0" rtlCol="0" anchor="t"/>
-          <a:lstStyle/>
-          <a:p>
-            <a:pPr indent="0" marL="0">
-              <a:buNone/>
-            </a:pPr>
-            <a:r>
-              <a:rPr lang="en-US" sz="1500" dirty="0">
-                <a:solidFill>
-                  <a:schemeClr val="tx1"/>
-                </a:solidFill>
-              </a:rPr>
-              <a:t>commons.wikimedia.org — «Bioreactor», «Spray dryer», «Blown film extrusion»</a:t>
-            </a:r>
-            <a:endParaRPr lang="en-US" sz="1500" dirty="0"/>
-          </a:p>
-        </p:txBody>
-      </p:sp>
-      <p:sp>
-        <p:nvSpPr>
-          <p:cNvPr id="14" name="Text 12"/>
-          <p:cNvSpPr txBox="1"/>
-          <p:nvPr/>
-        </p:nvSpPr>
-        <p:spPr>
-          <a:xfrm>
-            <a:off x="822960" y="5212080"/>
-            <a:ext cx="4937760" cy="457200"/>
-          </a:xfrm>
-          <a:prstGeom prst="rect">
-            <a:avLst/>
-          </a:prstGeom>
-          <a:noFill/>
-          <a:ln/>
-        </p:spPr>
-        <p:txBody>
-          <a:bodyPr wrap="square" lIns="0" tIns="0" rIns="0" bIns="0" rtlCol="0" anchor="ctr"/>
-          <a:lstStyle/>
-          <a:p>
-            <a:pPr indent="0" marL="0">
-              <a:buNone/>
-            </a:pPr>
-            <a:r>
-              <a:rPr lang="en-US" sz="1300" i="1" dirty="0">
-                <a:solidFill>
-                  <a:schemeClr val="accent6"/>
-                </a:solidFill>
-              </a:rPr>
-              <a:t>CC litsenziya — muallifni ko‘rsatish kifoya</a:t>
-            </a:r>
-            <a:endParaRPr lang="en-US" sz="1300" dirty="0"/>
-          </a:p>
-        </p:txBody>
-      </p:sp>
-      <p:sp>
-        <p:nvSpPr>
-          <p:cNvPr id="15" name="src 3"/>
-          <p:cNvSpPr/>
-          <p:nvPr/>
-        </p:nvSpPr>
-        <p:spPr>
-          <a:xfrm>
-            <a:off x="6172200" y="3703320"/>
-            <a:ext cx="5440680" cy="2103120"/>
-          </a:xfrm>
-          <a:prstGeom prst="roundRect">
-            <a:avLst>
-              <a:gd name="adj" fmla="val 5217"/>
-            </a:avLst>
-          </a:prstGeom>
-          <a:solidFill>
-            <a:schemeClr val="tx2"/>
-          </a:solidFill>
-          <a:ln w="12700">
-            <a:solidFill>
-              <a:schemeClr val="tx2"/>
-            </a:solidFill>
-            <a:prstDash val="solid"/>
-          </a:ln>
-        </p:spPr>
-      </p:sp>
-      <p:sp>
-        <p:nvSpPr>
-          <p:cNvPr id="16" name="Text 14"/>
-          <p:cNvSpPr txBox="1"/>
-          <p:nvPr/>
-        </p:nvSpPr>
-        <p:spPr>
-          <a:xfrm>
-            <a:off x="6446520" y="3886200"/>
-            <a:ext cx="4937760" cy="457200"/>
-          </a:xfrm>
-          <a:prstGeom prst="rect">
-            <a:avLst/>
-          </a:prstGeom>
-          <a:noFill/>
-          <a:ln/>
-        </p:spPr>
-        <p:txBody>
-          <a:bodyPr wrap="square" lIns="0" tIns="0" rIns="0" bIns="0" rtlCol="0" anchor="ctr"/>
-          <a:lstStyle/>
-          <a:p>
-            <a:pPr indent="0" marL="0">
-              <a:buNone/>
-            </a:pPr>
-            <a:r>
-              <a:rPr lang="en-US" sz="2000" b="1" dirty="0">
-                <a:solidFill>
-                  <a:schemeClr val="accent3"/>
-                </a:solidFill>
-              </a:rPr>
-              <a:t>O‘z laboratoriyangiz</a:t>
-            </a:r>
-            <a:endParaRPr lang="en-US" sz="2000" dirty="0"/>
-          </a:p>
-        </p:txBody>
-      </p:sp>
-      <p:sp>
-        <p:nvSpPr>
-          <p:cNvPr id="17" name="Text 15"/>
-          <p:cNvSpPr txBox="1"/>
-          <p:nvPr/>
-        </p:nvSpPr>
-        <p:spPr>
-          <a:xfrm>
-            <a:off x="6446520" y="4389120"/>
-            <a:ext cx="4937760" cy="822960"/>
-          </a:xfrm>
-          <a:prstGeom prst="rect">
-            <a:avLst/>
-          </a:prstGeom>
-          <a:noFill/>
-          <a:ln/>
-        </p:spPr>
-        <p:txBody>
-          <a:bodyPr wrap="square" lIns="0" tIns="0" rIns="0" bIns="0" rtlCol="0" anchor="t"/>
-          <a:lstStyle/>
-          <a:p>
-            <a:pPr indent="0" marL="0">
-              <a:buNone/>
-            </a:pPr>
-            <a:r>
-              <a:rPr lang="en-US" sz="1500" dirty="0">
-                <a:solidFill>
-                  <a:schemeClr val="bg1"/>
-                </a:solidFill>
-              </a:rPr>
-              <a:t>PHA donachalarini Nil qizili yoki Sudan qora B bilan bo‘yab mikroskopda suratga olish</a:t>
-            </a:r>
-            <a:endParaRPr lang="en-US" sz="1500" dirty="0"/>
-          </a:p>
-        </p:txBody>
-      </p:sp>
-      <p:sp>
-        <p:nvSpPr>
-          <p:cNvPr id="18" name="Text 16"/>
-          <p:cNvSpPr txBox="1"/>
-          <p:nvPr/>
-        </p:nvSpPr>
-        <p:spPr>
-          <a:xfrm>
-            <a:off x="6446520" y="5212080"/>
-            <a:ext cx="4937760" cy="457200"/>
-          </a:xfrm>
-          <a:prstGeom prst="rect">
-            <a:avLst/>
-          </a:prstGeom>
-          <a:noFill/>
-          <a:ln/>
-        </p:spPr>
-        <p:txBody>
-          <a:bodyPr wrap="square" lIns="0" tIns="0" rIns="0" bIns="0" rtlCol="0" anchor="ctr"/>
-          <a:lstStyle/>
-          <a:p>
-            <a:pPr indent="0" marL="0">
-              <a:buNone/>
-            </a:pPr>
-            <a:r>
-              <a:rPr lang="en-US" sz="1300" i="1" dirty="0">
-                <a:solidFill>
-                  <a:schemeClr val="bg2"/>
-                </a:solidFill>
-              </a:rPr>
-              <a:t>Eng kuchli dalil: real natija</a:t>
-            </a:r>
-            <a:endParaRPr lang="en-US" sz="1300" dirty="0"/>
-          </a:p>
-        </p:txBody>
-      </p:sp>
-      <p:sp>
-        <p:nvSpPr>
-          <p:cNvPr id="19" name="Text 17"/>
-          <p:cNvSpPr txBox="1"/>
-          <p:nvPr/>
-        </p:nvSpPr>
-        <p:spPr>
-          <a:xfrm>
-            <a:off x="548640" y="6035040"/>
-            <a:ext cx="11064240" cy="320040"/>
-          </a:xfrm>
-          <a:prstGeom prst="rect">
-            <a:avLst/>
-          </a:prstGeom>
-          <a:noFill/>
-          <a:ln/>
-        </p:spPr>
-        <p:txBody>
-          <a:bodyPr wrap="square" lIns="0" tIns="0" rIns="0" bIns="0" rtlCol="0" anchor="ctr"/>
-          <a:lstStyle/>
-          <a:p>
-            <a:pPr indent="0" marL="0">
-              <a:buNone/>
-            </a:pPr>
-            <a:r>
-              <a:rPr lang="en-US" sz="1200" dirty="0">
-                <a:solidFill>
-                  <a:schemeClr val="tx2"/>
-                </a:solidFill>
-              </a:rPr>
-              <a:t>Dastlabki taqdimotdagi AI-rasmlar o‘rniga real uskuna va real mikroskop suratlarini qo‘ying — komissiya ishonchi oshadi.</a:t>
-            </a:r>
-            <a:endParaRPr lang="en-US" sz="1200" dirty="0"/>
+            <a:endParaRPr lang="en-US" sz="1100" dirty="0"/>
           </a:p>
         </p:txBody>
       </p:sp>
@@ -4307,38 +6091,49 @@
                   <a:schemeClr val="tx2"/>
                 </a:solidFill>
               </a:rPr>
-              <a:t>1 t paket tannarxi $2 195, sotish narxi $3 900</a:t>
+              <a:t>Uskuna rasmlarini qayerdan olish mumkin</a:t>
             </a:r>
             <a:endParaRPr lang="en-US" sz="3400" dirty="0"/>
           </a:p>
         </p:txBody>
       </p:sp>
-      <p:graphicFrame>
-        <p:nvGraphicFramePr>
-          <p:cNvPr id="3" name="unit cost chart" descr=""/>
-          <p:cNvGraphicFramePr/>
+      <p:sp>
+        <p:nvSpPr>
+          <p:cNvPr id="3" name="src 0"/>
+          <p:cNvSpPr/>
           <p:nvPr/>
-        </p:nvGraphicFramePr>
-        <p:xfrm>
-          <a:off x="548640" y="1325880"/>
-          <a:ext cx="6766560" cy="4754880"/>
-        </p:xfrm>
-        <a:graphic xmlns:a="http://schemas.openxmlformats.org/drawingml/2006/main">
-          <a:graphicData uri="http://schemas.openxmlformats.org/drawingml/2006/chart">
-            <c:chart xmlns:c="http://schemas.openxmlformats.org/drawingml/2006/chart" r:id="rId1"/>
-          </a:graphicData>
-        </a:graphic>
-      </p:graphicFrame>
-      <p:sp>
-        <p:nvSpPr>
-          <p:cNvPr id="4" name="Text 1"/>
+        </p:nvSpPr>
+        <p:spPr>
+          <a:xfrm>
+            <a:off x="548640" y="1371600"/>
+            <a:ext cx="5440680" cy="2103120"/>
+          </a:xfrm>
+          <a:prstGeom prst="roundRect">
+            <a:avLst>
+              <a:gd name="adj" fmla="val 5217"/>
+            </a:avLst>
+          </a:prstGeom>
+          <a:solidFill>
+            <a:schemeClr val="bg2"/>
+          </a:solidFill>
+          <a:ln w="12700">
+            <a:solidFill>
+              <a:schemeClr val="bg2"/>
+            </a:solidFill>
+            <a:prstDash val="solid"/>
+          </a:ln>
+        </p:spPr>
+      </p:sp>
+      <p:sp>
+        <p:nvSpPr>
+          <p:cNvPr id="4" name="Text 2"/>
           <p:cNvSpPr txBox="1"/>
           <p:nvPr/>
         </p:nvSpPr>
         <p:spPr>
           <a:xfrm>
-            <a:off x="7772400" y="1463040"/>
-            <a:ext cx="3840480" cy="777240"/>
+            <a:off x="822960" y="1554480"/>
+            <a:ext cx="4937760" cy="457200"/>
           </a:xfrm>
           <a:prstGeom prst="rect">
             <a:avLst/>
@@ -4347,37 +6142,34 @@
           <a:ln/>
         </p:spPr>
         <p:txBody>
-          <a:bodyPr wrap="square" lIns="0" tIns="0" rIns="0" bIns="0" rtlCol="0" anchor="b"/>
+          <a:bodyPr wrap="square" lIns="0" tIns="0" rIns="0" bIns="0" rtlCol="0" anchor="ctr"/>
           <a:lstStyle/>
           <a:p>
             <a:pPr indent="0" marL="0">
               <a:buNone/>
             </a:pPr>
             <a:r>
-              <a:rPr lang="en-US" sz="4000" b="1" dirty="0">
+              <a:rPr lang="en-US" sz="2000" b="1" dirty="0">
                 <a:solidFill>
                   <a:schemeClr val="accent1"/>
                 </a:solidFill>
-                <a:latin typeface="Cambria" pitchFamily="34" charset="0"/>
-                <a:ea typeface="Cambria" pitchFamily="34" charset="-122"/>
-                <a:cs typeface="Cambria" pitchFamily="34" charset="-120"/>
               </a:rPr>
-              <a:t>$1 705</a:t>
+              <a:t>Rasmiy saytlar</a:t>
             </a:r>
-            <a:endParaRPr lang="en-US" sz="4000" dirty="0"/>
-          </a:p>
-        </p:txBody>
-      </p:sp>
-      <p:sp>
-        <p:nvSpPr>
-          <p:cNvPr id="5" name="Text 2"/>
+            <a:endParaRPr lang="en-US" sz="2000" dirty="0"/>
+          </a:p>
+        </p:txBody>
+      </p:sp>
+      <p:sp>
+        <p:nvSpPr>
+          <p:cNvPr id="5" name="Text 3"/>
           <p:cNvSpPr txBox="1"/>
           <p:nvPr/>
         </p:nvSpPr>
         <p:spPr>
           <a:xfrm>
-            <a:off x="7772400" y="2267712"/>
-            <a:ext cx="3840480" cy="640080"/>
+            <a:off x="822960" y="2057400"/>
+            <a:ext cx="4937760" cy="822960"/>
           </a:xfrm>
           <a:prstGeom prst="rect">
             <a:avLst/>
@@ -4393,27 +6185,27 @@
               <a:buNone/>
             </a:pPr>
             <a:r>
-              <a:rPr lang="en-US" sz="1400" dirty="0">
+              <a:rPr lang="en-US" sz="1500" dirty="0">
                 <a:solidFill>
                   <a:schemeClr val="tx1"/>
                 </a:solidFill>
               </a:rPr>
-              <a:t>marjinal foyda 1 t paketdan (43,7%)</a:t>
+              <a:t>sartorius.com · eppendorf.com · alfalaval.com · gea.com · coperion.com · agilent.com</a:t>
             </a:r>
-            <a:endParaRPr lang="en-US" sz="1400" dirty="0"/>
-          </a:p>
-        </p:txBody>
-      </p:sp>
-      <p:sp>
-        <p:nvSpPr>
-          <p:cNvPr id="6" name="Text 3"/>
+            <a:endParaRPr lang="en-US" sz="1500" dirty="0"/>
+          </a:p>
+        </p:txBody>
+      </p:sp>
+      <p:sp>
+        <p:nvSpPr>
+          <p:cNvPr id="6" name="Text 4"/>
           <p:cNvSpPr txBox="1"/>
           <p:nvPr/>
         </p:nvSpPr>
         <p:spPr>
           <a:xfrm>
-            <a:off x="7772400" y="3017520"/>
-            <a:ext cx="3840480" cy="777240"/>
+            <a:off x="822960" y="2880360"/>
+            <a:ext cx="4937760" cy="457200"/>
           </a:xfrm>
           <a:prstGeom prst="rect">
             <a:avLst/>
@@ -4422,37 +6214,61 @@
           <a:ln/>
         </p:spPr>
         <p:txBody>
-          <a:bodyPr wrap="square" lIns="0" tIns="0" rIns="0" bIns="0" rtlCol="0" anchor="b"/>
+          <a:bodyPr wrap="square" lIns="0" tIns="0" rIns="0" bIns="0" rtlCol="0" anchor="ctr"/>
           <a:lstStyle/>
           <a:p>
             <a:pPr indent="0" marL="0">
               <a:buNone/>
             </a:pPr>
             <a:r>
-              <a:rPr lang="en-US" sz="4000" b="1" dirty="0">
-                <a:solidFill>
-                  <a:schemeClr val="tx2"/>
-                </a:solidFill>
-                <a:latin typeface="Cambria" pitchFamily="34" charset="0"/>
-                <a:ea typeface="Cambria" pitchFamily="34" charset="-122"/>
-                <a:cs typeface="Cambria" pitchFamily="34" charset="-120"/>
+              <a:rPr lang="en-US" sz="1300" i="1" dirty="0">
+                <a:solidFill>
+                  <a:schemeClr val="accent6"/>
+                </a:solidFill>
               </a:rPr>
-              <a:t>$2 561</a:t>
+              <a:t>Eng sifatli rasmlar va texnik tavsif</a:t>
             </a:r>
-            <a:endParaRPr lang="en-US" sz="4000" dirty="0"/>
-          </a:p>
-        </p:txBody>
-      </p:sp>
-      <p:sp>
-        <p:nvSpPr>
-          <p:cNvPr id="7" name="Text 4"/>
+            <a:endParaRPr lang="en-US" sz="1300" dirty="0"/>
+          </a:p>
+        </p:txBody>
+      </p:sp>
+      <p:sp>
+        <p:nvSpPr>
+          <p:cNvPr id="7" name="src 1"/>
+          <p:cNvSpPr/>
+          <p:nvPr/>
+        </p:nvSpPr>
+        <p:spPr>
+          <a:xfrm>
+            <a:off x="6172200" y="1371600"/>
+            <a:ext cx="5440680" cy="2103120"/>
+          </a:xfrm>
+          <a:prstGeom prst="roundRect">
+            <a:avLst>
+              <a:gd name="adj" fmla="val 5217"/>
+            </a:avLst>
+          </a:prstGeom>
+          <a:solidFill>
+            <a:schemeClr val="bg2"/>
+          </a:solidFill>
+          <a:ln w="12700">
+            <a:solidFill>
+              <a:schemeClr val="bg2"/>
+            </a:solidFill>
+            <a:prstDash val="solid"/>
+          </a:ln>
+        </p:spPr>
+      </p:sp>
+      <p:sp>
+        <p:nvSpPr>
+          <p:cNvPr id="8" name="Text 6"/>
           <p:cNvSpPr txBox="1"/>
           <p:nvPr/>
         </p:nvSpPr>
         <p:spPr>
           <a:xfrm>
-            <a:off x="7772400" y="3822192"/>
-            <a:ext cx="3840480" cy="640080"/>
+            <a:off x="6446520" y="1554480"/>
+            <a:ext cx="4937760" cy="457200"/>
           </a:xfrm>
           <a:prstGeom prst="rect">
             <a:avLst/>
@@ -4461,34 +6277,34 @@
           <a:ln/>
         </p:spPr>
         <p:txBody>
-          <a:bodyPr wrap="square" lIns="0" tIns="0" rIns="0" bIns="0" rtlCol="0" anchor="t"/>
+          <a:bodyPr wrap="square" lIns="0" tIns="0" rIns="0" bIns="0" rtlCol="0" anchor="ctr"/>
           <a:lstStyle/>
           <a:p>
             <a:pPr indent="0" marL="0">
               <a:buNone/>
             </a:pPr>
             <a:r>
-              <a:rPr lang="en-US" sz="1400" dirty="0">
-                <a:solidFill>
-                  <a:schemeClr val="tx1"/>
+              <a:rPr lang="en-US" sz="2000" b="1" dirty="0">
+                <a:solidFill>
+                  <a:schemeClr val="accent1"/>
                 </a:solidFill>
               </a:rPr>
-              <a:t>1 t PHA ning o‘z tannarxi (bozor narxi $3 400–4 500)</a:t>
+              <a:t>B2B maydonchalar</a:t>
             </a:r>
-            <a:endParaRPr lang="en-US" sz="1400" dirty="0"/>
-          </a:p>
-        </p:txBody>
-      </p:sp>
-      <p:sp>
-        <p:nvSpPr>
-          <p:cNvPr id="8" name="Text 5"/>
+            <a:endParaRPr lang="en-US" sz="2000" dirty="0"/>
+          </a:p>
+        </p:txBody>
+      </p:sp>
+      <p:sp>
+        <p:nvSpPr>
+          <p:cNvPr id="9" name="Text 7"/>
           <p:cNvSpPr txBox="1"/>
           <p:nvPr/>
         </p:nvSpPr>
         <p:spPr>
           <a:xfrm>
-            <a:off x="7772400" y="4709160"/>
-            <a:ext cx="3840480" cy="1280160"/>
+            <a:off x="6446520" y="2057400"/>
+            <a:ext cx="4937760" cy="822960"/>
           </a:xfrm>
           <a:prstGeom prst="rect">
             <a:avLst/>
@@ -4497,21 +6313,363 @@
           <a:ln/>
         </p:spPr>
         <p:txBody>
-          <a:bodyPr wrap="square" lIns="0" tIns="0" rIns="0" bIns="0" rtlCol="0" anchor="ctr"/>
+          <a:bodyPr wrap="square" lIns="0" tIns="0" rIns="0" bIns="0" rtlCol="0" anchor="t"/>
           <a:lstStyle/>
           <a:p>
             <a:pPr indent="0" marL="0">
               <a:buNone/>
             </a:pPr>
             <a:r>
-              <a:rPr lang="en-US" sz="1400" i="1" dirty="0">
-                <a:solidFill>
-                  <a:schemeClr val="accent5"/>
+              <a:rPr lang="en-US" sz="1500" dirty="0">
+                <a:solidFill>
+                  <a:schemeClr val="tx1"/>
                 </a:solidFill>
               </a:rPr>
-              <a:t>Dastlabki taqdimotda: tannarx $95/t, narx $250/t — bu hatto polietilendan (~$1 200/t) ham 5 baravar arzon edi.</a:t>
+              <a:t>alibaba.com · made-in-china.com (fermenter, blown film machine)</a:t>
             </a:r>
-            <a:endParaRPr lang="en-US" sz="1400" dirty="0"/>
+            <a:endParaRPr lang="en-US" sz="1500" dirty="0"/>
+          </a:p>
+        </p:txBody>
+      </p:sp>
+      <p:sp>
+        <p:nvSpPr>
+          <p:cNvPr id="10" name="Text 8"/>
+          <p:cNvSpPr txBox="1"/>
+          <p:nvPr/>
+        </p:nvSpPr>
+        <p:spPr>
+          <a:xfrm>
+            <a:off x="6446520" y="2880360"/>
+            <a:ext cx="4937760" cy="457200"/>
+          </a:xfrm>
+          <a:prstGeom prst="rect">
+            <a:avLst/>
+          </a:prstGeom>
+          <a:noFill/>
+          <a:ln/>
+        </p:spPr>
+        <p:txBody>
+          <a:bodyPr wrap="square" lIns="0" tIns="0" rIns="0" bIns="0" rtlCol="0" anchor="ctr"/>
+          <a:lstStyle/>
+          <a:p>
+            <a:pPr indent="0" marL="0">
+              <a:buNone/>
+            </a:pPr>
+            <a:r>
+              <a:rPr lang="en-US" sz="1300" i="1" dirty="0">
+                <a:solidFill>
+                  <a:schemeClr val="accent6"/>
+                </a:solidFill>
+              </a:rPr>
+              <a:t>Narx bilan birga; so‘rovga HD rasm va video yuboriladi</a:t>
+            </a:r>
+            <a:endParaRPr lang="en-US" sz="1300" dirty="0"/>
+          </a:p>
+        </p:txBody>
+      </p:sp>
+      <p:sp>
+        <p:nvSpPr>
+          <p:cNvPr id="11" name="src 2"/>
+          <p:cNvSpPr/>
+          <p:nvPr/>
+        </p:nvSpPr>
+        <p:spPr>
+          <a:xfrm>
+            <a:off x="548640" y="3703320"/>
+            <a:ext cx="5440680" cy="2103120"/>
+          </a:xfrm>
+          <a:prstGeom prst="roundRect">
+            <a:avLst>
+              <a:gd name="adj" fmla="val 5217"/>
+            </a:avLst>
+          </a:prstGeom>
+          <a:solidFill>
+            <a:schemeClr val="bg2"/>
+          </a:solidFill>
+          <a:ln w="12700">
+            <a:solidFill>
+              <a:schemeClr val="bg2"/>
+            </a:solidFill>
+            <a:prstDash val="solid"/>
+          </a:ln>
+        </p:spPr>
+      </p:sp>
+      <p:sp>
+        <p:nvSpPr>
+          <p:cNvPr id="12" name="Text 10"/>
+          <p:cNvSpPr txBox="1"/>
+          <p:nvPr/>
+        </p:nvSpPr>
+        <p:spPr>
+          <a:xfrm>
+            <a:off x="822960" y="3886200"/>
+            <a:ext cx="4937760" cy="457200"/>
+          </a:xfrm>
+          <a:prstGeom prst="rect">
+            <a:avLst/>
+          </a:prstGeom>
+          <a:noFill/>
+          <a:ln/>
+        </p:spPr>
+        <p:txBody>
+          <a:bodyPr wrap="square" lIns="0" tIns="0" rIns="0" bIns="0" rtlCol="0" anchor="ctr"/>
+          <a:lstStyle/>
+          <a:p>
+            <a:pPr indent="0" marL="0">
+              <a:buNone/>
+            </a:pPr>
+            <a:r>
+              <a:rPr lang="en-US" sz="2000" b="1" dirty="0">
+                <a:solidFill>
+                  <a:schemeClr val="accent1"/>
+                </a:solidFill>
+              </a:rPr>
+              <a:t>Erkin litsenziya</a:t>
+            </a:r>
+            <a:endParaRPr lang="en-US" sz="2000" dirty="0"/>
+          </a:p>
+        </p:txBody>
+      </p:sp>
+      <p:sp>
+        <p:nvSpPr>
+          <p:cNvPr id="13" name="Text 11"/>
+          <p:cNvSpPr txBox="1"/>
+          <p:nvPr/>
+        </p:nvSpPr>
+        <p:spPr>
+          <a:xfrm>
+            <a:off x="822960" y="4389120"/>
+            <a:ext cx="4937760" cy="822960"/>
+          </a:xfrm>
+          <a:prstGeom prst="rect">
+            <a:avLst/>
+          </a:prstGeom>
+          <a:noFill/>
+          <a:ln/>
+        </p:spPr>
+        <p:txBody>
+          <a:bodyPr wrap="square" lIns="0" tIns="0" rIns="0" bIns="0" rtlCol="0" anchor="t"/>
+          <a:lstStyle/>
+          <a:p>
+            <a:pPr indent="0" marL="0">
+              <a:buNone/>
+            </a:pPr>
+            <a:r>
+              <a:rPr lang="en-US" sz="1500" dirty="0">
+                <a:solidFill>
+                  <a:schemeClr val="tx1"/>
+                </a:solidFill>
+              </a:rPr>
+              <a:t>commons.wikimedia.org — «Bioreactor», «Spray dryer», «Blown film extrusion»</a:t>
+            </a:r>
+            <a:endParaRPr lang="en-US" sz="1500" dirty="0"/>
+          </a:p>
+        </p:txBody>
+      </p:sp>
+      <p:sp>
+        <p:nvSpPr>
+          <p:cNvPr id="14" name="Text 12"/>
+          <p:cNvSpPr txBox="1"/>
+          <p:nvPr/>
+        </p:nvSpPr>
+        <p:spPr>
+          <a:xfrm>
+            <a:off x="822960" y="5212080"/>
+            <a:ext cx="4937760" cy="457200"/>
+          </a:xfrm>
+          <a:prstGeom prst="rect">
+            <a:avLst/>
+          </a:prstGeom>
+          <a:noFill/>
+          <a:ln/>
+        </p:spPr>
+        <p:txBody>
+          <a:bodyPr wrap="square" lIns="0" tIns="0" rIns="0" bIns="0" rtlCol="0" anchor="ctr"/>
+          <a:lstStyle/>
+          <a:p>
+            <a:pPr indent="0" marL="0">
+              <a:buNone/>
+            </a:pPr>
+            <a:r>
+              <a:rPr lang="en-US" sz="1300" i="1" dirty="0">
+                <a:solidFill>
+                  <a:schemeClr val="accent6"/>
+                </a:solidFill>
+              </a:rPr>
+              <a:t>CC litsenziya — muallifni ko‘rsatish kifoya</a:t>
+            </a:r>
+            <a:endParaRPr lang="en-US" sz="1300" dirty="0"/>
+          </a:p>
+        </p:txBody>
+      </p:sp>
+      <p:sp>
+        <p:nvSpPr>
+          <p:cNvPr id="15" name="src 3"/>
+          <p:cNvSpPr/>
+          <p:nvPr/>
+        </p:nvSpPr>
+        <p:spPr>
+          <a:xfrm>
+            <a:off x="6172200" y="3703320"/>
+            <a:ext cx="5440680" cy="2103120"/>
+          </a:xfrm>
+          <a:prstGeom prst="roundRect">
+            <a:avLst>
+              <a:gd name="adj" fmla="val 5217"/>
+            </a:avLst>
+          </a:prstGeom>
+          <a:solidFill>
+            <a:schemeClr val="tx2"/>
+          </a:solidFill>
+          <a:ln w="12700">
+            <a:solidFill>
+              <a:schemeClr val="tx2"/>
+            </a:solidFill>
+            <a:prstDash val="solid"/>
+          </a:ln>
+        </p:spPr>
+      </p:sp>
+      <p:sp>
+        <p:nvSpPr>
+          <p:cNvPr id="16" name="Text 14"/>
+          <p:cNvSpPr txBox="1"/>
+          <p:nvPr/>
+        </p:nvSpPr>
+        <p:spPr>
+          <a:xfrm>
+            <a:off x="6446520" y="3886200"/>
+            <a:ext cx="4937760" cy="457200"/>
+          </a:xfrm>
+          <a:prstGeom prst="rect">
+            <a:avLst/>
+          </a:prstGeom>
+          <a:noFill/>
+          <a:ln/>
+        </p:spPr>
+        <p:txBody>
+          <a:bodyPr wrap="square" lIns="0" tIns="0" rIns="0" bIns="0" rtlCol="0" anchor="ctr"/>
+          <a:lstStyle/>
+          <a:p>
+            <a:pPr indent="0" marL="0">
+              <a:buNone/>
+            </a:pPr>
+            <a:r>
+              <a:rPr lang="en-US" sz="2000" b="1" dirty="0">
+                <a:solidFill>
+                  <a:schemeClr val="accent3"/>
+                </a:solidFill>
+              </a:rPr>
+              <a:t>O‘z laboratoriyangiz</a:t>
+            </a:r>
+            <a:endParaRPr lang="en-US" sz="2000" dirty="0"/>
+          </a:p>
+        </p:txBody>
+      </p:sp>
+      <p:sp>
+        <p:nvSpPr>
+          <p:cNvPr id="17" name="Text 15"/>
+          <p:cNvSpPr txBox="1"/>
+          <p:nvPr/>
+        </p:nvSpPr>
+        <p:spPr>
+          <a:xfrm>
+            <a:off x="6446520" y="4389120"/>
+            <a:ext cx="4937760" cy="822960"/>
+          </a:xfrm>
+          <a:prstGeom prst="rect">
+            <a:avLst/>
+          </a:prstGeom>
+          <a:noFill/>
+          <a:ln/>
+        </p:spPr>
+        <p:txBody>
+          <a:bodyPr wrap="square" lIns="0" tIns="0" rIns="0" bIns="0" rtlCol="0" anchor="t"/>
+          <a:lstStyle/>
+          <a:p>
+            <a:pPr indent="0" marL="0">
+              <a:buNone/>
+            </a:pPr>
+            <a:r>
+              <a:rPr lang="en-US" sz="1500" dirty="0">
+                <a:solidFill>
+                  <a:schemeClr val="bg1"/>
+                </a:solidFill>
+              </a:rPr>
+              <a:t>PHA donachalarini Nil qizili yoki Sudan qora B bilan bo‘yab mikroskopda suratga olish</a:t>
+            </a:r>
+            <a:endParaRPr lang="en-US" sz="1500" dirty="0"/>
+          </a:p>
+        </p:txBody>
+      </p:sp>
+      <p:sp>
+        <p:nvSpPr>
+          <p:cNvPr id="18" name="Text 16"/>
+          <p:cNvSpPr txBox="1"/>
+          <p:nvPr/>
+        </p:nvSpPr>
+        <p:spPr>
+          <a:xfrm>
+            <a:off x="6446520" y="5212080"/>
+            <a:ext cx="4937760" cy="457200"/>
+          </a:xfrm>
+          <a:prstGeom prst="rect">
+            <a:avLst/>
+          </a:prstGeom>
+          <a:noFill/>
+          <a:ln/>
+        </p:spPr>
+        <p:txBody>
+          <a:bodyPr wrap="square" lIns="0" tIns="0" rIns="0" bIns="0" rtlCol="0" anchor="ctr"/>
+          <a:lstStyle/>
+          <a:p>
+            <a:pPr indent="0" marL="0">
+              <a:buNone/>
+            </a:pPr>
+            <a:r>
+              <a:rPr lang="en-US" sz="1300" i="1" dirty="0">
+                <a:solidFill>
+                  <a:schemeClr val="bg2"/>
+                </a:solidFill>
+              </a:rPr>
+              <a:t>Eng kuchli dalil: real natija</a:t>
+            </a:r>
+            <a:endParaRPr lang="en-US" sz="1300" dirty="0"/>
+          </a:p>
+        </p:txBody>
+      </p:sp>
+      <p:sp>
+        <p:nvSpPr>
+          <p:cNvPr id="19" name="Text 17"/>
+          <p:cNvSpPr txBox="1"/>
+          <p:nvPr/>
+        </p:nvSpPr>
+        <p:spPr>
+          <a:xfrm>
+            <a:off x="548640" y="6035040"/>
+            <a:ext cx="11064240" cy="320040"/>
+          </a:xfrm>
+          <a:prstGeom prst="rect">
+            <a:avLst/>
+          </a:prstGeom>
+          <a:noFill/>
+          <a:ln/>
+        </p:spPr>
+        <p:txBody>
+          <a:bodyPr wrap="square" lIns="0" tIns="0" rIns="0" bIns="0" rtlCol="0" anchor="ctr"/>
+          <a:lstStyle/>
+          <a:p>
+            <a:pPr indent="0" marL="0">
+              <a:buNone/>
+            </a:pPr>
+            <a:r>
+              <a:rPr lang="en-US" sz="1200" dirty="0">
+                <a:solidFill>
+                  <a:schemeClr val="tx2"/>
+                </a:solidFill>
+              </a:rPr>
+              <a:t>Dastlabki taqdimotdagi AI-rasmlar o‘rniga real uskuna va real mikroskop suratlarini qo‘ying — komissiya ishonchi oshadi.</a:t>
+            </a:r>
+            <a:endParaRPr lang="en-US" sz="1200" dirty="0"/>
           </a:p>
         </p:txBody>
       </p:sp>
@@ -4617,7 +6775,7 @@
                   <a:schemeClr val="tx2"/>
                 </a:solidFill>
               </a:rPr>
-              <a:t>2031-yilda $3,3 mln daromad va $0,84 mln EBITDA</a:t>
+              <a:t>1 t paket tannarxi $2 195, sotish narxi $3 900</a:t>
             </a:r>
             <a:endParaRPr lang="en-US" sz="3400" dirty="0"/>
           </a:p>
@@ -4625,13 +6783,13 @@
       </p:sp>
       <p:graphicFrame>
         <p:nvGraphicFramePr>
-          <p:cNvPr id="3" name="forecast chart" descr=""/>
+          <p:cNvPr id="3" name="unit cost chart" descr=""/>
           <p:cNvGraphicFramePr/>
           <p:nvPr/>
         </p:nvGraphicFramePr>
         <p:xfrm>
           <a:off x="548640" y="1325880"/>
-          <a:ext cx="7680960" cy="4846320"/>
+          <a:ext cx="6766560" cy="4754880"/>
         </p:xfrm>
         <a:graphic xmlns:a="http://schemas.openxmlformats.org/drawingml/2006/main">
           <a:graphicData uri="http://schemas.openxmlformats.org/drawingml/2006/chart">
@@ -4647,8 +6805,8 @@
         </p:nvSpPr>
         <p:spPr>
           <a:xfrm>
-            <a:off x="8595360" y="1463040"/>
-            <a:ext cx="3017520" cy="777240"/>
+            <a:off x="7772400" y="1463040"/>
+            <a:ext cx="3840480" cy="777240"/>
           </a:xfrm>
           <a:prstGeom prst="rect">
             <a:avLst/>
@@ -4664,7 +6822,7 @@
               <a:buNone/>
             </a:pPr>
             <a:r>
-              <a:rPr lang="en-US" sz="3600" b="1" dirty="0">
+              <a:rPr lang="en-US" sz="4000" b="1" dirty="0">
                 <a:solidFill>
                   <a:schemeClr val="accent1"/>
                 </a:solidFill>
@@ -4672,9 +6830,9 @@
                 <a:ea typeface="Cambria" pitchFamily="34" charset="-122"/>
                 <a:cs typeface="Cambria" pitchFamily="34" charset="-120"/>
               </a:rPr>
-              <a:t>25,3%</a:t>
+              <a:t>$1 705</a:t>
             </a:r>
-            <a:endParaRPr lang="en-US" sz="3600" dirty="0"/>
+            <a:endParaRPr lang="en-US" sz="4000" dirty="0"/>
           </a:p>
         </p:txBody>
       </p:sp>
@@ -4686,8 +6844,8 @@
         </p:nvSpPr>
         <p:spPr>
           <a:xfrm>
-            <a:off x="8595360" y="2267712"/>
-            <a:ext cx="3017520" cy="640080"/>
+            <a:off x="7772400" y="2267712"/>
+            <a:ext cx="3840480" cy="640080"/>
           </a:xfrm>
           <a:prstGeom prst="rect">
             <a:avLst/>
@@ -4708,7 +6866,7 @@
                   <a:schemeClr val="tx1"/>
                 </a:solidFill>
               </a:rPr>
-              <a:t>EBITDA rentabelligi (2031)</a:t>
+              <a:t>marjinal foyda 1 t paketdan (43,7%)</a:t>
             </a:r>
             <a:endParaRPr lang="en-US" sz="1400" dirty="0"/>
           </a:p>
@@ -4722,8 +6880,8 @@
         </p:nvSpPr>
         <p:spPr>
           <a:xfrm>
-            <a:off x="8595360" y="2926080"/>
-            <a:ext cx="3017520" cy="777240"/>
+            <a:off x="7772400" y="3017520"/>
+            <a:ext cx="3840480" cy="777240"/>
           </a:xfrm>
           <a:prstGeom prst="rect">
             <a:avLst/>
@@ -4739,7 +6897,7 @@
               <a:buNone/>
             </a:pPr>
             <a:r>
-              <a:rPr lang="en-US" sz="3600" b="1" dirty="0">
+              <a:rPr lang="en-US" sz="4000" b="1" dirty="0">
                 <a:solidFill>
                   <a:schemeClr val="tx2"/>
                 </a:solidFill>
@@ -4747,9 +6905,9 @@
                 <a:ea typeface="Cambria" pitchFamily="34" charset="-122"/>
                 <a:cs typeface="Cambria" pitchFamily="34" charset="-120"/>
               </a:rPr>
-              <a:t>$533 326</a:t>
+              <a:t>$2 561</a:t>
             </a:r>
-            <a:endParaRPr lang="en-US" sz="3600" dirty="0"/>
+            <a:endParaRPr lang="en-US" sz="4000" dirty="0"/>
           </a:p>
         </p:txBody>
       </p:sp>
@@ -4761,8 +6919,8 @@
         </p:nvSpPr>
         <p:spPr>
           <a:xfrm>
-            <a:off x="8595360" y="3730752"/>
-            <a:ext cx="3017520" cy="640080"/>
+            <a:off x="7772400" y="3822192"/>
+            <a:ext cx="3840480" cy="640080"/>
           </a:xfrm>
           <a:prstGeom prst="rect">
             <a:avLst/>
@@ -4783,7 +6941,7 @@
                   <a:schemeClr val="tx1"/>
                 </a:solidFill>
               </a:rPr>
-              <a:t>sof foyda (2031)</a:t>
+              <a:t>1 t PHA ning o‘z tannarxi (bozor narxi $3 400–4 500)</a:t>
             </a:r>
             <a:endParaRPr lang="en-US" sz="1400" dirty="0"/>
           </a:p>
@@ -4797,8 +6955,8 @@
         </p:nvSpPr>
         <p:spPr>
           <a:xfrm>
-            <a:off x="8595360" y="4389120"/>
-            <a:ext cx="3017520" cy="777240"/>
+            <a:off x="7772400" y="4709160"/>
+            <a:ext cx="3840480" cy="1280160"/>
           </a:xfrm>
           <a:prstGeom prst="rect">
             <a:avLst/>
@@ -4807,58 +6965,19 @@
           <a:ln/>
         </p:spPr>
         <p:txBody>
-          <a:bodyPr wrap="square" lIns="0" tIns="0" rIns="0" bIns="0" rtlCol="0" anchor="b"/>
+          <a:bodyPr wrap="square" lIns="0" tIns="0" rIns="0" bIns="0" rtlCol="0" anchor="ctr"/>
           <a:lstStyle/>
           <a:p>
             <a:pPr indent="0" marL="0">
               <a:buNone/>
             </a:pPr>
             <a:r>
-              <a:rPr lang="en-US" sz="3600" b="1" dirty="0">
-                <a:solidFill>
-                  <a:schemeClr val="tx2"/>
-                </a:solidFill>
-                <a:latin typeface="Cambria" pitchFamily="34" charset="0"/>
-                <a:ea typeface="Cambria" pitchFamily="34" charset="-122"/>
-                <a:cs typeface="Cambria" pitchFamily="34" charset="-120"/>
+              <a:rPr lang="en-US" sz="1400" i="1" dirty="0">
+                <a:solidFill>
+                  <a:schemeClr val="accent5"/>
+                </a:solidFill>
               </a:rPr>
-              <a:t>850 t</a:t>
-            </a:r>
-            <a:endParaRPr lang="en-US" sz="3600" dirty="0"/>
-          </a:p>
-        </p:txBody>
-      </p:sp>
-      <p:sp>
-        <p:nvSpPr>
-          <p:cNvPr id="9" name="Text 6"/>
-          <p:cNvSpPr txBox="1"/>
-          <p:nvPr/>
-        </p:nvSpPr>
-        <p:spPr>
-          <a:xfrm>
-            <a:off x="8595360" y="5193792"/>
-            <a:ext cx="3017520" cy="640080"/>
-          </a:xfrm>
-          <a:prstGeom prst="rect">
-            <a:avLst/>
-          </a:prstGeom>
-          <a:noFill/>
-          <a:ln/>
-        </p:spPr>
-        <p:txBody>
-          <a:bodyPr wrap="square" lIns="0" tIns="0" rIns="0" bIns="0" rtlCol="0" anchor="t"/>
-          <a:lstStyle/>
-          <a:p>
-            <a:pPr indent="0" marL="0">
-              <a:buNone/>
-            </a:pPr>
-            <a:r>
-              <a:rPr lang="en-US" sz="1400" dirty="0">
-                <a:solidFill>
-                  <a:schemeClr val="tx1"/>
-                </a:solidFill>
-              </a:rPr>
-              <a:t>paket/plyonka + ~3 t toza PHA sotuvi</a:t>
+              <a:t>Dastlabki taqdimotda: tannarx $95/t, narx $250/t — bu hatto polietilendan (~$1 200/t) ham 5 baravar arzon edi.</a:t>
             </a:r>
             <a:endParaRPr lang="en-US" sz="1400" dirty="0"/>
           </a:p>
@@ -4936,6 +7055,355 @@
       </p:grpSpPr>
       <p:sp>
         <p:nvSpPr>
+          <p:cNvPr id="2" name="Text 1"/>
+          <p:cNvSpPr/>
+          <p:nvPr>
+            <p:ph idx="101" type="title" hasCustomPrompt="1"/>
+          </p:nvPr>
+        </p:nvSpPr>
+        <p:spPr>
+          <a:xfrm>
+            <a:off x="548640" y="320040"/>
+            <a:ext cx="11064240" cy="822960"/>
+          </a:xfrm>
+          <a:prstGeom prst="rect">
+            <a:avLst/>
+          </a:prstGeom>
+          <a:noFill/>
+          <a:ln/>
+        </p:spPr>
+        <p:txBody>
+          <a:bodyPr wrap="square" rtlCol="0" anchor="ctr"/>
+          <a:lstStyle/>
+          <a:p>
+            <a:pPr indent="0" marL="0">
+              <a:buNone/>
+            </a:pPr>
+            <a:r>
+              <a:rPr lang="en-US" sz="3400" b="1" dirty="0">
+                <a:solidFill>
+                  <a:schemeClr val="tx2"/>
+                </a:solidFill>
+              </a:rPr>
+              <a:t>2031-yilda $3,3 mln daromad va $0,84 mln EBITDA</a:t>
+            </a:r>
+            <a:endParaRPr lang="en-US" sz="3400" dirty="0"/>
+          </a:p>
+        </p:txBody>
+      </p:sp>
+      <p:graphicFrame>
+        <p:nvGraphicFramePr>
+          <p:cNvPr id="3" name="forecast chart" descr=""/>
+          <p:cNvGraphicFramePr/>
+          <p:nvPr/>
+        </p:nvGraphicFramePr>
+        <p:xfrm>
+          <a:off x="548640" y="1325880"/>
+          <a:ext cx="7680960" cy="4846320"/>
+        </p:xfrm>
+        <a:graphic xmlns:a="http://schemas.openxmlformats.org/drawingml/2006/main">
+          <a:graphicData uri="http://schemas.openxmlformats.org/drawingml/2006/chart">
+            <c:chart xmlns:c="http://schemas.openxmlformats.org/drawingml/2006/chart" r:id="rId1"/>
+          </a:graphicData>
+        </a:graphic>
+      </p:graphicFrame>
+      <p:sp>
+        <p:nvSpPr>
+          <p:cNvPr id="4" name="Text 1"/>
+          <p:cNvSpPr txBox="1"/>
+          <p:nvPr/>
+        </p:nvSpPr>
+        <p:spPr>
+          <a:xfrm>
+            <a:off x="8595360" y="1463040"/>
+            <a:ext cx="3017520" cy="777240"/>
+          </a:xfrm>
+          <a:prstGeom prst="rect">
+            <a:avLst/>
+          </a:prstGeom>
+          <a:noFill/>
+          <a:ln/>
+        </p:spPr>
+        <p:txBody>
+          <a:bodyPr wrap="square" lIns="0" tIns="0" rIns="0" bIns="0" rtlCol="0" anchor="b"/>
+          <a:lstStyle/>
+          <a:p>
+            <a:pPr indent="0" marL="0">
+              <a:buNone/>
+            </a:pPr>
+            <a:r>
+              <a:rPr lang="en-US" sz="3600" b="1" dirty="0">
+                <a:solidFill>
+                  <a:schemeClr val="accent1"/>
+                </a:solidFill>
+                <a:latin typeface="Cambria" pitchFamily="34" charset="0"/>
+                <a:ea typeface="Cambria" pitchFamily="34" charset="-122"/>
+                <a:cs typeface="Cambria" pitchFamily="34" charset="-120"/>
+              </a:rPr>
+              <a:t>25,3%</a:t>
+            </a:r>
+            <a:endParaRPr lang="en-US" sz="3600" dirty="0"/>
+          </a:p>
+        </p:txBody>
+      </p:sp>
+      <p:sp>
+        <p:nvSpPr>
+          <p:cNvPr id="5" name="Text 2"/>
+          <p:cNvSpPr txBox="1"/>
+          <p:nvPr/>
+        </p:nvSpPr>
+        <p:spPr>
+          <a:xfrm>
+            <a:off x="8595360" y="2267712"/>
+            <a:ext cx="3017520" cy="640080"/>
+          </a:xfrm>
+          <a:prstGeom prst="rect">
+            <a:avLst/>
+          </a:prstGeom>
+          <a:noFill/>
+          <a:ln/>
+        </p:spPr>
+        <p:txBody>
+          <a:bodyPr wrap="square" lIns="0" tIns="0" rIns="0" bIns="0" rtlCol="0" anchor="t"/>
+          <a:lstStyle/>
+          <a:p>
+            <a:pPr indent="0" marL="0">
+              <a:buNone/>
+            </a:pPr>
+            <a:r>
+              <a:rPr lang="en-US" sz="1400" dirty="0">
+                <a:solidFill>
+                  <a:schemeClr val="tx1"/>
+                </a:solidFill>
+              </a:rPr>
+              <a:t>EBITDA rentabelligi (2031)</a:t>
+            </a:r>
+            <a:endParaRPr lang="en-US" sz="1400" dirty="0"/>
+          </a:p>
+        </p:txBody>
+      </p:sp>
+      <p:sp>
+        <p:nvSpPr>
+          <p:cNvPr id="6" name="Text 3"/>
+          <p:cNvSpPr txBox="1"/>
+          <p:nvPr/>
+        </p:nvSpPr>
+        <p:spPr>
+          <a:xfrm>
+            <a:off x="8595360" y="2926080"/>
+            <a:ext cx="3017520" cy="777240"/>
+          </a:xfrm>
+          <a:prstGeom prst="rect">
+            <a:avLst/>
+          </a:prstGeom>
+          <a:noFill/>
+          <a:ln/>
+        </p:spPr>
+        <p:txBody>
+          <a:bodyPr wrap="square" lIns="0" tIns="0" rIns="0" bIns="0" rtlCol="0" anchor="b"/>
+          <a:lstStyle/>
+          <a:p>
+            <a:pPr indent="0" marL="0">
+              <a:buNone/>
+            </a:pPr>
+            <a:r>
+              <a:rPr lang="en-US" sz="3600" b="1" dirty="0">
+                <a:solidFill>
+                  <a:schemeClr val="tx2"/>
+                </a:solidFill>
+                <a:latin typeface="Cambria" pitchFamily="34" charset="0"/>
+                <a:ea typeface="Cambria" pitchFamily="34" charset="-122"/>
+                <a:cs typeface="Cambria" pitchFamily="34" charset="-120"/>
+              </a:rPr>
+              <a:t>$533 326</a:t>
+            </a:r>
+            <a:endParaRPr lang="en-US" sz="3600" dirty="0"/>
+          </a:p>
+        </p:txBody>
+      </p:sp>
+      <p:sp>
+        <p:nvSpPr>
+          <p:cNvPr id="7" name="Text 4"/>
+          <p:cNvSpPr txBox="1"/>
+          <p:nvPr/>
+        </p:nvSpPr>
+        <p:spPr>
+          <a:xfrm>
+            <a:off x="8595360" y="3730752"/>
+            <a:ext cx="3017520" cy="640080"/>
+          </a:xfrm>
+          <a:prstGeom prst="rect">
+            <a:avLst/>
+          </a:prstGeom>
+          <a:noFill/>
+          <a:ln/>
+        </p:spPr>
+        <p:txBody>
+          <a:bodyPr wrap="square" lIns="0" tIns="0" rIns="0" bIns="0" rtlCol="0" anchor="t"/>
+          <a:lstStyle/>
+          <a:p>
+            <a:pPr indent="0" marL="0">
+              <a:buNone/>
+            </a:pPr>
+            <a:r>
+              <a:rPr lang="en-US" sz="1400" dirty="0">
+                <a:solidFill>
+                  <a:schemeClr val="tx1"/>
+                </a:solidFill>
+              </a:rPr>
+              <a:t>sof foyda (2031)</a:t>
+            </a:r>
+            <a:endParaRPr lang="en-US" sz="1400" dirty="0"/>
+          </a:p>
+        </p:txBody>
+      </p:sp>
+      <p:sp>
+        <p:nvSpPr>
+          <p:cNvPr id="8" name="Text 5"/>
+          <p:cNvSpPr txBox="1"/>
+          <p:nvPr/>
+        </p:nvSpPr>
+        <p:spPr>
+          <a:xfrm>
+            <a:off x="8595360" y="4389120"/>
+            <a:ext cx="3017520" cy="777240"/>
+          </a:xfrm>
+          <a:prstGeom prst="rect">
+            <a:avLst/>
+          </a:prstGeom>
+          <a:noFill/>
+          <a:ln/>
+        </p:spPr>
+        <p:txBody>
+          <a:bodyPr wrap="square" lIns="0" tIns="0" rIns="0" bIns="0" rtlCol="0" anchor="b"/>
+          <a:lstStyle/>
+          <a:p>
+            <a:pPr indent="0" marL="0">
+              <a:buNone/>
+            </a:pPr>
+            <a:r>
+              <a:rPr lang="en-US" sz="3600" b="1" dirty="0">
+                <a:solidFill>
+                  <a:schemeClr val="tx2"/>
+                </a:solidFill>
+                <a:latin typeface="Cambria" pitchFamily="34" charset="0"/>
+                <a:ea typeface="Cambria" pitchFamily="34" charset="-122"/>
+                <a:cs typeface="Cambria" pitchFamily="34" charset="-120"/>
+              </a:rPr>
+              <a:t>850 t</a:t>
+            </a:r>
+            <a:endParaRPr lang="en-US" sz="3600" dirty="0"/>
+          </a:p>
+        </p:txBody>
+      </p:sp>
+      <p:sp>
+        <p:nvSpPr>
+          <p:cNvPr id="9" name="Text 6"/>
+          <p:cNvSpPr txBox="1"/>
+          <p:nvPr/>
+        </p:nvSpPr>
+        <p:spPr>
+          <a:xfrm>
+            <a:off x="8595360" y="5193792"/>
+            <a:ext cx="3017520" cy="640080"/>
+          </a:xfrm>
+          <a:prstGeom prst="rect">
+            <a:avLst/>
+          </a:prstGeom>
+          <a:noFill/>
+          <a:ln/>
+        </p:spPr>
+        <p:txBody>
+          <a:bodyPr wrap="square" lIns="0" tIns="0" rIns="0" bIns="0" rtlCol="0" anchor="t"/>
+          <a:lstStyle/>
+          <a:p>
+            <a:pPr indent="0" marL="0">
+              <a:buNone/>
+            </a:pPr>
+            <a:r>
+              <a:rPr lang="en-US" sz="1400" dirty="0">
+                <a:solidFill>
+                  <a:schemeClr val="tx1"/>
+                </a:solidFill>
+              </a:rPr>
+              <a:t>paket/plyonka + ~3 t toza PHA sotuvi</a:t>
+            </a:r>
+            <a:endParaRPr lang="en-US" sz="1400" dirty="0"/>
+          </a:p>
+        </p:txBody>
+      </p:sp>
+      <p:sp>
+        <p:nvSpPr>
+          <p:cNvPr id="25" name="Slide Number Placeholder 0"/>
+          <p:cNvSpPr>
+            <a:spLocks noGrp="1"/>
+          </p:cNvSpPr>
+          <p:nvPr>
+            <p:ph type="sldNum" sz="quarter" idx="4294967295"/>
+          </p:nvPr>
+        </p:nvSpPr>
+        <p:spPr>
+          <a:xfrm>
+            <a:off x="11247120" y="6400800"/>
+            <a:ext cx="548640" cy="274320"/>
+          </a:xfrm>
+          <a:prstGeom prst="rect">
+            <a:avLst/>
+          </a:prstGeom>
+          <a:extLst>
+            <a:ext uri="{C572A759-6A51-4108-AA02-DFA0A04FC94B}">
+              <ma14:wrappingTextBoxFlag xmlns:ma14="http://schemas.microsoft.com/office/mac/drawingml/2011/main" val="0"/>
+            </a:ext>
+          </a:extLst>
+        </p:spPr>
+        <p:txBody>
+          <a:bodyPr/>
+          <a:lstStyle>
+            <a:lvl1pPr>
+              <a:defRPr sz="1000">
+                <a:solidFill>
+                  <a:schemeClr val="accent6"/>
+                </a:solidFill>
+              </a:defRPr>
+            </a:lvl1pPr>
+          </a:lstStyle>
+          <a:p>
+            <a:pPr algn="r"/>
+            <a:fld id="{F7021451-1387-4CA6-816F-3879F97B5CBC}" type="slidenum">
+              <a:rPr b="0" lang="en-US"/>
+              <a:t>13</a:t>
+            </a:fld>
+            <a:endParaRPr lang="en-US"/>
+          </a:p>
+        </p:txBody>
+      </p:sp>
+    </p:spTree>
+  </p:cSld>
+  <p:clrMapOvr>
+    <a:masterClrMapping/>
+  </p:clrMapOvr>
+</p:sld>
+</file>
+
+<file path=ppt/slides/slide14.xml><?xml version="1.0" encoding="utf-8"?>
+<p:sld xmlns:a="http://schemas.openxmlformats.org/drawingml/2006/main" xmlns:r="http://schemas.openxmlformats.org/officeDocument/2006/relationships" xmlns:p="http://schemas.openxmlformats.org/presentationml/2006/main">
+  <p:cSld name="Slide 14">
+    <p:spTree>
+      <p:nvGrpSpPr>
+        <p:cNvPr id="1" name=""/>
+        <p:cNvGrpSpPr/>
+        <p:nvPr/>
+      </p:nvGrpSpPr>
+      <p:grpSpPr>
+        <a:xfrm>
+          <a:off x="0" y="0"/>
+          <a:ext cx="0" cy="0"/>
+          <a:chOff x="0" y="0"/>
+          <a:chExt cx="0" cy="0"/>
+        </a:xfrm>
+      </p:grpSpPr>
+      <p:sp>
+        <p:nvSpPr>
           <p:cNvPr id="2" name="Text 0"/>
           <p:cNvSpPr/>
           <p:nvPr>
@@ -5424,7 +7892,7 @@
       </p:sp>
       <p:graphicFrame>
         <p:nvGraphicFramePr>
-          <p:cNvPr id="14" name="table"/>
+          <p:cNvPr id="15" name="table"/>
           <p:cNvGraphicFramePr>
             <a:graphicFrameLocks noGrp="1"/>
           </p:cNvGraphicFramePr>
@@ -6232,7 +8700,7 @@
             <a:pPr algn="r"/>
             <a:fld id="{F7021451-1387-4CA6-816F-3879F97B5CBC}" type="slidenum">
               <a:rPr b="0" lang="en-US"/>
-              <a:t>13</a:t>
+              <a:t>14</a:t>
             </a:fld>
             <a:endParaRPr lang="en-US"/>
           </a:p>
@@ -6246,9 +8714,9 @@
 </p:sld>
 </file>
 
-<file path=ppt/slides/slide14.xml><?xml version="1.0" encoding="utf-8"?>
+<file path=ppt/slides/slide15.xml><?xml version="1.0" encoding="utf-8"?>
 <p:sld xmlns:a="http://schemas.openxmlformats.org/drawingml/2006/main" xmlns:r="http://schemas.openxmlformats.org/officeDocument/2006/relationships" xmlns:p="http://schemas.openxmlformats.org/presentationml/2006/main">
-  <p:cSld name="Slide 14">
+  <p:cSld name="Slide 15">
     <p:spTree>
       <p:nvGrpSpPr>
         <p:cNvPr id="1" name=""/>
@@ -6303,7 +8771,7 @@
       </p:sp>
       <p:graphicFrame>
         <p:nvGraphicFramePr>
-          <p:cNvPr id="15" name="table"/>
+          <p:cNvPr id="16" name="table"/>
           <p:cNvGraphicFramePr>
             <a:graphicFrameLocks noGrp="1"/>
           </p:cNvGraphicFramePr>
@@ -8376,7 +10844,7 @@
             <a:pPr algn="r"/>
             <a:fld id="{F7021451-1387-4CA6-816F-3879F97B5CBC}" type="slidenum">
               <a:rPr b="0" lang="en-US"/>
-              <a:t>14</a:t>
+              <a:t>15</a:t>
             </a:fld>
             <a:endParaRPr lang="en-US"/>
           </a:p>
@@ -8390,9 +10858,9 @@
 </p:sld>
 </file>
 
-<file path=ppt/slides/slide15.xml><?xml version="1.0" encoding="utf-8"?>
+<file path=ppt/slides/slide16.xml><?xml version="1.0" encoding="utf-8"?>
 <p:sld xmlns:a="http://schemas.openxmlformats.org/drawingml/2006/main" xmlns:r="http://schemas.openxmlformats.org/officeDocument/2006/relationships" xmlns:p="http://schemas.openxmlformats.org/presentationml/2006/main">
-  <p:cSld name="Slide 15">
+  <p:cSld name="Slide 16">
     <p:spTree>
       <p:nvGrpSpPr>
         <p:cNvPr id="1" name=""/>
@@ -8955,7 +11423,7 @@
       </p:sp>
       <p:graphicFrame>
         <p:nvGraphicFramePr>
-          <p:cNvPr id="16" name="table"/>
+          <p:cNvPr id="17" name="table"/>
           <p:cNvGraphicFramePr>
             <a:graphicFrameLocks noGrp="1"/>
           </p:cNvGraphicFramePr>
@@ -9642,7 +12110,7 @@
             <a:pPr algn="r"/>
             <a:fld id="{F7021451-1387-4CA6-816F-3879F97B5CBC}" type="slidenum">
               <a:rPr b="0" lang="en-US"/>
-              <a:t>15</a:t>
+              <a:t>16</a:t>
             </a:fld>
             <a:endParaRPr lang="en-US"/>
           </a:p>
@@ -9656,9 +12124,9 @@
 </p:sld>
 </file>
 
-<file path=ppt/slides/slide16.xml><?xml version="1.0" encoding="utf-8"?>
+<file path=ppt/slides/slide17.xml><?xml version="1.0" encoding="utf-8"?>
 <p:sld xmlns:a="http://schemas.openxmlformats.org/drawingml/2006/main" xmlns:r="http://schemas.openxmlformats.org/officeDocument/2006/relationships" xmlns:p="http://schemas.openxmlformats.org/presentationml/2006/main">
-  <p:cSld name="Slide 16">
+  <p:cSld name="Slide 17">
     <p:spTree>
       <p:nvGrpSpPr>
         <p:cNvPr id="1" name=""/>
@@ -9883,7 +12351,7 @@
             <a:pPr algn="r"/>
             <a:fld id="{F7021451-1387-4CA6-816F-3879F97B5CBC}" type="slidenum">
               <a:rPr b="0" lang="en-US"/>
-              <a:t>16</a:t>
+              <a:t>17</a:t>
             </a:fld>
             <a:endParaRPr lang="en-US"/>
           </a:p>
@@ -15451,2242 +17919,36 @@
                   <a:schemeClr val="tx2"/>
                 </a:solidFill>
               </a:rPr>
-              <a:t>Asosiy uskunalar va yetkazib beruvchilar</a:t>
+              <a:t>Joylashuv: Chirchiq, 1,8 gektar</a:t>
             </a:r>
             <a:endParaRPr lang="en-US" sz="3400" dirty="0"/>
           </a:p>
         </p:txBody>
       </p:sp>
-      <p:graphicFrame>
-        <p:nvGraphicFramePr>
-          <p:cNvPr id="10" name="table"/>
-          <p:cNvGraphicFramePr>
-            <a:graphicFrameLocks noGrp="1"/>
-          </p:cNvGraphicFramePr>
-          <p:nvPr>
-            <p:extLst>
-              <p:ext uri="{D42A27DB-BD31-4B8C-83A1-F6EECF244321}">
-                <p14:modId xmlns:p14="http://schemas.microsoft.com/office/powerpoint/2010/main" val="1579011935"/>
-              </p:ext>
-            </p:extLst>
-          </p:nvPr>
-        </p:nvGraphicFramePr>
-        <p:xfrm>
-          <a:off x="548640" y="1325880"/>
-          <a:ext cx="11064240" cy="914400"/>
-        </p:xfrm>
-        <a:graphic>
-          <a:graphicData uri="http://schemas.openxmlformats.org/drawingml/2006/table">
-            <a:tbl>
-              <a:tblPr/>
-              <a:tblGrid>
-                <a:gridCol w="4572000"/>
-                <a:gridCol w="822960"/>
-                <a:gridCol w="1463040"/>
-                <a:gridCol w="4206240"/>
-              </a:tblGrid>
-              <a:tr h="457200">
-                <a:tc>
-                  <a:txBody>
-                    <a:bodyPr/>
-                    <a:lstStyle/>
-                    <a:p>
-                      <a:pPr indent="0" marL="0">
-                        <a:buNone/>
-                      </a:pPr>
-                      <a:r>
-                        <a:rPr lang="en-US" sz="1300" b="1" dirty="0">
-                          <a:solidFill>
-                            <a:srgbClr val="FFFFFF"/>
-                          </a:solidFill>
-                        </a:rPr>
-                        <a:t>Uskuna guruhi</a:t>
-                      </a:r>
-                      <a:endParaRPr lang="en-US" sz="1300" dirty="0"/>
-                    </a:p>
-                  </a:txBody>
-                  <a:tcPr marL="76200" marR="76200" marT="38100" marB="38100" anchor="ctr">
-                    <a:lnL w="6350" cap="flat" cmpd="sng" algn="ctr">
-                      <a:solidFill>
-                        <a:srgbClr val="C9D6DD"/>
-                      </a:solidFill>
-                      <a:prstDash val="solid"/>
-                      <a:round/>
-                      <a:headEnd type="none" w="med" len="med"/>
-                      <a:tailEnd type="none" w="med" len="med"/>
-                    </a:lnL>
-                    <a:lnR w="6350" cap="flat" cmpd="sng" algn="ctr">
-                      <a:solidFill>
-                        <a:srgbClr val="C9D6DD"/>
-                      </a:solidFill>
-                      <a:prstDash val="solid"/>
-                      <a:round/>
-                      <a:headEnd type="none" w="med" len="med"/>
-                      <a:tailEnd type="none" w="med" len="med"/>
-                    </a:lnR>
-                    <a:lnT w="6350" cap="flat" cmpd="sng" algn="ctr">
-                      <a:solidFill>
-                        <a:srgbClr val="C9D6DD"/>
-                      </a:solidFill>
-                      <a:prstDash val="solid"/>
-                      <a:round/>
-                      <a:headEnd type="none" w="med" len="med"/>
-                      <a:tailEnd type="none" w="med" len="med"/>
-                    </a:lnT>
-                    <a:lnB w="6350" cap="flat" cmpd="sng" algn="ctr">
-                      <a:solidFill>
-                        <a:srgbClr val="C9D6DD"/>
-                      </a:solidFill>
-                      <a:prstDash val="solid"/>
-                      <a:round/>
-                      <a:headEnd type="none" w="med" len="med"/>
-                      <a:tailEnd type="none" w="med" len="med"/>
-                    </a:lnB>
-                    <a:solidFill>
-                      <a:srgbClr val="1F8A70"/>
-                    </a:solidFill>
-                  </a:tcPr>
-                </a:tc>
-                <a:tc>
-                  <a:txBody>
-                    <a:bodyPr/>
-                    <a:lstStyle/>
-                    <a:p>
-                      <a:pPr indent="0" marL="0">
-                        <a:buNone/>
-                      </a:pPr>
-                      <a:r>
-                        <a:rPr lang="en-US" sz="1300" b="1" dirty="0">
-                          <a:solidFill>
-                            <a:srgbClr val="FFFFFF"/>
-                          </a:solidFill>
-                        </a:rPr>
-                        <a:t>Faza</a:t>
-                      </a:r>
-                      <a:endParaRPr lang="en-US" sz="1300" dirty="0"/>
-                    </a:p>
-                  </a:txBody>
-                  <a:tcPr marL="76200" marR="76200" marT="38100" marB="38100" anchor="ctr">
-                    <a:lnL w="6350" cap="flat" cmpd="sng" algn="ctr">
-                      <a:solidFill>
-                        <a:srgbClr val="C9D6DD"/>
-                      </a:solidFill>
-                      <a:prstDash val="solid"/>
-                      <a:round/>
-                      <a:headEnd type="none" w="med" len="med"/>
-                      <a:tailEnd type="none" w="med" len="med"/>
-                    </a:lnL>
-                    <a:lnR w="6350" cap="flat" cmpd="sng" algn="ctr">
-                      <a:solidFill>
-                        <a:srgbClr val="C9D6DD"/>
-                      </a:solidFill>
-                      <a:prstDash val="solid"/>
-                      <a:round/>
-                      <a:headEnd type="none" w="med" len="med"/>
-                      <a:tailEnd type="none" w="med" len="med"/>
-                    </a:lnR>
-                    <a:lnT w="6350" cap="flat" cmpd="sng" algn="ctr">
-                      <a:solidFill>
-                        <a:srgbClr val="C9D6DD"/>
-                      </a:solidFill>
-                      <a:prstDash val="solid"/>
-                      <a:round/>
-                      <a:headEnd type="none" w="med" len="med"/>
-                      <a:tailEnd type="none" w="med" len="med"/>
-                    </a:lnT>
-                    <a:lnB w="6350" cap="flat" cmpd="sng" algn="ctr">
-                      <a:solidFill>
-                        <a:srgbClr val="C9D6DD"/>
-                      </a:solidFill>
-                      <a:prstDash val="solid"/>
-                      <a:round/>
-                      <a:headEnd type="none" w="med" len="med"/>
-                      <a:tailEnd type="none" w="med" len="med"/>
-                    </a:lnB>
-                    <a:solidFill>
-                      <a:srgbClr val="1F8A70"/>
-                    </a:solidFill>
-                  </a:tcPr>
-                </a:tc>
-                <a:tc>
-                  <a:txBody>
-                    <a:bodyPr/>
-                    <a:lstStyle/>
-                    <a:p>
-                      <a:pPr indent="0" marL="0">
-                        <a:buNone/>
-                      </a:pPr>
-                      <a:r>
-                        <a:rPr lang="en-US" sz="1300" b="1" dirty="0">
-                          <a:solidFill>
-                            <a:srgbClr val="FFFFFF"/>
-                          </a:solidFill>
-                        </a:rPr>
-                        <a:t>Narx</a:t>
-                      </a:r>
-                      <a:endParaRPr lang="en-US" sz="1300" dirty="0"/>
-                    </a:p>
-                  </a:txBody>
-                  <a:tcPr marL="76200" marR="76200" marT="38100" marB="38100" anchor="ctr">
-                    <a:lnL w="6350" cap="flat" cmpd="sng" algn="ctr">
-                      <a:solidFill>
-                        <a:srgbClr val="C9D6DD"/>
-                      </a:solidFill>
-                      <a:prstDash val="solid"/>
-                      <a:round/>
-                      <a:headEnd type="none" w="med" len="med"/>
-                      <a:tailEnd type="none" w="med" len="med"/>
-                    </a:lnL>
-                    <a:lnR w="6350" cap="flat" cmpd="sng" algn="ctr">
-                      <a:solidFill>
-                        <a:srgbClr val="C9D6DD"/>
-                      </a:solidFill>
-                      <a:prstDash val="solid"/>
-                      <a:round/>
-                      <a:headEnd type="none" w="med" len="med"/>
-                      <a:tailEnd type="none" w="med" len="med"/>
-                    </a:lnR>
-                    <a:lnT w="6350" cap="flat" cmpd="sng" algn="ctr">
-                      <a:solidFill>
-                        <a:srgbClr val="C9D6DD"/>
-                      </a:solidFill>
-                      <a:prstDash val="solid"/>
-                      <a:round/>
-                      <a:headEnd type="none" w="med" len="med"/>
-                      <a:tailEnd type="none" w="med" len="med"/>
-                    </a:lnT>
-                    <a:lnB w="6350" cap="flat" cmpd="sng" algn="ctr">
-                      <a:solidFill>
-                        <a:srgbClr val="C9D6DD"/>
-                      </a:solidFill>
-                      <a:prstDash val="solid"/>
-                      <a:round/>
-                      <a:headEnd type="none" w="med" len="med"/>
-                      <a:tailEnd type="none" w="med" len="med"/>
-                    </a:lnB>
-                    <a:solidFill>
-                      <a:srgbClr val="1F8A70"/>
-                    </a:solidFill>
-                  </a:tcPr>
-                </a:tc>
-                <a:tc>
-                  <a:txBody>
-                    <a:bodyPr/>
-                    <a:lstStyle/>
-                    <a:p>
-                      <a:pPr indent="0" marL="0">
-                        <a:buNone/>
-                      </a:pPr>
-                      <a:r>
-                        <a:rPr lang="en-US" sz="1300" b="1" dirty="0">
-                          <a:solidFill>
-                            <a:srgbClr val="FFFFFF"/>
-                          </a:solidFill>
-                        </a:rPr>
-                        <a:t>Yetkazib beruvchilar (misol)</a:t>
-                      </a:r>
-                      <a:endParaRPr lang="en-US" sz="1300" dirty="0"/>
-                    </a:p>
-                  </a:txBody>
-                  <a:tcPr marL="76200" marR="76200" marT="38100" marB="38100" anchor="ctr">
-                    <a:lnL w="6350" cap="flat" cmpd="sng" algn="ctr">
-                      <a:solidFill>
-                        <a:srgbClr val="C9D6DD"/>
-                      </a:solidFill>
-                      <a:prstDash val="solid"/>
-                      <a:round/>
-                      <a:headEnd type="none" w="med" len="med"/>
-                      <a:tailEnd type="none" w="med" len="med"/>
-                    </a:lnL>
-                    <a:lnR w="6350" cap="flat" cmpd="sng" algn="ctr">
-                      <a:solidFill>
-                        <a:srgbClr val="C9D6DD"/>
-                      </a:solidFill>
-                      <a:prstDash val="solid"/>
-                      <a:round/>
-                      <a:headEnd type="none" w="med" len="med"/>
-                      <a:tailEnd type="none" w="med" len="med"/>
-                    </a:lnR>
-                    <a:lnT w="6350" cap="flat" cmpd="sng" algn="ctr">
-                      <a:solidFill>
-                        <a:srgbClr val="C9D6DD"/>
-                      </a:solidFill>
-                      <a:prstDash val="solid"/>
-                      <a:round/>
-                      <a:headEnd type="none" w="med" len="med"/>
-                      <a:tailEnd type="none" w="med" len="med"/>
-                    </a:lnT>
-                    <a:lnB w="6350" cap="flat" cmpd="sng" algn="ctr">
-                      <a:solidFill>
-                        <a:srgbClr val="C9D6DD"/>
-                      </a:solidFill>
-                      <a:prstDash val="solid"/>
-                      <a:round/>
-                      <a:headEnd type="none" w="med" len="med"/>
-                      <a:tailEnd type="none" w="med" len="med"/>
-                    </a:lnB>
-                    <a:solidFill>
-                      <a:srgbClr val="1F8A70"/>
-                    </a:solidFill>
-                  </a:tcPr>
-                </a:tc>
-              </a:tr>
-              <a:tr h="457200">
-                <a:tc>
-                  <a:txBody>
-                    <a:bodyPr/>
-                    <a:lstStyle/>
-                    <a:p>
-                      <a:pPr algn="l" indent="0" marL="0">
-                        <a:buNone/>
-                      </a:pPr>
-                      <a:r>
-                        <a:rPr lang="en-US" sz="1300" dirty="0">
-                          <a:solidFill>
-                            <a:srgbClr val="14232E"/>
-                          </a:solidFill>
-                        </a:rPr>
-                        <a:t>Laboratoriya: 5 L bioreaktorlar, GC-FID, avtoklav, shaker</a:t>
-                      </a:r>
-                      <a:endParaRPr lang="en-US" sz="1300" dirty="0"/>
-                    </a:p>
-                  </a:txBody>
-                  <a:tcPr marL="76200" marR="76200" marT="38100" marB="38100" anchor="ctr">
-                    <a:lnL w="6350" cap="flat" cmpd="sng" algn="ctr">
-                      <a:solidFill>
-                        <a:srgbClr val="C9D6DD"/>
-                      </a:solidFill>
-                      <a:prstDash val="solid"/>
-                      <a:round/>
-                      <a:headEnd type="none" w="med" len="med"/>
-                      <a:tailEnd type="none" w="med" len="med"/>
-                    </a:lnL>
-                    <a:lnR w="6350" cap="flat" cmpd="sng" algn="ctr">
-                      <a:solidFill>
-                        <a:srgbClr val="C9D6DD"/>
-                      </a:solidFill>
-                      <a:prstDash val="solid"/>
-                      <a:round/>
-                      <a:headEnd type="none" w="med" len="med"/>
-                      <a:tailEnd type="none" w="med" len="med"/>
-                    </a:lnR>
-                    <a:lnT w="6350" cap="flat" cmpd="sng" algn="ctr">
-                      <a:solidFill>
-                        <a:srgbClr val="C9D6DD"/>
-                      </a:solidFill>
-                      <a:prstDash val="solid"/>
-                      <a:round/>
-                      <a:headEnd type="none" w="med" len="med"/>
-                      <a:tailEnd type="none" w="med" len="med"/>
-                    </a:lnT>
-                    <a:lnB w="6350" cap="flat" cmpd="sng" algn="ctr">
-                      <a:solidFill>
-                        <a:srgbClr val="C9D6DD"/>
-                      </a:solidFill>
-                      <a:prstDash val="solid"/>
-                      <a:round/>
-                      <a:headEnd type="none" w="med" len="med"/>
-                      <a:tailEnd type="none" w="med" len="med"/>
-                    </a:lnB>
-                    <a:solidFill>
-                      <a:srgbClr val="FFFFFF"/>
-                    </a:solidFill>
-                  </a:tcPr>
-                </a:tc>
-                <a:tc>
-                  <a:txBody>
-                    <a:bodyPr/>
-                    <a:lstStyle/>
-                    <a:p>
-                      <a:pPr algn="l" indent="0" marL="0">
-                        <a:buNone/>
-                      </a:pPr>
-                      <a:r>
-                        <a:rPr lang="en-US" sz="1300" dirty="0">
-                          <a:solidFill>
-                            <a:srgbClr val="14232E"/>
-                          </a:solidFill>
-                        </a:rPr>
-                        <a:t>1</a:t>
-                      </a:r>
-                      <a:endParaRPr lang="en-US" sz="1300" dirty="0"/>
-                    </a:p>
-                  </a:txBody>
-                  <a:tcPr marL="76200" marR="76200" marT="38100" marB="38100" anchor="ctr">
-                    <a:lnL w="6350" cap="flat" cmpd="sng" algn="ctr">
-                      <a:solidFill>
-                        <a:srgbClr val="C9D6DD"/>
-                      </a:solidFill>
-                      <a:prstDash val="solid"/>
-                      <a:round/>
-                      <a:headEnd type="none" w="med" len="med"/>
-                      <a:tailEnd type="none" w="med" len="med"/>
-                    </a:lnL>
-                    <a:lnR w="6350" cap="flat" cmpd="sng" algn="ctr">
-                      <a:solidFill>
-                        <a:srgbClr val="C9D6DD"/>
-                      </a:solidFill>
-                      <a:prstDash val="solid"/>
-                      <a:round/>
-                      <a:headEnd type="none" w="med" len="med"/>
-                      <a:tailEnd type="none" w="med" len="med"/>
-                    </a:lnR>
-                    <a:lnT w="6350" cap="flat" cmpd="sng" algn="ctr">
-                      <a:solidFill>
-                        <a:srgbClr val="C9D6DD"/>
-                      </a:solidFill>
-                      <a:prstDash val="solid"/>
-                      <a:round/>
-                      <a:headEnd type="none" w="med" len="med"/>
-                      <a:tailEnd type="none" w="med" len="med"/>
-                    </a:lnT>
-                    <a:lnB w="6350" cap="flat" cmpd="sng" algn="ctr">
-                      <a:solidFill>
-                        <a:srgbClr val="C9D6DD"/>
-                      </a:solidFill>
-                      <a:prstDash val="solid"/>
-                      <a:round/>
-                      <a:headEnd type="none" w="med" len="med"/>
-                      <a:tailEnd type="none" w="med" len="med"/>
-                    </a:lnB>
-                    <a:solidFill>
-                      <a:srgbClr val="FFFFFF"/>
-                    </a:solidFill>
-                  </a:tcPr>
-                </a:tc>
-                <a:tc>
-                  <a:txBody>
-                    <a:bodyPr/>
-                    <a:lstStyle/>
-                    <a:p>
-                      <a:pPr algn="r" indent="0" marL="0">
-                        <a:buNone/>
-                      </a:pPr>
-                      <a:r>
-                        <a:rPr lang="en-US" sz="1300" dirty="0">
-                          <a:solidFill>
-                            <a:srgbClr val="14232E"/>
-                          </a:solidFill>
-                        </a:rPr>
-                        <a:t>$109 500</a:t>
-                      </a:r>
-                      <a:endParaRPr lang="en-US" sz="1300" dirty="0"/>
-                    </a:p>
-                  </a:txBody>
-                  <a:tcPr marL="76200" marR="76200" marT="38100" marB="38100" anchor="ctr">
-                    <a:lnL w="6350" cap="flat" cmpd="sng" algn="ctr">
-                      <a:solidFill>
-                        <a:srgbClr val="C9D6DD"/>
-                      </a:solidFill>
-                      <a:prstDash val="solid"/>
-                      <a:round/>
-                      <a:headEnd type="none" w="med" len="med"/>
-                      <a:tailEnd type="none" w="med" len="med"/>
-                    </a:lnL>
-                    <a:lnR w="6350" cap="flat" cmpd="sng" algn="ctr">
-                      <a:solidFill>
-                        <a:srgbClr val="C9D6DD"/>
-                      </a:solidFill>
-                      <a:prstDash val="solid"/>
-                      <a:round/>
-                      <a:headEnd type="none" w="med" len="med"/>
-                      <a:tailEnd type="none" w="med" len="med"/>
-                    </a:lnR>
-                    <a:lnT w="6350" cap="flat" cmpd="sng" algn="ctr">
-                      <a:solidFill>
-                        <a:srgbClr val="C9D6DD"/>
-                      </a:solidFill>
-                      <a:prstDash val="solid"/>
-                      <a:round/>
-                      <a:headEnd type="none" w="med" len="med"/>
-                      <a:tailEnd type="none" w="med" len="med"/>
-                    </a:lnT>
-                    <a:lnB w="6350" cap="flat" cmpd="sng" algn="ctr">
-                      <a:solidFill>
-                        <a:srgbClr val="C9D6DD"/>
-                      </a:solidFill>
-                      <a:prstDash val="solid"/>
-                      <a:round/>
-                      <a:headEnd type="none" w="med" len="med"/>
-                      <a:tailEnd type="none" w="med" len="med"/>
-                    </a:lnB>
-                    <a:solidFill>
-                      <a:srgbClr val="FFFFFF"/>
-                    </a:solidFill>
-                  </a:tcPr>
-                </a:tc>
-                <a:tc>
-                  <a:txBody>
-                    <a:bodyPr/>
-                    <a:lstStyle/>
-                    <a:p>
-                      <a:pPr algn="l" indent="0" marL="0">
-                        <a:buNone/>
-                      </a:pPr>
-                      <a:r>
-                        <a:rPr lang="en-US" sz="1300" dirty="0">
-                          <a:solidFill>
-                            <a:srgbClr val="14232E"/>
-                          </a:solidFill>
-                        </a:rPr>
-                        <a:t>Sartorius, Eppendorf, Agilent, Shimadzu</a:t>
-                      </a:r>
-                      <a:endParaRPr lang="en-US" sz="1300" dirty="0"/>
-                    </a:p>
-                  </a:txBody>
-                  <a:tcPr marL="76200" marR="76200" marT="38100" marB="38100" anchor="ctr">
-                    <a:lnL w="6350" cap="flat" cmpd="sng" algn="ctr">
-                      <a:solidFill>
-                        <a:srgbClr val="C9D6DD"/>
-                      </a:solidFill>
-                      <a:prstDash val="solid"/>
-                      <a:round/>
-                      <a:headEnd type="none" w="med" len="med"/>
-                      <a:tailEnd type="none" w="med" len="med"/>
-                    </a:lnL>
-                    <a:lnR w="6350" cap="flat" cmpd="sng" algn="ctr">
-                      <a:solidFill>
-                        <a:srgbClr val="C9D6DD"/>
-                      </a:solidFill>
-                      <a:prstDash val="solid"/>
-                      <a:round/>
-                      <a:headEnd type="none" w="med" len="med"/>
-                      <a:tailEnd type="none" w="med" len="med"/>
-                    </a:lnR>
-                    <a:lnT w="6350" cap="flat" cmpd="sng" algn="ctr">
-                      <a:solidFill>
-                        <a:srgbClr val="C9D6DD"/>
-                      </a:solidFill>
-                      <a:prstDash val="solid"/>
-                      <a:round/>
-                      <a:headEnd type="none" w="med" len="med"/>
-                      <a:tailEnd type="none" w="med" len="med"/>
-                    </a:lnT>
-                    <a:lnB w="6350" cap="flat" cmpd="sng" algn="ctr">
-                      <a:solidFill>
-                        <a:srgbClr val="C9D6DD"/>
-                      </a:solidFill>
-                      <a:prstDash val="solid"/>
-                      <a:round/>
-                      <a:headEnd type="none" w="med" len="med"/>
-                      <a:tailEnd type="none" w="med" len="med"/>
-                    </a:lnB>
-                    <a:solidFill>
-                      <a:srgbClr val="FFFFFF"/>
-                    </a:solidFill>
-                  </a:tcPr>
-                </a:tc>
-              </a:tr>
-              <a:tr h="457200">
-                <a:tc>
-                  <a:txBody>
-                    <a:bodyPr/>
-                    <a:lstStyle/>
-                    <a:p>
-                      <a:pPr algn="l" indent="0" marL="0">
-                        <a:buNone/>
-                      </a:pPr>
-                      <a:r>
-                        <a:rPr lang="en-US" sz="1300" dirty="0">
-                          <a:solidFill>
-                            <a:srgbClr val="14232E"/>
-                          </a:solidFill>
-                        </a:rPr>
-                        <a:t>Pilot fermenter 300 L + pilot ajratish</a:t>
-                      </a:r>
-                      <a:endParaRPr lang="en-US" sz="1300" dirty="0"/>
-                    </a:p>
-                  </a:txBody>
-                  <a:tcPr marL="76200" marR="76200" marT="38100" marB="38100" anchor="ctr">
-                    <a:lnL w="6350" cap="flat" cmpd="sng" algn="ctr">
-                      <a:solidFill>
-                        <a:srgbClr val="C9D6DD"/>
-                      </a:solidFill>
-                      <a:prstDash val="solid"/>
-                      <a:round/>
-                      <a:headEnd type="none" w="med" len="med"/>
-                      <a:tailEnd type="none" w="med" len="med"/>
-                    </a:lnL>
-                    <a:lnR w="6350" cap="flat" cmpd="sng" algn="ctr">
-                      <a:solidFill>
-                        <a:srgbClr val="C9D6DD"/>
-                      </a:solidFill>
-                      <a:prstDash val="solid"/>
-                      <a:round/>
-                      <a:headEnd type="none" w="med" len="med"/>
-                      <a:tailEnd type="none" w="med" len="med"/>
-                    </a:lnR>
-                    <a:lnT w="6350" cap="flat" cmpd="sng" algn="ctr">
-                      <a:solidFill>
-                        <a:srgbClr val="C9D6DD"/>
-                      </a:solidFill>
-                      <a:prstDash val="solid"/>
-                      <a:round/>
-                      <a:headEnd type="none" w="med" len="med"/>
-                      <a:tailEnd type="none" w="med" len="med"/>
-                    </a:lnT>
-                    <a:lnB w="6350" cap="flat" cmpd="sng" algn="ctr">
-                      <a:solidFill>
-                        <a:srgbClr val="C9D6DD"/>
-                      </a:solidFill>
-                      <a:prstDash val="solid"/>
-                      <a:round/>
-                      <a:headEnd type="none" w="med" len="med"/>
-                      <a:tailEnd type="none" w="med" len="med"/>
-                    </a:lnB>
-                    <a:solidFill>
-                      <a:srgbClr val="EAF3F1"/>
-                    </a:solidFill>
-                  </a:tcPr>
-                </a:tc>
-                <a:tc>
-                  <a:txBody>
-                    <a:bodyPr/>
-                    <a:lstStyle/>
-                    <a:p>
-                      <a:pPr algn="l" indent="0" marL="0">
-                        <a:buNone/>
-                      </a:pPr>
-                      <a:r>
-                        <a:rPr lang="en-US" sz="1300" dirty="0">
-                          <a:solidFill>
-                            <a:srgbClr val="14232E"/>
-                          </a:solidFill>
-                        </a:rPr>
-                        <a:t>1</a:t>
-                      </a:r>
-                      <a:endParaRPr lang="en-US" sz="1300" dirty="0"/>
-                    </a:p>
-                  </a:txBody>
-                  <a:tcPr marL="76200" marR="76200" marT="38100" marB="38100" anchor="ctr">
-                    <a:lnL w="6350" cap="flat" cmpd="sng" algn="ctr">
-                      <a:solidFill>
-                        <a:srgbClr val="C9D6DD"/>
-                      </a:solidFill>
-                      <a:prstDash val="solid"/>
-                      <a:round/>
-                      <a:headEnd type="none" w="med" len="med"/>
-                      <a:tailEnd type="none" w="med" len="med"/>
-                    </a:lnL>
-                    <a:lnR w="6350" cap="flat" cmpd="sng" algn="ctr">
-                      <a:solidFill>
-                        <a:srgbClr val="C9D6DD"/>
-                      </a:solidFill>
-                      <a:prstDash val="solid"/>
-                      <a:round/>
-                      <a:headEnd type="none" w="med" len="med"/>
-                      <a:tailEnd type="none" w="med" len="med"/>
-                    </a:lnR>
-                    <a:lnT w="6350" cap="flat" cmpd="sng" algn="ctr">
-                      <a:solidFill>
-                        <a:srgbClr val="C9D6DD"/>
-                      </a:solidFill>
-                      <a:prstDash val="solid"/>
-                      <a:round/>
-                      <a:headEnd type="none" w="med" len="med"/>
-                      <a:tailEnd type="none" w="med" len="med"/>
-                    </a:lnT>
-                    <a:lnB w="6350" cap="flat" cmpd="sng" algn="ctr">
-                      <a:solidFill>
-                        <a:srgbClr val="C9D6DD"/>
-                      </a:solidFill>
-                      <a:prstDash val="solid"/>
-                      <a:round/>
-                      <a:headEnd type="none" w="med" len="med"/>
-                      <a:tailEnd type="none" w="med" len="med"/>
-                    </a:lnB>
-                    <a:solidFill>
-                      <a:srgbClr val="EAF3F1"/>
-                    </a:solidFill>
-                  </a:tcPr>
-                </a:tc>
-                <a:tc>
-                  <a:txBody>
-                    <a:bodyPr/>
-                    <a:lstStyle/>
-                    <a:p>
-                      <a:pPr algn="r" indent="0" marL="0">
-                        <a:buNone/>
-                      </a:pPr>
-                      <a:r>
-                        <a:rPr lang="en-US" sz="1300" dirty="0">
-                          <a:solidFill>
-                            <a:srgbClr val="14232E"/>
-                          </a:solidFill>
-                        </a:rPr>
-                        <a:t>$67 000</a:t>
-                      </a:r>
-                      <a:endParaRPr lang="en-US" sz="1300" dirty="0"/>
-                    </a:p>
-                  </a:txBody>
-                  <a:tcPr marL="76200" marR="76200" marT="38100" marB="38100" anchor="ctr">
-                    <a:lnL w="6350" cap="flat" cmpd="sng" algn="ctr">
-                      <a:solidFill>
-                        <a:srgbClr val="C9D6DD"/>
-                      </a:solidFill>
-                      <a:prstDash val="solid"/>
-                      <a:round/>
-                      <a:headEnd type="none" w="med" len="med"/>
-                      <a:tailEnd type="none" w="med" len="med"/>
-                    </a:lnL>
-                    <a:lnR w="6350" cap="flat" cmpd="sng" algn="ctr">
-                      <a:solidFill>
-                        <a:srgbClr val="C9D6DD"/>
-                      </a:solidFill>
-                      <a:prstDash val="solid"/>
-                      <a:round/>
-                      <a:headEnd type="none" w="med" len="med"/>
-                      <a:tailEnd type="none" w="med" len="med"/>
-                    </a:lnR>
-                    <a:lnT w="6350" cap="flat" cmpd="sng" algn="ctr">
-                      <a:solidFill>
-                        <a:srgbClr val="C9D6DD"/>
-                      </a:solidFill>
-                      <a:prstDash val="solid"/>
-                      <a:round/>
-                      <a:headEnd type="none" w="med" len="med"/>
-                      <a:tailEnd type="none" w="med" len="med"/>
-                    </a:lnT>
-                    <a:lnB w="6350" cap="flat" cmpd="sng" algn="ctr">
-                      <a:solidFill>
-                        <a:srgbClr val="C9D6DD"/>
-                      </a:solidFill>
-                      <a:prstDash val="solid"/>
-                      <a:round/>
-                      <a:headEnd type="none" w="med" len="med"/>
-                      <a:tailEnd type="none" w="med" len="med"/>
-                    </a:lnB>
-                    <a:solidFill>
-                      <a:srgbClr val="EAF3F1"/>
-                    </a:solidFill>
-                  </a:tcPr>
-                </a:tc>
-                <a:tc>
-                  <a:txBody>
-                    <a:bodyPr/>
-                    <a:lstStyle/>
-                    <a:p>
-                      <a:pPr algn="l" indent="0" marL="0">
-                        <a:buNone/>
-                      </a:pPr>
-                      <a:r>
-                        <a:rPr lang="en-US" sz="1300" dirty="0">
-                          <a:solidFill>
-                            <a:srgbClr val="14232E"/>
-                          </a:solidFill>
-                        </a:rPr>
-                        <a:t>Bailun, T&amp;J Bio-engineering</a:t>
-                      </a:r>
-                      <a:endParaRPr lang="en-US" sz="1300" dirty="0"/>
-                    </a:p>
-                  </a:txBody>
-                  <a:tcPr marL="76200" marR="76200" marT="38100" marB="38100" anchor="ctr">
-                    <a:lnL w="6350" cap="flat" cmpd="sng" algn="ctr">
-                      <a:solidFill>
-                        <a:srgbClr val="C9D6DD"/>
-                      </a:solidFill>
-                      <a:prstDash val="solid"/>
-                      <a:round/>
-                      <a:headEnd type="none" w="med" len="med"/>
-                      <a:tailEnd type="none" w="med" len="med"/>
-                    </a:lnL>
-                    <a:lnR w="6350" cap="flat" cmpd="sng" algn="ctr">
-                      <a:solidFill>
-                        <a:srgbClr val="C9D6DD"/>
-                      </a:solidFill>
-                      <a:prstDash val="solid"/>
-                      <a:round/>
-                      <a:headEnd type="none" w="med" len="med"/>
-                      <a:tailEnd type="none" w="med" len="med"/>
-                    </a:lnR>
-                    <a:lnT w="6350" cap="flat" cmpd="sng" algn="ctr">
-                      <a:solidFill>
-                        <a:srgbClr val="C9D6DD"/>
-                      </a:solidFill>
-                      <a:prstDash val="solid"/>
-                      <a:round/>
-                      <a:headEnd type="none" w="med" len="med"/>
-                      <a:tailEnd type="none" w="med" len="med"/>
-                    </a:lnT>
-                    <a:lnB w="6350" cap="flat" cmpd="sng" algn="ctr">
-                      <a:solidFill>
-                        <a:srgbClr val="C9D6DD"/>
-                      </a:solidFill>
-                      <a:prstDash val="solid"/>
-                      <a:round/>
-                      <a:headEnd type="none" w="med" len="med"/>
-                      <a:tailEnd type="none" w="med" len="med"/>
-                    </a:lnB>
-                    <a:solidFill>
-                      <a:srgbClr val="EAF3F1"/>
-                    </a:solidFill>
-                  </a:tcPr>
-                </a:tc>
-              </a:tr>
-              <a:tr h="457200">
-                <a:tc>
-                  <a:txBody>
-                    <a:bodyPr/>
-                    <a:lstStyle/>
-                    <a:p>
-                      <a:pPr algn="l" indent="0" marL="0">
-                        <a:buNone/>
-                      </a:pPr>
-                      <a:r>
-                        <a:rPr lang="en-US" sz="1300" dirty="0">
-                          <a:solidFill>
-                            <a:srgbClr val="14232E"/>
-                          </a:solidFill>
-                        </a:rPr>
-                        <a:t>Kompaundlash ekstruderi + 2 plyonka liniyasi</a:t>
-                      </a:r>
-                      <a:endParaRPr lang="en-US" sz="1300" dirty="0"/>
-                    </a:p>
-                  </a:txBody>
-                  <a:tcPr marL="76200" marR="76200" marT="38100" marB="38100" anchor="ctr">
-                    <a:lnL w="6350" cap="flat" cmpd="sng" algn="ctr">
-                      <a:solidFill>
-                        <a:srgbClr val="C9D6DD"/>
-                      </a:solidFill>
-                      <a:prstDash val="solid"/>
-                      <a:round/>
-                      <a:headEnd type="none" w="med" len="med"/>
-                      <a:tailEnd type="none" w="med" len="med"/>
-                    </a:lnL>
-                    <a:lnR w="6350" cap="flat" cmpd="sng" algn="ctr">
-                      <a:solidFill>
-                        <a:srgbClr val="C9D6DD"/>
-                      </a:solidFill>
-                      <a:prstDash val="solid"/>
-                      <a:round/>
-                      <a:headEnd type="none" w="med" len="med"/>
-                      <a:tailEnd type="none" w="med" len="med"/>
-                    </a:lnR>
-                    <a:lnT w="6350" cap="flat" cmpd="sng" algn="ctr">
-                      <a:solidFill>
-                        <a:srgbClr val="C9D6DD"/>
-                      </a:solidFill>
-                      <a:prstDash val="solid"/>
-                      <a:round/>
-                      <a:headEnd type="none" w="med" len="med"/>
-                      <a:tailEnd type="none" w="med" len="med"/>
-                    </a:lnT>
-                    <a:lnB w="6350" cap="flat" cmpd="sng" algn="ctr">
-                      <a:solidFill>
-                        <a:srgbClr val="C9D6DD"/>
-                      </a:solidFill>
-                      <a:prstDash val="solid"/>
-                      <a:round/>
-                      <a:headEnd type="none" w="med" len="med"/>
-                      <a:tailEnd type="none" w="med" len="med"/>
-                    </a:lnB>
-                    <a:solidFill>
-                      <a:srgbClr val="FFFFFF"/>
-                    </a:solidFill>
-                  </a:tcPr>
-                </a:tc>
-                <a:tc>
-                  <a:txBody>
-                    <a:bodyPr/>
-                    <a:lstStyle/>
-                    <a:p>
-                      <a:pPr algn="l" indent="0" marL="0">
-                        <a:buNone/>
-                      </a:pPr>
-                      <a:r>
-                        <a:rPr lang="en-US" sz="1300" dirty="0">
-                          <a:solidFill>
-                            <a:srgbClr val="14232E"/>
-                          </a:solidFill>
-                        </a:rPr>
-                        <a:t>1–2</a:t>
-                      </a:r>
-                      <a:endParaRPr lang="en-US" sz="1300" dirty="0"/>
-                    </a:p>
-                  </a:txBody>
-                  <a:tcPr marL="76200" marR="76200" marT="38100" marB="38100" anchor="ctr">
-                    <a:lnL w="6350" cap="flat" cmpd="sng" algn="ctr">
-                      <a:solidFill>
-                        <a:srgbClr val="C9D6DD"/>
-                      </a:solidFill>
-                      <a:prstDash val="solid"/>
-                      <a:round/>
-                      <a:headEnd type="none" w="med" len="med"/>
-                      <a:tailEnd type="none" w="med" len="med"/>
-                    </a:lnL>
-                    <a:lnR w="6350" cap="flat" cmpd="sng" algn="ctr">
-                      <a:solidFill>
-                        <a:srgbClr val="C9D6DD"/>
-                      </a:solidFill>
-                      <a:prstDash val="solid"/>
-                      <a:round/>
-                      <a:headEnd type="none" w="med" len="med"/>
-                      <a:tailEnd type="none" w="med" len="med"/>
-                    </a:lnR>
-                    <a:lnT w="6350" cap="flat" cmpd="sng" algn="ctr">
-                      <a:solidFill>
-                        <a:srgbClr val="C9D6DD"/>
-                      </a:solidFill>
-                      <a:prstDash val="solid"/>
-                      <a:round/>
-                      <a:headEnd type="none" w="med" len="med"/>
-                      <a:tailEnd type="none" w="med" len="med"/>
-                    </a:lnT>
-                    <a:lnB w="6350" cap="flat" cmpd="sng" algn="ctr">
-                      <a:solidFill>
-                        <a:srgbClr val="C9D6DD"/>
-                      </a:solidFill>
-                      <a:prstDash val="solid"/>
-                      <a:round/>
-                      <a:headEnd type="none" w="med" len="med"/>
-                      <a:tailEnd type="none" w="med" len="med"/>
-                    </a:lnB>
-                    <a:solidFill>
-                      <a:srgbClr val="FFFFFF"/>
-                    </a:solidFill>
-                  </a:tcPr>
-                </a:tc>
-                <a:tc>
-                  <a:txBody>
-                    <a:bodyPr/>
-                    <a:lstStyle/>
-                    <a:p>
-                      <a:pPr algn="r" indent="0" marL="0">
-                        <a:buNone/>
-                      </a:pPr>
-                      <a:r>
-                        <a:rPr lang="en-US" sz="1300" dirty="0">
-                          <a:solidFill>
-                            <a:srgbClr val="14232E"/>
-                          </a:solidFill>
-                        </a:rPr>
-                        <a:t>$225 000</a:t>
-                      </a:r>
-                      <a:endParaRPr lang="en-US" sz="1300" dirty="0"/>
-                    </a:p>
-                  </a:txBody>
-                  <a:tcPr marL="76200" marR="76200" marT="38100" marB="38100" anchor="ctr">
-                    <a:lnL w="6350" cap="flat" cmpd="sng" algn="ctr">
-                      <a:solidFill>
-                        <a:srgbClr val="C9D6DD"/>
-                      </a:solidFill>
-                      <a:prstDash val="solid"/>
-                      <a:round/>
-                      <a:headEnd type="none" w="med" len="med"/>
-                      <a:tailEnd type="none" w="med" len="med"/>
-                    </a:lnL>
-                    <a:lnR w="6350" cap="flat" cmpd="sng" algn="ctr">
-                      <a:solidFill>
-                        <a:srgbClr val="C9D6DD"/>
-                      </a:solidFill>
-                      <a:prstDash val="solid"/>
-                      <a:round/>
-                      <a:headEnd type="none" w="med" len="med"/>
-                      <a:tailEnd type="none" w="med" len="med"/>
-                    </a:lnR>
-                    <a:lnT w="6350" cap="flat" cmpd="sng" algn="ctr">
-                      <a:solidFill>
-                        <a:srgbClr val="C9D6DD"/>
-                      </a:solidFill>
-                      <a:prstDash val="solid"/>
-                      <a:round/>
-                      <a:headEnd type="none" w="med" len="med"/>
-                      <a:tailEnd type="none" w="med" len="med"/>
-                    </a:lnT>
-                    <a:lnB w="6350" cap="flat" cmpd="sng" algn="ctr">
-                      <a:solidFill>
-                        <a:srgbClr val="C9D6DD"/>
-                      </a:solidFill>
-                      <a:prstDash val="solid"/>
-                      <a:round/>
-                      <a:headEnd type="none" w="med" len="med"/>
-                      <a:tailEnd type="none" w="med" len="med"/>
-                    </a:lnB>
-                    <a:solidFill>
-                      <a:srgbClr val="FFFFFF"/>
-                    </a:solidFill>
-                  </a:tcPr>
-                </a:tc>
-                <a:tc>
-                  <a:txBody>
-                    <a:bodyPr/>
-                    <a:lstStyle/>
-                    <a:p>
-                      <a:pPr algn="l" indent="0" marL="0">
-                        <a:buNone/>
-                      </a:pPr>
-                      <a:r>
-                        <a:rPr lang="en-US" sz="1300" dirty="0">
-                          <a:solidFill>
-                            <a:srgbClr val="14232E"/>
-                          </a:solidFill>
-                        </a:rPr>
-                        <a:t>Coperion, Nanjing Kerke, Ruian Ruipai</a:t>
-                      </a:r>
-                      <a:endParaRPr lang="en-US" sz="1300" dirty="0"/>
-                    </a:p>
-                  </a:txBody>
-                  <a:tcPr marL="76200" marR="76200" marT="38100" marB="38100" anchor="ctr">
-                    <a:lnL w="6350" cap="flat" cmpd="sng" algn="ctr">
-                      <a:solidFill>
-                        <a:srgbClr val="C9D6DD"/>
-                      </a:solidFill>
-                      <a:prstDash val="solid"/>
-                      <a:round/>
-                      <a:headEnd type="none" w="med" len="med"/>
-                      <a:tailEnd type="none" w="med" len="med"/>
-                    </a:lnL>
-                    <a:lnR w="6350" cap="flat" cmpd="sng" algn="ctr">
-                      <a:solidFill>
-                        <a:srgbClr val="C9D6DD"/>
-                      </a:solidFill>
-                      <a:prstDash val="solid"/>
-                      <a:round/>
-                      <a:headEnd type="none" w="med" len="med"/>
-                      <a:tailEnd type="none" w="med" len="med"/>
-                    </a:lnR>
-                    <a:lnT w="6350" cap="flat" cmpd="sng" algn="ctr">
-                      <a:solidFill>
-                        <a:srgbClr val="C9D6DD"/>
-                      </a:solidFill>
-                      <a:prstDash val="solid"/>
-                      <a:round/>
-                      <a:headEnd type="none" w="med" len="med"/>
-                      <a:tailEnd type="none" w="med" len="med"/>
-                    </a:lnT>
-                    <a:lnB w="6350" cap="flat" cmpd="sng" algn="ctr">
-                      <a:solidFill>
-                        <a:srgbClr val="C9D6DD"/>
-                      </a:solidFill>
-                      <a:prstDash val="solid"/>
-                      <a:round/>
-                      <a:headEnd type="none" w="med" len="med"/>
-                      <a:tailEnd type="none" w="med" len="med"/>
-                    </a:lnB>
-                    <a:solidFill>
-                      <a:srgbClr val="FFFFFF"/>
-                    </a:solidFill>
-                  </a:tcPr>
-                </a:tc>
-              </a:tr>
-              <a:tr h="457200">
-                <a:tc>
-                  <a:txBody>
-                    <a:bodyPr/>
-                    <a:lstStyle/>
-                    <a:p>
-                      <a:pPr algn="l" indent="0" marL="0">
-                        <a:buNone/>
-                      </a:pPr>
-                      <a:r>
-                        <a:rPr lang="en-US" sz="1300" dirty="0">
-                          <a:solidFill>
-                            <a:srgbClr val="14232E"/>
-                          </a:solidFill>
-                        </a:rPr>
-                        <a:t>Paket mashinalari, fleksobosma</a:t>
-                      </a:r>
-                      <a:endParaRPr lang="en-US" sz="1300" dirty="0"/>
-                    </a:p>
-                  </a:txBody>
-                  <a:tcPr marL="76200" marR="76200" marT="38100" marB="38100" anchor="ctr">
-                    <a:lnL w="6350" cap="flat" cmpd="sng" algn="ctr">
-                      <a:solidFill>
-                        <a:srgbClr val="C9D6DD"/>
-                      </a:solidFill>
-                      <a:prstDash val="solid"/>
-                      <a:round/>
-                      <a:headEnd type="none" w="med" len="med"/>
-                      <a:tailEnd type="none" w="med" len="med"/>
-                    </a:lnL>
-                    <a:lnR w="6350" cap="flat" cmpd="sng" algn="ctr">
-                      <a:solidFill>
-                        <a:srgbClr val="C9D6DD"/>
-                      </a:solidFill>
-                      <a:prstDash val="solid"/>
-                      <a:round/>
-                      <a:headEnd type="none" w="med" len="med"/>
-                      <a:tailEnd type="none" w="med" len="med"/>
-                    </a:lnR>
-                    <a:lnT w="6350" cap="flat" cmpd="sng" algn="ctr">
-                      <a:solidFill>
-                        <a:srgbClr val="C9D6DD"/>
-                      </a:solidFill>
-                      <a:prstDash val="solid"/>
-                      <a:round/>
-                      <a:headEnd type="none" w="med" len="med"/>
-                      <a:tailEnd type="none" w="med" len="med"/>
-                    </a:lnT>
-                    <a:lnB w="6350" cap="flat" cmpd="sng" algn="ctr">
-                      <a:solidFill>
-                        <a:srgbClr val="C9D6DD"/>
-                      </a:solidFill>
-                      <a:prstDash val="solid"/>
-                      <a:round/>
-                      <a:headEnd type="none" w="med" len="med"/>
-                      <a:tailEnd type="none" w="med" len="med"/>
-                    </a:lnB>
-                    <a:solidFill>
-                      <a:srgbClr val="EAF3F1"/>
-                    </a:solidFill>
-                  </a:tcPr>
-                </a:tc>
-                <a:tc>
-                  <a:txBody>
-                    <a:bodyPr/>
-                    <a:lstStyle/>
-                    <a:p>
-                      <a:pPr algn="l" indent="0" marL="0">
-                        <a:buNone/>
-                      </a:pPr>
-                      <a:r>
-                        <a:rPr lang="en-US" sz="1300" dirty="0">
-                          <a:solidFill>
-                            <a:srgbClr val="14232E"/>
-                          </a:solidFill>
-                        </a:rPr>
-                        <a:t>1</a:t>
-                      </a:r>
-                      <a:endParaRPr lang="en-US" sz="1300" dirty="0"/>
-                    </a:p>
-                  </a:txBody>
-                  <a:tcPr marL="76200" marR="76200" marT="38100" marB="38100" anchor="ctr">
-                    <a:lnL w="6350" cap="flat" cmpd="sng" algn="ctr">
-                      <a:solidFill>
-                        <a:srgbClr val="C9D6DD"/>
-                      </a:solidFill>
-                      <a:prstDash val="solid"/>
-                      <a:round/>
-                      <a:headEnd type="none" w="med" len="med"/>
-                      <a:tailEnd type="none" w="med" len="med"/>
-                    </a:lnL>
-                    <a:lnR w="6350" cap="flat" cmpd="sng" algn="ctr">
-                      <a:solidFill>
-                        <a:srgbClr val="C9D6DD"/>
-                      </a:solidFill>
-                      <a:prstDash val="solid"/>
-                      <a:round/>
-                      <a:headEnd type="none" w="med" len="med"/>
-                      <a:tailEnd type="none" w="med" len="med"/>
-                    </a:lnR>
-                    <a:lnT w="6350" cap="flat" cmpd="sng" algn="ctr">
-                      <a:solidFill>
-                        <a:srgbClr val="C9D6DD"/>
-                      </a:solidFill>
-                      <a:prstDash val="solid"/>
-                      <a:round/>
-                      <a:headEnd type="none" w="med" len="med"/>
-                      <a:tailEnd type="none" w="med" len="med"/>
-                    </a:lnT>
-                    <a:lnB w="6350" cap="flat" cmpd="sng" algn="ctr">
-                      <a:solidFill>
-                        <a:srgbClr val="C9D6DD"/>
-                      </a:solidFill>
-                      <a:prstDash val="solid"/>
-                      <a:round/>
-                      <a:headEnd type="none" w="med" len="med"/>
-                      <a:tailEnd type="none" w="med" len="med"/>
-                    </a:lnB>
-                    <a:solidFill>
-                      <a:srgbClr val="EAF3F1"/>
-                    </a:solidFill>
-                  </a:tcPr>
-                </a:tc>
-                <a:tc>
-                  <a:txBody>
-                    <a:bodyPr/>
-                    <a:lstStyle/>
-                    <a:p>
-                      <a:pPr algn="r" indent="0" marL="0">
-                        <a:buNone/>
-                      </a:pPr>
-                      <a:r>
-                        <a:rPr lang="en-US" sz="1300" dirty="0">
-                          <a:solidFill>
-                            <a:srgbClr val="14232E"/>
-                          </a:solidFill>
-                        </a:rPr>
-                        <a:t>$58 000</a:t>
-                      </a:r>
-                      <a:endParaRPr lang="en-US" sz="1300" dirty="0"/>
-                    </a:p>
-                  </a:txBody>
-                  <a:tcPr marL="76200" marR="76200" marT="38100" marB="38100" anchor="ctr">
-                    <a:lnL w="6350" cap="flat" cmpd="sng" algn="ctr">
-                      <a:solidFill>
-                        <a:srgbClr val="C9D6DD"/>
-                      </a:solidFill>
-                      <a:prstDash val="solid"/>
-                      <a:round/>
-                      <a:headEnd type="none" w="med" len="med"/>
-                      <a:tailEnd type="none" w="med" len="med"/>
-                    </a:lnL>
-                    <a:lnR w="6350" cap="flat" cmpd="sng" algn="ctr">
-                      <a:solidFill>
-                        <a:srgbClr val="C9D6DD"/>
-                      </a:solidFill>
-                      <a:prstDash val="solid"/>
-                      <a:round/>
-                      <a:headEnd type="none" w="med" len="med"/>
-                      <a:tailEnd type="none" w="med" len="med"/>
-                    </a:lnR>
-                    <a:lnT w="6350" cap="flat" cmpd="sng" algn="ctr">
-                      <a:solidFill>
-                        <a:srgbClr val="C9D6DD"/>
-                      </a:solidFill>
-                      <a:prstDash val="solid"/>
-                      <a:round/>
-                      <a:headEnd type="none" w="med" len="med"/>
-                      <a:tailEnd type="none" w="med" len="med"/>
-                    </a:lnT>
-                    <a:lnB w="6350" cap="flat" cmpd="sng" algn="ctr">
-                      <a:solidFill>
-                        <a:srgbClr val="C9D6DD"/>
-                      </a:solidFill>
-                      <a:prstDash val="solid"/>
-                      <a:round/>
-                      <a:headEnd type="none" w="med" len="med"/>
-                      <a:tailEnd type="none" w="med" len="med"/>
-                    </a:lnB>
-                    <a:solidFill>
-                      <a:srgbClr val="EAF3F1"/>
-                    </a:solidFill>
-                  </a:tcPr>
-                </a:tc>
-                <a:tc>
-                  <a:txBody>
-                    <a:bodyPr/>
-                    <a:lstStyle/>
-                    <a:p>
-                      <a:pPr algn="l" indent="0" marL="0">
-                        <a:buNone/>
-                      </a:pPr>
-                      <a:r>
-                        <a:rPr lang="en-US" sz="1300" dirty="0">
-                          <a:solidFill>
-                            <a:srgbClr val="14232E"/>
-                          </a:solidFill>
-                        </a:rPr>
-                        <a:t>Ruian Xinye, Ruian Changhong</a:t>
-                      </a:r>
-                      <a:endParaRPr lang="en-US" sz="1300" dirty="0"/>
-                    </a:p>
-                  </a:txBody>
-                  <a:tcPr marL="76200" marR="76200" marT="38100" marB="38100" anchor="ctr">
-                    <a:lnL w="6350" cap="flat" cmpd="sng" algn="ctr">
-                      <a:solidFill>
-                        <a:srgbClr val="C9D6DD"/>
-                      </a:solidFill>
-                      <a:prstDash val="solid"/>
-                      <a:round/>
-                      <a:headEnd type="none" w="med" len="med"/>
-                      <a:tailEnd type="none" w="med" len="med"/>
-                    </a:lnL>
-                    <a:lnR w="6350" cap="flat" cmpd="sng" algn="ctr">
-                      <a:solidFill>
-                        <a:srgbClr val="C9D6DD"/>
-                      </a:solidFill>
-                      <a:prstDash val="solid"/>
-                      <a:round/>
-                      <a:headEnd type="none" w="med" len="med"/>
-                      <a:tailEnd type="none" w="med" len="med"/>
-                    </a:lnR>
-                    <a:lnT w="6350" cap="flat" cmpd="sng" algn="ctr">
-                      <a:solidFill>
-                        <a:srgbClr val="C9D6DD"/>
-                      </a:solidFill>
-                      <a:prstDash val="solid"/>
-                      <a:round/>
-                      <a:headEnd type="none" w="med" len="med"/>
-                      <a:tailEnd type="none" w="med" len="med"/>
-                    </a:lnT>
-                    <a:lnB w="6350" cap="flat" cmpd="sng" algn="ctr">
-                      <a:solidFill>
-                        <a:srgbClr val="C9D6DD"/>
-                      </a:solidFill>
-                      <a:prstDash val="solid"/>
-                      <a:round/>
-                      <a:headEnd type="none" w="med" len="med"/>
-                      <a:tailEnd type="none" w="med" len="med"/>
-                    </a:lnB>
-                    <a:solidFill>
-                      <a:srgbClr val="EAF3F1"/>
-                    </a:solidFill>
-                  </a:tcPr>
-                </a:tc>
-              </a:tr>
-              <a:tr h="457200">
-                <a:tc>
-                  <a:txBody>
-                    <a:bodyPr/>
-                    <a:lstStyle/>
-                    <a:p>
-                      <a:pPr algn="l" indent="0" marL="0">
-                        <a:buNone/>
-                      </a:pPr>
-                      <a:r>
-                        <a:rPr lang="en-US" sz="1300" dirty="0">
-                          <a:solidFill>
-                            <a:srgbClr val="14232E"/>
-                          </a:solidFill>
-                        </a:rPr>
-                        <a:t>Fermenterlar: 1 m³ urug‘ + 2 × 10 m³</a:t>
-                      </a:r>
-                      <a:endParaRPr lang="en-US" sz="1300" dirty="0"/>
-                    </a:p>
-                  </a:txBody>
-                  <a:tcPr marL="76200" marR="76200" marT="38100" marB="38100" anchor="ctr">
-                    <a:lnL w="6350" cap="flat" cmpd="sng" algn="ctr">
-                      <a:solidFill>
-                        <a:srgbClr val="C9D6DD"/>
-                      </a:solidFill>
-                      <a:prstDash val="solid"/>
-                      <a:round/>
-                      <a:headEnd type="none" w="med" len="med"/>
-                      <a:tailEnd type="none" w="med" len="med"/>
-                    </a:lnL>
-                    <a:lnR w="6350" cap="flat" cmpd="sng" algn="ctr">
-                      <a:solidFill>
-                        <a:srgbClr val="C9D6DD"/>
-                      </a:solidFill>
-                      <a:prstDash val="solid"/>
-                      <a:round/>
-                      <a:headEnd type="none" w="med" len="med"/>
-                      <a:tailEnd type="none" w="med" len="med"/>
-                    </a:lnR>
-                    <a:lnT w="6350" cap="flat" cmpd="sng" algn="ctr">
-                      <a:solidFill>
-                        <a:srgbClr val="C9D6DD"/>
-                      </a:solidFill>
-                      <a:prstDash val="solid"/>
-                      <a:round/>
-                      <a:headEnd type="none" w="med" len="med"/>
-                      <a:tailEnd type="none" w="med" len="med"/>
-                    </a:lnT>
-                    <a:lnB w="6350" cap="flat" cmpd="sng" algn="ctr">
-                      <a:solidFill>
-                        <a:srgbClr val="C9D6DD"/>
-                      </a:solidFill>
-                      <a:prstDash val="solid"/>
-                      <a:round/>
-                      <a:headEnd type="none" w="med" len="med"/>
-                      <a:tailEnd type="none" w="med" len="med"/>
-                    </a:lnB>
-                    <a:solidFill>
-                      <a:srgbClr val="FFFFFF"/>
-                    </a:solidFill>
-                  </a:tcPr>
-                </a:tc>
-                <a:tc>
-                  <a:txBody>
-                    <a:bodyPr/>
-                    <a:lstStyle/>
-                    <a:p>
-                      <a:pPr algn="l" indent="0" marL="0">
-                        <a:buNone/>
-                      </a:pPr>
-                      <a:r>
-                        <a:rPr lang="en-US" sz="1300" dirty="0">
-                          <a:solidFill>
-                            <a:srgbClr val="14232E"/>
-                          </a:solidFill>
-                        </a:rPr>
-                        <a:t>2</a:t>
-                      </a:r>
-                      <a:endParaRPr lang="en-US" sz="1300" dirty="0"/>
-                    </a:p>
-                  </a:txBody>
-                  <a:tcPr marL="76200" marR="76200" marT="38100" marB="38100" anchor="ctr">
-                    <a:lnL w="6350" cap="flat" cmpd="sng" algn="ctr">
-                      <a:solidFill>
-                        <a:srgbClr val="C9D6DD"/>
-                      </a:solidFill>
-                      <a:prstDash val="solid"/>
-                      <a:round/>
-                      <a:headEnd type="none" w="med" len="med"/>
-                      <a:tailEnd type="none" w="med" len="med"/>
-                    </a:lnL>
-                    <a:lnR w="6350" cap="flat" cmpd="sng" algn="ctr">
-                      <a:solidFill>
-                        <a:srgbClr val="C9D6DD"/>
-                      </a:solidFill>
-                      <a:prstDash val="solid"/>
-                      <a:round/>
-                      <a:headEnd type="none" w="med" len="med"/>
-                      <a:tailEnd type="none" w="med" len="med"/>
-                    </a:lnR>
-                    <a:lnT w="6350" cap="flat" cmpd="sng" algn="ctr">
-                      <a:solidFill>
-                        <a:srgbClr val="C9D6DD"/>
-                      </a:solidFill>
-                      <a:prstDash val="solid"/>
-                      <a:round/>
-                      <a:headEnd type="none" w="med" len="med"/>
-                      <a:tailEnd type="none" w="med" len="med"/>
-                    </a:lnT>
-                    <a:lnB w="6350" cap="flat" cmpd="sng" algn="ctr">
-                      <a:solidFill>
-                        <a:srgbClr val="C9D6DD"/>
-                      </a:solidFill>
-                      <a:prstDash val="solid"/>
-                      <a:round/>
-                      <a:headEnd type="none" w="med" len="med"/>
-                      <a:tailEnd type="none" w="med" len="med"/>
-                    </a:lnB>
-                    <a:solidFill>
-                      <a:srgbClr val="FFFFFF"/>
-                    </a:solidFill>
-                  </a:tcPr>
-                </a:tc>
-                <a:tc>
-                  <a:txBody>
-                    <a:bodyPr/>
-                    <a:lstStyle/>
-                    <a:p>
-                      <a:pPr algn="r" indent="0" marL="0">
-                        <a:buNone/>
-                      </a:pPr>
-                      <a:r>
-                        <a:rPr lang="en-US" sz="1300" dirty="0">
-                          <a:solidFill>
-                            <a:srgbClr val="14232E"/>
-                          </a:solidFill>
-                        </a:rPr>
-                        <a:t>$220 000</a:t>
-                      </a:r>
-                      <a:endParaRPr lang="en-US" sz="1300" dirty="0"/>
-                    </a:p>
-                  </a:txBody>
-                  <a:tcPr marL="76200" marR="76200" marT="38100" marB="38100" anchor="ctr">
-                    <a:lnL w="6350" cap="flat" cmpd="sng" algn="ctr">
-                      <a:solidFill>
-                        <a:srgbClr val="C9D6DD"/>
-                      </a:solidFill>
-                      <a:prstDash val="solid"/>
-                      <a:round/>
-                      <a:headEnd type="none" w="med" len="med"/>
-                      <a:tailEnd type="none" w="med" len="med"/>
-                    </a:lnL>
-                    <a:lnR w="6350" cap="flat" cmpd="sng" algn="ctr">
-                      <a:solidFill>
-                        <a:srgbClr val="C9D6DD"/>
-                      </a:solidFill>
-                      <a:prstDash val="solid"/>
-                      <a:round/>
-                      <a:headEnd type="none" w="med" len="med"/>
-                      <a:tailEnd type="none" w="med" len="med"/>
-                    </a:lnR>
-                    <a:lnT w="6350" cap="flat" cmpd="sng" algn="ctr">
-                      <a:solidFill>
-                        <a:srgbClr val="C9D6DD"/>
-                      </a:solidFill>
-                      <a:prstDash val="solid"/>
-                      <a:round/>
-                      <a:headEnd type="none" w="med" len="med"/>
-                      <a:tailEnd type="none" w="med" len="med"/>
-                    </a:lnT>
-                    <a:lnB w="6350" cap="flat" cmpd="sng" algn="ctr">
-                      <a:solidFill>
-                        <a:srgbClr val="C9D6DD"/>
-                      </a:solidFill>
-                      <a:prstDash val="solid"/>
-                      <a:round/>
-                      <a:headEnd type="none" w="med" len="med"/>
-                      <a:tailEnd type="none" w="med" len="med"/>
-                    </a:lnB>
-                    <a:solidFill>
-                      <a:srgbClr val="FFFFFF"/>
-                    </a:solidFill>
-                  </a:tcPr>
-                </a:tc>
-                <a:tc>
-                  <a:txBody>
-                    <a:bodyPr/>
-                    <a:lstStyle/>
-                    <a:p>
-                      <a:pPr algn="l" indent="0" marL="0">
-                        <a:buNone/>
-                      </a:pPr>
-                      <a:r>
-                        <a:rPr lang="en-US" sz="1300" dirty="0">
-                          <a:solidFill>
-                            <a:srgbClr val="14232E"/>
-                          </a:solidFill>
-                        </a:rPr>
-                        <a:t>Bailun, T&amp;J, Bioengineering AG</a:t>
-                      </a:r>
-                      <a:endParaRPr lang="en-US" sz="1300" dirty="0"/>
-                    </a:p>
-                  </a:txBody>
-                  <a:tcPr marL="76200" marR="76200" marT="38100" marB="38100" anchor="ctr">
-                    <a:lnL w="6350" cap="flat" cmpd="sng" algn="ctr">
-                      <a:solidFill>
-                        <a:srgbClr val="C9D6DD"/>
-                      </a:solidFill>
-                      <a:prstDash val="solid"/>
-                      <a:round/>
-                      <a:headEnd type="none" w="med" len="med"/>
-                      <a:tailEnd type="none" w="med" len="med"/>
-                    </a:lnL>
-                    <a:lnR w="6350" cap="flat" cmpd="sng" algn="ctr">
-                      <a:solidFill>
-                        <a:srgbClr val="C9D6DD"/>
-                      </a:solidFill>
-                      <a:prstDash val="solid"/>
-                      <a:round/>
-                      <a:headEnd type="none" w="med" len="med"/>
-                      <a:tailEnd type="none" w="med" len="med"/>
-                    </a:lnR>
-                    <a:lnT w="6350" cap="flat" cmpd="sng" algn="ctr">
-                      <a:solidFill>
-                        <a:srgbClr val="C9D6DD"/>
-                      </a:solidFill>
-                      <a:prstDash val="solid"/>
-                      <a:round/>
-                      <a:headEnd type="none" w="med" len="med"/>
-                      <a:tailEnd type="none" w="med" len="med"/>
-                    </a:lnT>
-                    <a:lnB w="6350" cap="flat" cmpd="sng" algn="ctr">
-                      <a:solidFill>
-                        <a:srgbClr val="C9D6DD"/>
-                      </a:solidFill>
-                      <a:prstDash val="solid"/>
-                      <a:round/>
-                      <a:headEnd type="none" w="med" len="med"/>
-                      <a:tailEnd type="none" w="med" len="med"/>
-                    </a:lnB>
-                    <a:solidFill>
-                      <a:srgbClr val="FFFFFF"/>
-                    </a:solidFill>
-                  </a:tcPr>
-                </a:tc>
-              </a:tr>
-              <a:tr h="457200">
-                <a:tc>
-                  <a:txBody>
-                    <a:bodyPr/>
-                    <a:lstStyle/>
-                    <a:p>
-                      <a:pPr algn="l" indent="0" marL="0">
-                        <a:buNone/>
-                      </a:pPr>
-                      <a:r>
-                        <a:rPr lang="en-US" sz="1300" dirty="0">
-                          <a:solidFill>
-                            <a:srgbClr val="14232E"/>
-                          </a:solidFill>
-                        </a:rPr>
-                        <a:t>Ajratish: 2 separator, reaktorlar, purkab quritgich</a:t>
-                      </a:r>
-                      <a:endParaRPr lang="en-US" sz="1300" dirty="0"/>
-                    </a:p>
-                  </a:txBody>
-                  <a:tcPr marL="76200" marR="76200" marT="38100" marB="38100" anchor="ctr">
-                    <a:lnL w="6350" cap="flat" cmpd="sng" algn="ctr">
-                      <a:solidFill>
-                        <a:srgbClr val="C9D6DD"/>
-                      </a:solidFill>
-                      <a:prstDash val="solid"/>
-                      <a:round/>
-                      <a:headEnd type="none" w="med" len="med"/>
-                      <a:tailEnd type="none" w="med" len="med"/>
-                    </a:lnL>
-                    <a:lnR w="6350" cap="flat" cmpd="sng" algn="ctr">
-                      <a:solidFill>
-                        <a:srgbClr val="C9D6DD"/>
-                      </a:solidFill>
-                      <a:prstDash val="solid"/>
-                      <a:round/>
-                      <a:headEnd type="none" w="med" len="med"/>
-                      <a:tailEnd type="none" w="med" len="med"/>
-                    </a:lnR>
-                    <a:lnT w="6350" cap="flat" cmpd="sng" algn="ctr">
-                      <a:solidFill>
-                        <a:srgbClr val="C9D6DD"/>
-                      </a:solidFill>
-                      <a:prstDash val="solid"/>
-                      <a:round/>
-                      <a:headEnd type="none" w="med" len="med"/>
-                      <a:tailEnd type="none" w="med" len="med"/>
-                    </a:lnT>
-                    <a:lnB w="6350" cap="flat" cmpd="sng" algn="ctr">
-                      <a:solidFill>
-                        <a:srgbClr val="C9D6DD"/>
-                      </a:solidFill>
-                      <a:prstDash val="solid"/>
-                      <a:round/>
-                      <a:headEnd type="none" w="med" len="med"/>
-                      <a:tailEnd type="none" w="med" len="med"/>
-                    </a:lnB>
-                    <a:solidFill>
-                      <a:srgbClr val="EAF3F1"/>
-                    </a:solidFill>
-                  </a:tcPr>
-                </a:tc>
-                <a:tc>
-                  <a:txBody>
-                    <a:bodyPr/>
-                    <a:lstStyle/>
-                    <a:p>
-                      <a:pPr algn="l" indent="0" marL="0">
-                        <a:buNone/>
-                      </a:pPr>
-                      <a:r>
-                        <a:rPr lang="en-US" sz="1300" dirty="0">
-                          <a:solidFill>
-                            <a:srgbClr val="14232E"/>
-                          </a:solidFill>
-                        </a:rPr>
-                        <a:t>2</a:t>
-                      </a:r>
-                      <a:endParaRPr lang="en-US" sz="1300" dirty="0"/>
-                    </a:p>
-                  </a:txBody>
-                  <a:tcPr marL="76200" marR="76200" marT="38100" marB="38100" anchor="ctr">
-                    <a:lnL w="6350" cap="flat" cmpd="sng" algn="ctr">
-                      <a:solidFill>
-                        <a:srgbClr val="C9D6DD"/>
-                      </a:solidFill>
-                      <a:prstDash val="solid"/>
-                      <a:round/>
-                      <a:headEnd type="none" w="med" len="med"/>
-                      <a:tailEnd type="none" w="med" len="med"/>
-                    </a:lnL>
-                    <a:lnR w="6350" cap="flat" cmpd="sng" algn="ctr">
-                      <a:solidFill>
-                        <a:srgbClr val="C9D6DD"/>
-                      </a:solidFill>
-                      <a:prstDash val="solid"/>
-                      <a:round/>
-                      <a:headEnd type="none" w="med" len="med"/>
-                      <a:tailEnd type="none" w="med" len="med"/>
-                    </a:lnR>
-                    <a:lnT w="6350" cap="flat" cmpd="sng" algn="ctr">
-                      <a:solidFill>
-                        <a:srgbClr val="C9D6DD"/>
-                      </a:solidFill>
-                      <a:prstDash val="solid"/>
-                      <a:round/>
-                      <a:headEnd type="none" w="med" len="med"/>
-                      <a:tailEnd type="none" w="med" len="med"/>
-                    </a:lnT>
-                    <a:lnB w="6350" cap="flat" cmpd="sng" algn="ctr">
-                      <a:solidFill>
-                        <a:srgbClr val="C9D6DD"/>
-                      </a:solidFill>
-                      <a:prstDash val="solid"/>
-                      <a:round/>
-                      <a:headEnd type="none" w="med" len="med"/>
-                      <a:tailEnd type="none" w="med" len="med"/>
-                    </a:lnB>
-                    <a:solidFill>
-                      <a:srgbClr val="EAF3F1"/>
-                    </a:solidFill>
-                  </a:tcPr>
-                </a:tc>
-                <a:tc>
-                  <a:txBody>
-                    <a:bodyPr/>
-                    <a:lstStyle/>
-                    <a:p>
-                      <a:pPr algn="r" indent="0" marL="0">
-                        <a:buNone/>
-                      </a:pPr>
-                      <a:r>
-                        <a:rPr lang="en-US" sz="1300" dirty="0">
-                          <a:solidFill>
-                            <a:srgbClr val="14232E"/>
-                          </a:solidFill>
-                        </a:rPr>
-                        <a:t>$200 000</a:t>
-                      </a:r>
-                      <a:endParaRPr lang="en-US" sz="1300" dirty="0"/>
-                    </a:p>
-                  </a:txBody>
-                  <a:tcPr marL="76200" marR="76200" marT="38100" marB="38100" anchor="ctr">
-                    <a:lnL w="6350" cap="flat" cmpd="sng" algn="ctr">
-                      <a:solidFill>
-                        <a:srgbClr val="C9D6DD"/>
-                      </a:solidFill>
-                      <a:prstDash val="solid"/>
-                      <a:round/>
-                      <a:headEnd type="none" w="med" len="med"/>
-                      <a:tailEnd type="none" w="med" len="med"/>
-                    </a:lnL>
-                    <a:lnR w="6350" cap="flat" cmpd="sng" algn="ctr">
-                      <a:solidFill>
-                        <a:srgbClr val="C9D6DD"/>
-                      </a:solidFill>
-                      <a:prstDash val="solid"/>
-                      <a:round/>
-                      <a:headEnd type="none" w="med" len="med"/>
-                      <a:tailEnd type="none" w="med" len="med"/>
-                    </a:lnR>
-                    <a:lnT w="6350" cap="flat" cmpd="sng" algn="ctr">
-                      <a:solidFill>
-                        <a:srgbClr val="C9D6DD"/>
-                      </a:solidFill>
-                      <a:prstDash val="solid"/>
-                      <a:round/>
-                      <a:headEnd type="none" w="med" len="med"/>
-                      <a:tailEnd type="none" w="med" len="med"/>
-                    </a:lnT>
-                    <a:lnB w="6350" cap="flat" cmpd="sng" algn="ctr">
-                      <a:solidFill>
-                        <a:srgbClr val="C9D6DD"/>
-                      </a:solidFill>
-                      <a:prstDash val="solid"/>
-                      <a:round/>
-                      <a:headEnd type="none" w="med" len="med"/>
-                      <a:tailEnd type="none" w="med" len="med"/>
-                    </a:lnB>
-                    <a:solidFill>
-                      <a:srgbClr val="EAF3F1"/>
-                    </a:solidFill>
-                  </a:tcPr>
-                </a:tc>
-                <a:tc>
-                  <a:txBody>
-                    <a:bodyPr/>
-                    <a:lstStyle/>
-                    <a:p>
-                      <a:pPr algn="l" indent="0" marL="0">
-                        <a:buNone/>
-                      </a:pPr>
-                      <a:r>
-                        <a:rPr lang="en-US" sz="1300" dirty="0">
-                          <a:solidFill>
-                            <a:srgbClr val="14232E"/>
-                          </a:solidFill>
-                        </a:rPr>
-                        <a:t>Alfa Laval, GEA, Changzhou Lemar</a:t>
-                      </a:r>
-                      <a:endParaRPr lang="en-US" sz="1300" dirty="0"/>
-                    </a:p>
-                  </a:txBody>
-                  <a:tcPr marL="76200" marR="76200" marT="38100" marB="38100" anchor="ctr">
-                    <a:lnL w="6350" cap="flat" cmpd="sng" algn="ctr">
-                      <a:solidFill>
-                        <a:srgbClr val="C9D6DD"/>
-                      </a:solidFill>
-                      <a:prstDash val="solid"/>
-                      <a:round/>
-                      <a:headEnd type="none" w="med" len="med"/>
-                      <a:tailEnd type="none" w="med" len="med"/>
-                    </a:lnL>
-                    <a:lnR w="6350" cap="flat" cmpd="sng" algn="ctr">
-                      <a:solidFill>
-                        <a:srgbClr val="C9D6DD"/>
-                      </a:solidFill>
-                      <a:prstDash val="solid"/>
-                      <a:round/>
-                      <a:headEnd type="none" w="med" len="med"/>
-                      <a:tailEnd type="none" w="med" len="med"/>
-                    </a:lnR>
-                    <a:lnT w="6350" cap="flat" cmpd="sng" algn="ctr">
-                      <a:solidFill>
-                        <a:srgbClr val="C9D6DD"/>
-                      </a:solidFill>
-                      <a:prstDash val="solid"/>
-                      <a:round/>
-                      <a:headEnd type="none" w="med" len="med"/>
-                      <a:tailEnd type="none" w="med" len="med"/>
-                    </a:lnT>
-                    <a:lnB w="6350" cap="flat" cmpd="sng" algn="ctr">
-                      <a:solidFill>
-                        <a:srgbClr val="C9D6DD"/>
-                      </a:solidFill>
-                      <a:prstDash val="solid"/>
-                      <a:round/>
-                      <a:headEnd type="none" w="med" len="med"/>
-                      <a:tailEnd type="none" w="med" len="med"/>
-                    </a:lnB>
-                    <a:solidFill>
-                      <a:srgbClr val="EAF3F1"/>
-                    </a:solidFill>
-                  </a:tcPr>
-                </a:tc>
-              </a:tr>
-              <a:tr h="457200">
-                <a:tc>
-                  <a:txBody>
-                    <a:bodyPr/>
-                    <a:lstStyle/>
-                    <a:p>
-                      <a:pPr algn="l" indent="0" marL="0">
-                        <a:buNone/>
-                      </a:pPr>
-                      <a:r>
-                        <a:rPr lang="en-US" sz="1300" dirty="0">
-                          <a:solidFill>
-                            <a:srgbClr val="14232E"/>
-                          </a:solidFill>
-                        </a:rPr>
-                        <a:t>Utilitalar: bug‘ qozoni, havo, sovutish, suv, oqova</a:t>
-                      </a:r>
-                      <a:endParaRPr lang="en-US" sz="1300" dirty="0"/>
-                    </a:p>
-                  </a:txBody>
-                  <a:tcPr marL="76200" marR="76200" marT="38100" marB="38100" anchor="ctr">
-                    <a:lnL w="6350" cap="flat" cmpd="sng" algn="ctr">
-                      <a:solidFill>
-                        <a:srgbClr val="C9D6DD"/>
-                      </a:solidFill>
-                      <a:prstDash val="solid"/>
-                      <a:round/>
-                      <a:headEnd type="none" w="med" len="med"/>
-                      <a:tailEnd type="none" w="med" len="med"/>
-                    </a:lnL>
-                    <a:lnR w="6350" cap="flat" cmpd="sng" algn="ctr">
-                      <a:solidFill>
-                        <a:srgbClr val="C9D6DD"/>
-                      </a:solidFill>
-                      <a:prstDash val="solid"/>
-                      <a:round/>
-                      <a:headEnd type="none" w="med" len="med"/>
-                      <a:tailEnd type="none" w="med" len="med"/>
-                    </a:lnR>
-                    <a:lnT w="6350" cap="flat" cmpd="sng" algn="ctr">
-                      <a:solidFill>
-                        <a:srgbClr val="C9D6DD"/>
-                      </a:solidFill>
-                      <a:prstDash val="solid"/>
-                      <a:round/>
-                      <a:headEnd type="none" w="med" len="med"/>
-                      <a:tailEnd type="none" w="med" len="med"/>
-                    </a:lnT>
-                    <a:lnB w="6350" cap="flat" cmpd="sng" algn="ctr">
-                      <a:solidFill>
-                        <a:srgbClr val="C9D6DD"/>
-                      </a:solidFill>
-                      <a:prstDash val="solid"/>
-                      <a:round/>
-                      <a:headEnd type="none" w="med" len="med"/>
-                      <a:tailEnd type="none" w="med" len="med"/>
-                    </a:lnB>
-                    <a:solidFill>
-                      <a:srgbClr val="FFFFFF"/>
-                    </a:solidFill>
-                  </a:tcPr>
-                </a:tc>
-                <a:tc>
-                  <a:txBody>
-                    <a:bodyPr/>
-                    <a:lstStyle/>
-                    <a:p>
-                      <a:pPr algn="l" indent="0" marL="0">
-                        <a:buNone/>
-                      </a:pPr>
-                      <a:r>
-                        <a:rPr lang="en-US" sz="1300" dirty="0">
-                          <a:solidFill>
-                            <a:srgbClr val="14232E"/>
-                          </a:solidFill>
-                        </a:rPr>
-                        <a:t>2</a:t>
-                      </a:r>
-                      <a:endParaRPr lang="en-US" sz="1300" dirty="0"/>
-                    </a:p>
-                  </a:txBody>
-                  <a:tcPr marL="76200" marR="76200" marT="38100" marB="38100" anchor="ctr">
-                    <a:lnL w="6350" cap="flat" cmpd="sng" algn="ctr">
-                      <a:solidFill>
-                        <a:srgbClr val="C9D6DD"/>
-                      </a:solidFill>
-                      <a:prstDash val="solid"/>
-                      <a:round/>
-                      <a:headEnd type="none" w="med" len="med"/>
-                      <a:tailEnd type="none" w="med" len="med"/>
-                    </a:lnL>
-                    <a:lnR w="6350" cap="flat" cmpd="sng" algn="ctr">
-                      <a:solidFill>
-                        <a:srgbClr val="C9D6DD"/>
-                      </a:solidFill>
-                      <a:prstDash val="solid"/>
-                      <a:round/>
-                      <a:headEnd type="none" w="med" len="med"/>
-                      <a:tailEnd type="none" w="med" len="med"/>
-                    </a:lnR>
-                    <a:lnT w="6350" cap="flat" cmpd="sng" algn="ctr">
-                      <a:solidFill>
-                        <a:srgbClr val="C9D6DD"/>
-                      </a:solidFill>
-                      <a:prstDash val="solid"/>
-                      <a:round/>
-                      <a:headEnd type="none" w="med" len="med"/>
-                      <a:tailEnd type="none" w="med" len="med"/>
-                    </a:lnT>
-                    <a:lnB w="6350" cap="flat" cmpd="sng" algn="ctr">
-                      <a:solidFill>
-                        <a:srgbClr val="C9D6DD"/>
-                      </a:solidFill>
-                      <a:prstDash val="solid"/>
-                      <a:round/>
-                      <a:headEnd type="none" w="med" len="med"/>
-                      <a:tailEnd type="none" w="med" len="med"/>
-                    </a:lnB>
-                    <a:solidFill>
-                      <a:srgbClr val="FFFFFF"/>
-                    </a:solidFill>
-                  </a:tcPr>
-                </a:tc>
-                <a:tc>
-                  <a:txBody>
-                    <a:bodyPr/>
-                    <a:lstStyle/>
-                    <a:p>
-                      <a:pPr algn="r" indent="0" marL="0">
-                        <a:buNone/>
-                      </a:pPr>
-                      <a:r>
-                        <a:rPr lang="en-US" sz="1300" dirty="0">
-                          <a:solidFill>
-                            <a:srgbClr val="14232E"/>
-                          </a:solidFill>
-                        </a:rPr>
-                        <a:t>$230 000</a:t>
-                      </a:r>
-                      <a:endParaRPr lang="en-US" sz="1300" dirty="0"/>
-                    </a:p>
-                  </a:txBody>
-                  <a:tcPr marL="76200" marR="76200" marT="38100" marB="38100" anchor="ctr">
-                    <a:lnL w="6350" cap="flat" cmpd="sng" algn="ctr">
-                      <a:solidFill>
-                        <a:srgbClr val="C9D6DD"/>
-                      </a:solidFill>
-                      <a:prstDash val="solid"/>
-                      <a:round/>
-                      <a:headEnd type="none" w="med" len="med"/>
-                      <a:tailEnd type="none" w="med" len="med"/>
-                    </a:lnL>
-                    <a:lnR w="6350" cap="flat" cmpd="sng" algn="ctr">
-                      <a:solidFill>
-                        <a:srgbClr val="C9D6DD"/>
-                      </a:solidFill>
-                      <a:prstDash val="solid"/>
-                      <a:round/>
-                      <a:headEnd type="none" w="med" len="med"/>
-                      <a:tailEnd type="none" w="med" len="med"/>
-                    </a:lnR>
-                    <a:lnT w="6350" cap="flat" cmpd="sng" algn="ctr">
-                      <a:solidFill>
-                        <a:srgbClr val="C9D6DD"/>
-                      </a:solidFill>
-                      <a:prstDash val="solid"/>
-                      <a:round/>
-                      <a:headEnd type="none" w="med" len="med"/>
-                      <a:tailEnd type="none" w="med" len="med"/>
-                    </a:lnT>
-                    <a:lnB w="6350" cap="flat" cmpd="sng" algn="ctr">
-                      <a:solidFill>
-                        <a:srgbClr val="C9D6DD"/>
-                      </a:solidFill>
-                      <a:prstDash val="solid"/>
-                      <a:round/>
-                      <a:headEnd type="none" w="med" len="med"/>
-                      <a:tailEnd type="none" w="med" len="med"/>
-                    </a:lnB>
-                    <a:solidFill>
-                      <a:srgbClr val="FFFFFF"/>
-                    </a:solidFill>
-                  </a:tcPr>
-                </a:tc>
-                <a:tc>
-                  <a:txBody>
-                    <a:bodyPr/>
-                    <a:lstStyle/>
-                    <a:p>
-                      <a:pPr algn="l" indent="0" marL="0">
-                        <a:buNone/>
-                      </a:pPr>
-                      <a:r>
-                        <a:rPr lang="en-US" sz="1300" dirty="0">
-                          <a:solidFill>
-                            <a:srgbClr val="14232E"/>
-                          </a:solidFill>
-                        </a:rPr>
-                        <a:t>Atlas Copco, Bosch, Siemens</a:t>
-                      </a:r>
-                      <a:endParaRPr lang="en-US" sz="1300" dirty="0"/>
-                    </a:p>
-                  </a:txBody>
-                  <a:tcPr marL="76200" marR="76200" marT="38100" marB="38100" anchor="ctr">
-                    <a:lnL w="6350" cap="flat" cmpd="sng" algn="ctr">
-                      <a:solidFill>
-                        <a:srgbClr val="C9D6DD"/>
-                      </a:solidFill>
-                      <a:prstDash val="solid"/>
-                      <a:round/>
-                      <a:headEnd type="none" w="med" len="med"/>
-                      <a:tailEnd type="none" w="med" len="med"/>
-                    </a:lnL>
-                    <a:lnR w="6350" cap="flat" cmpd="sng" algn="ctr">
-                      <a:solidFill>
-                        <a:srgbClr val="C9D6DD"/>
-                      </a:solidFill>
-                      <a:prstDash val="solid"/>
-                      <a:round/>
-                      <a:headEnd type="none" w="med" len="med"/>
-                      <a:tailEnd type="none" w="med" len="med"/>
-                    </a:lnR>
-                    <a:lnT w="6350" cap="flat" cmpd="sng" algn="ctr">
-                      <a:solidFill>
-                        <a:srgbClr val="C9D6DD"/>
-                      </a:solidFill>
-                      <a:prstDash val="solid"/>
-                      <a:round/>
-                      <a:headEnd type="none" w="med" len="med"/>
-                      <a:tailEnd type="none" w="med" len="med"/>
-                    </a:lnT>
-                    <a:lnB w="6350" cap="flat" cmpd="sng" algn="ctr">
-                      <a:solidFill>
-                        <a:srgbClr val="C9D6DD"/>
-                      </a:solidFill>
-                      <a:prstDash val="solid"/>
-                      <a:round/>
-                      <a:headEnd type="none" w="med" len="med"/>
-                      <a:tailEnd type="none" w="med" len="med"/>
-                    </a:lnB>
-                    <a:solidFill>
-                      <a:srgbClr val="FFFFFF"/>
-                    </a:solidFill>
-                  </a:tcPr>
-                </a:tc>
-              </a:tr>
-              <a:tr h="457200">
-                <a:tc>
-                  <a:txBody>
-                    <a:bodyPr/>
-                    <a:lstStyle/>
-                    <a:p>
-                      <a:pPr algn="l" indent="0" marL="0">
-                        <a:buNone/>
-                      </a:pPr>
-                      <a:r>
-                        <a:rPr lang="en-US" sz="1300" b="1" dirty="0">
-                          <a:solidFill>
-                            <a:srgbClr val="14232E"/>
-                          </a:solidFill>
-                        </a:rPr>
-                        <a:t>Jami CAPEX (montaj, logistika, zaxira bilan)</a:t>
-                      </a:r>
-                      <a:endParaRPr lang="en-US" sz="1300" dirty="0"/>
-                    </a:p>
-                  </a:txBody>
-                  <a:tcPr marL="76200" marR="76200" marT="38100" marB="38100" anchor="ctr">
-                    <a:lnL w="6350" cap="flat" cmpd="sng" algn="ctr">
-                      <a:solidFill>
-                        <a:srgbClr val="C9D6DD"/>
-                      </a:solidFill>
-                      <a:prstDash val="solid"/>
-                      <a:round/>
-                      <a:headEnd type="none" w="med" len="med"/>
-                      <a:tailEnd type="none" w="med" len="med"/>
-                    </a:lnL>
-                    <a:lnR w="6350" cap="flat" cmpd="sng" algn="ctr">
-                      <a:solidFill>
-                        <a:srgbClr val="C9D6DD"/>
-                      </a:solidFill>
-                      <a:prstDash val="solid"/>
-                      <a:round/>
-                      <a:headEnd type="none" w="med" len="med"/>
-                      <a:tailEnd type="none" w="med" len="med"/>
-                    </a:lnR>
-                    <a:lnT w="6350" cap="flat" cmpd="sng" algn="ctr">
-                      <a:solidFill>
-                        <a:srgbClr val="C9D6DD"/>
-                      </a:solidFill>
-                      <a:prstDash val="solid"/>
-                      <a:round/>
-                      <a:headEnd type="none" w="med" len="med"/>
-                      <a:tailEnd type="none" w="med" len="med"/>
-                    </a:lnT>
-                    <a:lnB w="6350" cap="flat" cmpd="sng" algn="ctr">
-                      <a:solidFill>
-                        <a:srgbClr val="C9D6DD"/>
-                      </a:solidFill>
-                      <a:prstDash val="solid"/>
-                      <a:round/>
-                      <a:headEnd type="none" w="med" len="med"/>
-                      <a:tailEnd type="none" w="med" len="med"/>
-                    </a:lnB>
-                    <a:solidFill>
-                      <a:srgbClr val="EAF3F1"/>
-                    </a:solidFill>
-                  </a:tcPr>
-                </a:tc>
-                <a:tc>
-                  <a:txBody>
-                    <a:bodyPr/>
-                    <a:lstStyle/>
-                    <a:p>
-                      <a:pPr algn="l" indent="0" marL="0">
-                        <a:buNone/>
-                      </a:pPr>
-                      <a:endParaRPr lang="en-US" sz="1300" dirty="0"/>
-                    </a:p>
-                  </a:txBody>
-                  <a:tcPr marL="76200" marR="76200" marT="38100" marB="38100" anchor="ctr">
-                    <a:lnL w="6350" cap="flat" cmpd="sng" algn="ctr">
-                      <a:solidFill>
-                        <a:srgbClr val="C9D6DD"/>
-                      </a:solidFill>
-                      <a:prstDash val="solid"/>
-                      <a:round/>
-                      <a:headEnd type="none" w="med" len="med"/>
-                      <a:tailEnd type="none" w="med" len="med"/>
-                    </a:lnL>
-                    <a:lnR w="6350" cap="flat" cmpd="sng" algn="ctr">
-                      <a:solidFill>
-                        <a:srgbClr val="C9D6DD"/>
-                      </a:solidFill>
-                      <a:prstDash val="solid"/>
-                      <a:round/>
-                      <a:headEnd type="none" w="med" len="med"/>
-                      <a:tailEnd type="none" w="med" len="med"/>
-                    </a:lnR>
-                    <a:lnT w="6350" cap="flat" cmpd="sng" algn="ctr">
-                      <a:solidFill>
-                        <a:srgbClr val="C9D6DD"/>
-                      </a:solidFill>
-                      <a:prstDash val="solid"/>
-                      <a:round/>
-                      <a:headEnd type="none" w="med" len="med"/>
-                      <a:tailEnd type="none" w="med" len="med"/>
-                    </a:lnT>
-                    <a:lnB w="6350" cap="flat" cmpd="sng" algn="ctr">
-                      <a:solidFill>
-                        <a:srgbClr val="C9D6DD"/>
-                      </a:solidFill>
-                      <a:prstDash val="solid"/>
-                      <a:round/>
-                      <a:headEnd type="none" w="med" len="med"/>
-                      <a:tailEnd type="none" w="med" len="med"/>
-                    </a:lnB>
-                    <a:solidFill>
-                      <a:srgbClr val="EAF3F1"/>
-                    </a:solidFill>
-                  </a:tcPr>
-                </a:tc>
-                <a:tc>
-                  <a:txBody>
-                    <a:bodyPr/>
-                    <a:lstStyle/>
-                    <a:p>
-                      <a:pPr algn="r" indent="0" marL="0">
-                        <a:buNone/>
-                      </a:pPr>
-                      <a:r>
-                        <a:rPr lang="en-US" sz="1300" b="1" dirty="0">
-                          <a:solidFill>
-                            <a:srgbClr val="14232E"/>
-                          </a:solidFill>
-                        </a:rPr>
-                        <a:t>$1 703 972</a:t>
-                      </a:r>
-                      <a:endParaRPr lang="en-US" sz="1300" dirty="0"/>
-                    </a:p>
-                  </a:txBody>
-                  <a:tcPr marL="76200" marR="76200" marT="38100" marB="38100" anchor="ctr">
-                    <a:lnL w="6350" cap="flat" cmpd="sng" algn="ctr">
-                      <a:solidFill>
-                        <a:srgbClr val="C9D6DD"/>
-                      </a:solidFill>
-                      <a:prstDash val="solid"/>
-                      <a:round/>
-                      <a:headEnd type="none" w="med" len="med"/>
-                      <a:tailEnd type="none" w="med" len="med"/>
-                    </a:lnL>
-                    <a:lnR w="6350" cap="flat" cmpd="sng" algn="ctr">
-                      <a:solidFill>
-                        <a:srgbClr val="C9D6DD"/>
-                      </a:solidFill>
-                      <a:prstDash val="solid"/>
-                      <a:round/>
-                      <a:headEnd type="none" w="med" len="med"/>
-                      <a:tailEnd type="none" w="med" len="med"/>
-                    </a:lnR>
-                    <a:lnT w="6350" cap="flat" cmpd="sng" algn="ctr">
-                      <a:solidFill>
-                        <a:srgbClr val="C9D6DD"/>
-                      </a:solidFill>
-                      <a:prstDash val="solid"/>
-                      <a:round/>
-                      <a:headEnd type="none" w="med" len="med"/>
-                      <a:tailEnd type="none" w="med" len="med"/>
-                    </a:lnT>
-                    <a:lnB w="6350" cap="flat" cmpd="sng" algn="ctr">
-                      <a:solidFill>
-                        <a:srgbClr val="C9D6DD"/>
-                      </a:solidFill>
-                      <a:prstDash val="solid"/>
-                      <a:round/>
-                      <a:headEnd type="none" w="med" len="med"/>
-                      <a:tailEnd type="none" w="med" len="med"/>
-                    </a:lnB>
-                    <a:solidFill>
-                      <a:srgbClr val="EAF3F1"/>
-                    </a:solidFill>
-                  </a:tcPr>
-                </a:tc>
-                <a:tc>
-                  <a:txBody>
-                    <a:bodyPr/>
-                    <a:lstStyle/>
-                    <a:p>
-                      <a:pPr algn="l" indent="0" marL="0">
-                        <a:buNone/>
-                      </a:pPr>
-                      <a:endParaRPr lang="en-US" sz="1300" dirty="0"/>
-                    </a:p>
-                  </a:txBody>
-                  <a:tcPr marL="76200" marR="76200" marT="38100" marB="38100" anchor="ctr">
-                    <a:lnL w="6350" cap="flat" cmpd="sng" algn="ctr">
-                      <a:solidFill>
-                        <a:srgbClr val="C9D6DD"/>
-                      </a:solidFill>
-                      <a:prstDash val="solid"/>
-                      <a:round/>
-                      <a:headEnd type="none" w="med" len="med"/>
-                      <a:tailEnd type="none" w="med" len="med"/>
-                    </a:lnL>
-                    <a:lnR w="6350" cap="flat" cmpd="sng" algn="ctr">
-                      <a:solidFill>
-                        <a:srgbClr val="C9D6DD"/>
-                      </a:solidFill>
-                      <a:prstDash val="solid"/>
-                      <a:round/>
-                      <a:headEnd type="none" w="med" len="med"/>
-                      <a:tailEnd type="none" w="med" len="med"/>
-                    </a:lnR>
-                    <a:lnT w="6350" cap="flat" cmpd="sng" algn="ctr">
-                      <a:solidFill>
-                        <a:srgbClr val="C9D6DD"/>
-                      </a:solidFill>
-                      <a:prstDash val="solid"/>
-                      <a:round/>
-                      <a:headEnd type="none" w="med" len="med"/>
-                      <a:tailEnd type="none" w="med" len="med"/>
-                    </a:lnT>
-                    <a:lnB w="6350" cap="flat" cmpd="sng" algn="ctr">
-                      <a:solidFill>
-                        <a:srgbClr val="C9D6DD"/>
-                      </a:solidFill>
-                      <a:prstDash val="solid"/>
-                      <a:round/>
-                      <a:headEnd type="none" w="med" len="med"/>
-                      <a:tailEnd type="none" w="med" len="med"/>
-                    </a:lnB>
-                    <a:solidFill>
-                      <a:srgbClr val="EAF3F1"/>
-                    </a:solidFill>
-                  </a:tcPr>
-                </a:tc>
-              </a:tr>
-            </a:tbl>
-          </a:graphicData>
-        </a:graphic>
-      </p:graphicFrame>
+      <p:pic>
+        <p:nvPicPr>
+          <p:cNvPr id="3" name="site plan" descr="BioPlast Tech bosh rejasi: ishlab chiqarish binosi, ombor, ma’muriy bino, yog‘ parki, KPP, tarozi, yong‘in suvi, 3-faza zaxira maydoni">    </p:cNvPr>
+          <p:cNvPicPr>
+            <a:picLocks noChangeAspect="1"/>
+          </p:cNvPicPr>
+          <p:nvPr/>
+        </p:nvPicPr>
+        <p:blipFill>
+          <a:blip r:embed="rId1"/>
+          <a:stretch>
+            <a:fillRect/>
+          </a:stretch>
+        </p:blipFill>
+        <p:spPr>
+          <a:xfrm>
+            <a:off x="548640" y="1325880"/>
+            <a:ext cx="6949440" cy="4343400"/>
+          </a:xfrm>
+          <a:prstGeom prst="rect">
+            <a:avLst/>
+          </a:prstGeom>
+        </p:spPr>
+      </p:pic>
       <p:sp>
         <p:nvSpPr>
           <p:cNvPr id="4" name="Text 1"/>
@@ -17695,8 +17957,8 @@
         </p:nvSpPr>
         <p:spPr>
           <a:xfrm>
-            <a:off x="548640" y="5806440"/>
-            <a:ext cx="11064240" cy="365760"/>
+            <a:off x="548640" y="5760720"/>
+            <a:ext cx="6949440" cy="320040"/>
           </a:xfrm>
           <a:prstGeom prst="rect">
             <a:avLst/>
@@ -17717,9 +17979,253 @@
                   <a:schemeClr val="accent6"/>
                 </a:solidFill>
               </a:rPr>
-              <a:t>Narxlar — ochiq bozor e’lonlari asosidagi taxmin. Har bir pozitsiya bo‘yicha kamida 3 ta tijorat taklifi (KP) olinadi.</a:t>
+              <a:t>Bosh reja (shimol — yuqorida). 3D modeldan olingan.</a:t>
             </a:r>
             <a:endParaRPr lang="en-US" sz="1100" dirty="0"/>
+          </a:p>
+        </p:txBody>
+      </p:sp>
+      <p:sp>
+        <p:nvSpPr>
+          <p:cNvPr id="5" name="Text 2"/>
+          <p:cNvSpPr txBox="1"/>
+          <p:nvPr/>
+        </p:nvSpPr>
+        <p:spPr>
+          <a:xfrm>
+            <a:off x="7863840" y="1325880"/>
+            <a:ext cx="3749040" cy="777240"/>
+          </a:xfrm>
+          <a:prstGeom prst="rect">
+            <a:avLst/>
+          </a:prstGeom>
+          <a:noFill/>
+          <a:ln/>
+        </p:spPr>
+        <p:txBody>
+          <a:bodyPr wrap="square" lIns="0" tIns="0" rIns="0" bIns="0" rtlCol="0" anchor="b"/>
+          <a:lstStyle/>
+          <a:p>
+            <a:pPr indent="0" marL="0">
+              <a:buNone/>
+            </a:pPr>
+            <a:r>
+              <a:rPr lang="en-US" sz="3000" b="1" dirty="0">
+                <a:solidFill>
+                  <a:schemeClr val="tx2"/>
+                </a:solidFill>
+                <a:latin typeface="Cambria" pitchFamily="34" charset="0"/>
+                <a:ea typeface="Cambria" pitchFamily="34" charset="-122"/>
+                <a:cs typeface="Cambria" pitchFamily="34" charset="-120"/>
+              </a:rPr>
+              <a:t>Toshkent vil.</a:t>
+            </a:r>
+            <a:endParaRPr lang="en-US" sz="3000" dirty="0"/>
+          </a:p>
+        </p:txBody>
+      </p:sp>
+      <p:sp>
+        <p:nvSpPr>
+          <p:cNvPr id="6" name="Text 3"/>
+          <p:cNvSpPr txBox="1"/>
+          <p:nvPr/>
+        </p:nvSpPr>
+        <p:spPr>
+          <a:xfrm>
+            <a:off x="7863840" y="2130552"/>
+            <a:ext cx="3749040" cy="685800"/>
+          </a:xfrm>
+          <a:prstGeom prst="rect">
+            <a:avLst/>
+          </a:prstGeom>
+          <a:noFill/>
+          <a:ln/>
+        </p:spPr>
+        <p:txBody>
+          <a:bodyPr wrap="square" lIns="0" tIns="0" rIns="0" bIns="0" rtlCol="0" anchor="t"/>
+          <a:lstStyle/>
+          <a:p>
+            <a:pPr indent="0" marL="0">
+              <a:buNone/>
+            </a:pPr>
+            <a:r>
+              <a:rPr lang="en-US" sz="1400" dirty="0">
+                <a:solidFill>
+                  <a:schemeClr val="tx1"/>
+                </a:solidFill>
+              </a:rPr>
+              <a:t>Chirchiq kimyo-industrial texnoparki (30 yillik maxsus rejim)</a:t>
+            </a:r>
+            <a:endParaRPr lang="en-US" sz="1400" dirty="0"/>
+          </a:p>
+        </p:txBody>
+      </p:sp>
+      <p:sp>
+        <p:nvSpPr>
+          <p:cNvPr id="7" name="Text 4"/>
+          <p:cNvSpPr txBox="1"/>
+          <p:nvPr/>
+        </p:nvSpPr>
+        <p:spPr>
+          <a:xfrm>
+            <a:off x="7863840" y="2880360"/>
+            <a:ext cx="3749040" cy="777240"/>
+          </a:xfrm>
+          <a:prstGeom prst="rect">
+            <a:avLst/>
+          </a:prstGeom>
+          <a:noFill/>
+          <a:ln/>
+        </p:spPr>
+        <p:txBody>
+          <a:bodyPr wrap="square" lIns="0" tIns="0" rIns="0" bIns="0" rtlCol="0" anchor="b"/>
+          <a:lstStyle/>
+          <a:p>
+            <a:pPr indent="0" marL="0">
+              <a:buNone/>
+            </a:pPr>
+            <a:r>
+              <a:rPr lang="en-US" sz="3400" b="1" dirty="0">
+                <a:solidFill>
+                  <a:schemeClr val="accent1"/>
+                </a:solidFill>
+                <a:latin typeface="Cambria" pitchFamily="34" charset="0"/>
+                <a:ea typeface="Cambria" pitchFamily="34" charset="-122"/>
+                <a:cs typeface="Cambria" pitchFamily="34" charset="-120"/>
+              </a:rPr>
+              <a:t>1,8 ga</a:t>
+            </a:r>
+            <a:endParaRPr lang="en-US" sz="3400" dirty="0"/>
+          </a:p>
+        </p:txBody>
+      </p:sp>
+      <p:sp>
+        <p:nvSpPr>
+          <p:cNvPr id="8" name="Text 5"/>
+          <p:cNvSpPr txBox="1"/>
+          <p:nvPr/>
+        </p:nvSpPr>
+        <p:spPr>
+          <a:xfrm>
+            <a:off x="7863840" y="3685032"/>
+            <a:ext cx="3749040" cy="640080"/>
+          </a:xfrm>
+          <a:prstGeom prst="rect">
+            <a:avLst/>
+          </a:prstGeom>
+          <a:noFill/>
+          <a:ln/>
+        </p:spPr>
+        <p:txBody>
+          <a:bodyPr wrap="square" lIns="0" tIns="0" rIns="0" bIns="0" rtlCol="0" anchor="t"/>
+          <a:lstStyle/>
+          <a:p>
+            <a:pPr indent="0" marL="0">
+              <a:buNone/>
+            </a:pPr>
+            <a:r>
+              <a:rPr lang="en-US" sz="1400" dirty="0">
+                <a:solidFill>
+                  <a:schemeClr val="tx1"/>
+                </a:solidFill>
+              </a:rPr>
+              <a:t>150 × 120 m; minimal 1,2 ga (1–2-faza)</a:t>
+            </a:r>
+            <a:endParaRPr lang="en-US" sz="1400" dirty="0"/>
+          </a:p>
+        </p:txBody>
+      </p:sp>
+      <p:sp>
+        <p:nvSpPr>
+          <p:cNvPr id="9" name="Text 6"/>
+          <p:cNvSpPr txBox="1"/>
+          <p:nvPr/>
+        </p:nvSpPr>
+        <p:spPr>
+          <a:xfrm>
+            <a:off x="7863840" y="4251960"/>
+            <a:ext cx="3749040" cy="1828800"/>
+          </a:xfrm>
+          <a:prstGeom prst="rect">
+            <a:avLst/>
+          </a:prstGeom>
+          <a:noFill/>
+          <a:ln/>
+        </p:spPr>
+        <p:txBody>
+          <a:bodyPr wrap="square" lIns="0" tIns="0" rIns="0" bIns="0" rtlCol="0" anchor="t"/>
+          <a:lstStyle/>
+          <a:p>
+            <a:pPr marL="342900" indent="-342900">
+              <a:spcAft>
+                <a:spcPts val="400"/>
+              </a:spcAft>
+              <a:buSzPct val="100000"/>
+              <a:buChar char="•"/>
+            </a:pPr>
+            <a:r>
+              <a:rPr lang="en-US" sz="1400" dirty="0">
+                <a:solidFill>
+                  <a:schemeClr val="tx1"/>
+                </a:solidFill>
+              </a:rPr>
+              <a:t>Xomashyo va bozor Toshkentda, ≈35 km</a:t>
+            </a:r>
+            <a:endParaRPr lang="en-US" sz="1400" dirty="0"/>
+          </a:p>
+          <a:p>
+            <a:pPr marL="342900" indent="-342900">
+              <a:spcAft>
+                <a:spcPts val="400"/>
+              </a:spcAft>
+              <a:buSzPct val="100000"/>
+              <a:buChar char="•"/>
+            </a:pPr>
+            <a:r>
+              <a:rPr lang="en-US" sz="1400" dirty="0">
+                <a:solidFill>
+                  <a:schemeClr val="tx1"/>
+                </a:solidFill>
+              </a:rPr>
+              <a:t>TKTI yaqin; gaz, 10 kV, temir yo‘l tayyor</a:t>
+            </a:r>
+            <a:endParaRPr lang="en-US" sz="1400" dirty="0"/>
+          </a:p>
+          <a:p>
+            <a:pPr marL="342900" indent="-342900">
+              <a:spcAft>
+                <a:spcPts val="400"/>
+              </a:spcAft>
+              <a:buSzPct val="100000"/>
+              <a:buChar char="•"/>
+            </a:pPr>
+            <a:r>
+              <a:rPr lang="en-US" sz="1400" dirty="0">
+                <a:solidFill>
+                  <a:schemeClr val="tx1"/>
+                </a:solidFill>
+              </a:rPr>
+              <a:t>Zaxira variant: «Qo‘qon» EIZ (soapstok, mulcha bozori)</a:t>
+            </a:r>
+            <a:endParaRPr lang="en-US" sz="1400" dirty="0"/>
+          </a:p>
+          <a:p>
+            <a:pPr marL="342900" indent="-342900">
+              <a:spcAft>
+                <a:spcPts val="400"/>
+              </a:spcAft>
+              <a:buSzPct val="100000"/>
+              <a:buChar char="•"/>
+            </a:pPr>
+            <a:r>
+              <a:rPr lang="en-US" sz="1400" dirty="0">
+                <a:solidFill>
+                  <a:schemeClr val="tx1"/>
+                </a:solidFill>
+              </a:rPr>
+              <a:t>Qurilish zichligi 17%, 3-faza uchun 0,15 ga zaxira</a:t>
+            </a:r>
+            <a:endParaRPr lang="en-US" sz="1400" dirty="0"/>
           </a:p>
         </p:txBody>
       </p:sp>
